--- a/flutter/Module 3 Dart Foundation/Chapter 2/PPT/Chap 2-A Comprehensive Guide to Dart Programming.pptx
+++ b/flutter/Module 3 Dart Foundation/Chapter 2/PPT/Chap 2-A Comprehensive Guide to Dart Programming.pptx
@@ -5,39 +5,36 @@
     <p:sldMasterId id="2147483648" r:id="rId1"/>
   </p:sldMasterIdLst>
   <p:notesMasterIdLst>
-    <p:notesMasterId r:id="rId4"/>
+    <p:notesMasterId r:id="rId21"/>
   </p:notesMasterIdLst>
   <p:sldIdLst>
-    <p:sldId id="256" r:id="rId3"/>
-    <p:sldId id="257" r:id="rId5"/>
-    <p:sldId id="276" r:id="rId6"/>
-    <p:sldId id="258" r:id="rId7"/>
-    <p:sldId id="277" r:id="rId8"/>
-    <p:sldId id="259" r:id="rId9"/>
-    <p:sldId id="261" r:id="rId10"/>
-    <p:sldId id="262" r:id="rId11"/>
-    <p:sldId id="263" r:id="rId12"/>
-    <p:sldId id="264" r:id="rId13"/>
-    <p:sldId id="265" r:id="rId14"/>
-    <p:sldId id="266" r:id="rId15"/>
-    <p:sldId id="267" r:id="rId16"/>
-    <p:sldId id="268" r:id="rId17"/>
-    <p:sldId id="270" r:id="rId18"/>
-    <p:sldId id="269" r:id="rId19"/>
-    <p:sldId id="271" r:id="rId20"/>
-    <p:sldId id="272" r:id="rId21"/>
-    <p:sldId id="274" r:id="rId22"/>
+    <p:sldId id="256" r:id="rId2"/>
+    <p:sldId id="257" r:id="rId3"/>
+    <p:sldId id="276" r:id="rId4"/>
+    <p:sldId id="258" r:id="rId5"/>
+    <p:sldId id="277" r:id="rId6"/>
+    <p:sldId id="259" r:id="rId7"/>
+    <p:sldId id="261" r:id="rId8"/>
+    <p:sldId id="262" r:id="rId9"/>
+    <p:sldId id="263" r:id="rId10"/>
+    <p:sldId id="264" r:id="rId11"/>
+    <p:sldId id="265" r:id="rId12"/>
+    <p:sldId id="266" r:id="rId13"/>
+    <p:sldId id="267" r:id="rId14"/>
+    <p:sldId id="268" r:id="rId15"/>
+    <p:sldId id="270" r:id="rId16"/>
+    <p:sldId id="269" r:id="rId17"/>
+    <p:sldId id="271" r:id="rId18"/>
+    <p:sldId id="272" r:id="rId19"/>
+    <p:sldId id="274" r:id="rId20"/>
   </p:sldIdLst>
   <p:sldSz cx="12192000" cy="6858000"/>
   <p:notesSz cx="6858000" cy="9144000"/>
   <p:embeddedFontLst>
     <p:embeddedFont>
-      <p:font typeface="Calibri" panose="020F0502020204030204"/>
-      <p:regular r:id="rId26"/>
-    </p:embeddedFont>
-    <p:embeddedFont>
-      <p:font typeface="Microsoft YaHei" panose="020B0503020204020204" charset="-122"/>
-      <p:regular r:id="rId27"/>
+      <p:font typeface="Microsoft YaHei" panose="020B0503020204020204" pitchFamily="34" charset="-122"/>
+      <p:regular r:id="rId22"/>
+      <p:bold r:id="rId23"/>
     </p:embeddedFont>
   </p:embeddedFontLst>
   <p:defaultTextStyle>
@@ -301,7 +298,7 @@
     </p:bg>
     <p:spTree>
       <p:nvGrpSpPr>
-        <p:cNvPr id="2" name="Shape 2"/>
+        <p:cNvPr id="1" name="Shape 2"/>
         <p:cNvGrpSpPr/>
         <p:nvPr/>
       </p:nvGrpSpPr>
@@ -316,7 +313,9 @@
       <p:sp>
         <p:nvSpPr>
           <p:cNvPr id="3" name="Google Shape;3;n"/>
-          <p:cNvSpPr txBox="1"/>
+          <p:cNvSpPr txBox="1">
+            <a:spLocks noGrp="1"/>
+          </p:cNvSpPr>
           <p:nvPr>
             <p:ph type="hdr" idx="2"/>
           </p:nvPr>
@@ -574,13 +573,17 @@
               </a:defRPr>
             </a:lvl9pPr>
           </a:lstStyle>
-          <a:p/>
+          <a:p>
+            <a:endParaRPr/>
+          </a:p>
         </p:txBody>
       </p:sp>
       <p:sp>
         <p:nvSpPr>
           <p:cNvPr id="4" name="Google Shape;4;n"/>
-          <p:cNvSpPr txBox="1"/>
+          <p:cNvSpPr txBox="1">
+            <a:spLocks noGrp="1"/>
+          </p:cNvSpPr>
           <p:nvPr>
             <p:ph type="dt" idx="10"/>
           </p:nvPr>
@@ -838,13 +841,17 @@
               </a:defRPr>
             </a:lvl9pPr>
           </a:lstStyle>
-          <a:p/>
+          <a:p>
+            <a:endParaRPr/>
+          </a:p>
         </p:txBody>
       </p:sp>
       <p:sp>
         <p:nvSpPr>
           <p:cNvPr id="5" name="Google Shape;5;n"/>
-          <p:cNvSpPr/>
+          <p:cNvSpPr>
+            <a:spLocks noGrp="1" noRot="1" noChangeAspect="1"/>
+          </p:cNvSpPr>
           <p:nvPr>
             <p:ph type="sldImg" idx="3"/>
           </p:nvPr>
@@ -893,7 +900,9 @@
       <p:sp>
         <p:nvSpPr>
           <p:cNvPr id="6" name="Google Shape;6;n"/>
-          <p:cNvSpPr txBox="1"/>
+          <p:cNvSpPr txBox="1">
+            <a:spLocks noGrp="1"/>
+          </p:cNvSpPr>
           <p:nvPr>
             <p:ph type="body" idx="1"/>
           </p:nvPr>
@@ -1088,13 +1097,17 @@
               </a:defRPr>
             </a:lvl9pPr>
           </a:lstStyle>
-          <a:p/>
+          <a:p>
+            <a:endParaRPr/>
+          </a:p>
         </p:txBody>
       </p:sp>
       <p:sp>
         <p:nvSpPr>
           <p:cNvPr id="7" name="Google Shape;7;n"/>
-          <p:cNvSpPr txBox="1"/>
+          <p:cNvSpPr txBox="1">
+            <a:spLocks noGrp="1"/>
+          </p:cNvSpPr>
           <p:nvPr>
             <p:ph type="ftr" idx="11"/>
           </p:nvPr>
@@ -1352,13 +1365,17 @@
               </a:defRPr>
             </a:lvl9pPr>
           </a:lstStyle>
-          <a:p/>
+          <a:p>
+            <a:endParaRPr/>
+          </a:p>
         </p:txBody>
       </p:sp>
       <p:sp>
         <p:nvSpPr>
           <p:cNvPr id="8" name="Google Shape;8;n"/>
-          <p:cNvSpPr txBox="1"/>
+          <p:cNvSpPr txBox="1">
+            <a:spLocks noGrp="1"/>
+          </p:cNvSpPr>
           <p:nvPr>
             <p:ph type="sldNum" idx="12"/>
           </p:nvPr>
@@ -1409,6 +1426,7 @@
                 <a:cs typeface="Calibri" panose="020F0502020204030204"/>
                 <a:sym typeface="Calibri" panose="020F0502020204030204"/>
               </a:rPr>
+              <a:t>‹#›</a:t>
             </a:fld>
             <a:endParaRPr sz="1200" b="0" i="0" u="none" strike="noStrike" cap="none">
               <a:solidFill>
@@ -1658,11 +1676,11 @@
 </file>
 
 <file path=ppt/notesSlides/notesSlide1.xml><?xml version="1.0" encoding="utf-8"?>
-<p:notes xmlns:a="http://schemas.openxmlformats.org/drawingml/2006/main" xmlns:r="http://schemas.openxmlformats.org/officeDocument/2006/relationships" xmlns:p="http://schemas.openxmlformats.org/presentationml/2006/main" showMasterPhAnim="0" showMasterSp="0">
+<p:notes xmlns:a="http://schemas.openxmlformats.org/drawingml/2006/main" xmlns:r="http://schemas.openxmlformats.org/officeDocument/2006/relationships" xmlns:p="http://schemas.openxmlformats.org/presentationml/2006/main" showMasterSp="0" showMasterPhAnim="0">
   <p:cSld>
     <p:spTree>
       <p:nvGrpSpPr>
-        <p:cNvPr id="25" name="Shape 25"/>
+        <p:cNvPr id="1" name="Shape 25"/>
         <p:cNvGrpSpPr/>
         <p:nvPr/>
       </p:nvGrpSpPr>
@@ -1677,7 +1695,9 @@
       <p:sp>
         <p:nvSpPr>
           <p:cNvPr id="26" name="Google Shape;26;p1:notes"/>
-          <p:cNvSpPr/>
+          <p:cNvSpPr>
+            <a:spLocks noGrp="1" noRot="1" noChangeAspect="1"/>
+          </p:cNvSpPr>
           <p:nvPr>
             <p:ph type="sldImg" idx="2"/>
           </p:nvPr>
@@ -1726,7 +1746,9 @@
       <p:sp>
         <p:nvSpPr>
           <p:cNvPr id="27" name="Google Shape;27;p1:notes"/>
-          <p:cNvSpPr txBox="1"/>
+          <p:cNvSpPr txBox="1">
+            <a:spLocks noGrp="1"/>
+          </p:cNvSpPr>
           <p:nvPr>
             <p:ph type="body" idx="1"/>
           </p:nvPr>
@@ -1763,7 +1785,6 @@
               <a:rPr lang="en-US"/>
               <a:t>This presentation will provide a comprehensive overview of Dart programming, covering object-oriented principles, functional concepts, error management, code optimization, and package utilization.</a:t>
             </a:r>
-            <a:endParaRPr lang="en-US"/>
           </a:p>
         </p:txBody>
       </p:sp>
@@ -1776,11 +1797,11 @@
 </file>
 
 <file path=ppt/notesSlides/notesSlide10.xml><?xml version="1.0" encoding="utf-8"?>
-<p:notes xmlns:a="http://schemas.openxmlformats.org/drawingml/2006/main" xmlns:r="http://schemas.openxmlformats.org/officeDocument/2006/relationships" xmlns:p="http://schemas.openxmlformats.org/presentationml/2006/main" showMasterPhAnim="0" showMasterSp="0">
+<p:notes xmlns:a="http://schemas.openxmlformats.org/drawingml/2006/main" xmlns:r="http://schemas.openxmlformats.org/officeDocument/2006/relationships" xmlns:p="http://schemas.openxmlformats.org/presentationml/2006/main" showMasterSp="0" showMasterPhAnim="0">
   <p:cSld>
     <p:spTree>
       <p:nvGrpSpPr>
-        <p:cNvPr id="141" name="Shape 141"/>
+        <p:cNvPr id="1" name="Shape 141"/>
         <p:cNvGrpSpPr/>
         <p:nvPr/>
       </p:nvGrpSpPr>
@@ -1795,7 +1816,9 @@
       <p:sp>
         <p:nvSpPr>
           <p:cNvPr id="142" name="Google Shape;142;p9:notes"/>
-          <p:cNvSpPr/>
+          <p:cNvSpPr>
+            <a:spLocks noGrp="1" noRot="1" noChangeAspect="1"/>
+          </p:cNvSpPr>
           <p:nvPr>
             <p:ph type="sldImg" idx="2"/>
           </p:nvPr>
@@ -1844,7 +1867,9 @@
       <p:sp>
         <p:nvSpPr>
           <p:cNvPr id="143" name="Google Shape;143;p9:notes"/>
-          <p:cNvSpPr txBox="1"/>
+          <p:cNvSpPr txBox="1">
+            <a:spLocks noGrp="1"/>
+          </p:cNvSpPr>
           <p:nvPr>
             <p:ph type="body" idx="1"/>
           </p:nvPr>
@@ -1901,6 +1926,11 @@
               </a:spcAft>
               <a:buNone/>
             </a:pPr>
+            <a:endParaRPr>
+              <a:solidFill>
+                <a:srgbClr val="DFBB64"/>
+              </a:solidFill>
+            </a:endParaRPr>
           </a:p>
         </p:txBody>
       </p:sp>
@@ -1913,11 +1943,11 @@
 </file>
 
 <file path=ppt/notesSlides/notesSlide11.xml><?xml version="1.0" encoding="utf-8"?>
-<p:notes xmlns:a="http://schemas.openxmlformats.org/drawingml/2006/main" xmlns:r="http://schemas.openxmlformats.org/officeDocument/2006/relationships" xmlns:p="http://schemas.openxmlformats.org/presentationml/2006/main" showMasterPhAnim="0" showMasterSp="0">
+<p:notes xmlns:a="http://schemas.openxmlformats.org/drawingml/2006/main" xmlns:r="http://schemas.openxmlformats.org/officeDocument/2006/relationships" xmlns:p="http://schemas.openxmlformats.org/presentationml/2006/main" showMasterSp="0" showMasterPhAnim="0">
   <p:cSld>
     <p:spTree>
       <p:nvGrpSpPr>
-        <p:cNvPr id="155" name="Shape 155"/>
+        <p:cNvPr id="1" name="Shape 155"/>
         <p:cNvGrpSpPr/>
         <p:nvPr/>
       </p:nvGrpSpPr>
@@ -1932,7 +1962,9 @@
       <p:sp>
         <p:nvSpPr>
           <p:cNvPr id="156" name="Google Shape;156;p10:notes"/>
-          <p:cNvSpPr/>
+          <p:cNvSpPr>
+            <a:spLocks noGrp="1" noRot="1" noChangeAspect="1"/>
+          </p:cNvSpPr>
           <p:nvPr>
             <p:ph type="sldImg" idx="2"/>
           </p:nvPr>
@@ -1981,7 +2013,9 @@
       <p:sp>
         <p:nvSpPr>
           <p:cNvPr id="157" name="Google Shape;157;p10:notes"/>
-          <p:cNvSpPr txBox="1"/>
+          <p:cNvSpPr txBox="1">
+            <a:spLocks noGrp="1"/>
+          </p:cNvSpPr>
           <p:nvPr>
             <p:ph type="body" idx="1"/>
           </p:nvPr>
@@ -2038,6 +2072,11 @@
               </a:spcAft>
               <a:buNone/>
             </a:pPr>
+            <a:endParaRPr>
+              <a:solidFill>
+                <a:srgbClr val="DFBB64"/>
+              </a:solidFill>
+            </a:endParaRPr>
           </a:p>
         </p:txBody>
       </p:sp>
@@ -2050,11 +2089,11 @@
 </file>
 
 <file path=ppt/notesSlides/notesSlide12.xml><?xml version="1.0" encoding="utf-8"?>
-<p:notes xmlns:a="http://schemas.openxmlformats.org/drawingml/2006/main" xmlns:r="http://schemas.openxmlformats.org/officeDocument/2006/relationships" xmlns:p="http://schemas.openxmlformats.org/presentationml/2006/main" showMasterPhAnim="0" showMasterSp="0">
+<p:notes xmlns:a="http://schemas.openxmlformats.org/drawingml/2006/main" xmlns:r="http://schemas.openxmlformats.org/officeDocument/2006/relationships" xmlns:p="http://schemas.openxmlformats.org/presentationml/2006/main" showMasterSp="0" showMasterPhAnim="0">
   <p:cSld>
     <p:spTree>
       <p:nvGrpSpPr>
-        <p:cNvPr id="169" name="Shape 169"/>
+        <p:cNvPr id="1" name="Shape 169"/>
         <p:cNvGrpSpPr/>
         <p:nvPr/>
       </p:nvGrpSpPr>
@@ -2069,7 +2108,9 @@
       <p:sp>
         <p:nvSpPr>
           <p:cNvPr id="170" name="Google Shape;170;p11:notes"/>
-          <p:cNvSpPr/>
+          <p:cNvSpPr>
+            <a:spLocks noGrp="1" noRot="1" noChangeAspect="1"/>
+          </p:cNvSpPr>
           <p:nvPr>
             <p:ph type="sldImg" idx="2"/>
           </p:nvPr>
@@ -2118,7 +2159,9 @@
       <p:sp>
         <p:nvSpPr>
           <p:cNvPr id="171" name="Google Shape;171;p11:notes"/>
-          <p:cNvSpPr txBox="1"/>
+          <p:cNvSpPr txBox="1">
+            <a:spLocks noGrp="1"/>
+          </p:cNvSpPr>
           <p:nvPr>
             <p:ph type="body" idx="1"/>
           </p:nvPr>
@@ -2155,7 +2198,6 @@
               <a:rPr lang="en-US"/>
               <a:t>Getters and setters are used to access and modify the private fields of a class, respectively. They provide controlled access to the fields.</a:t>
             </a:r>
-            <a:endParaRPr lang="en-US"/>
           </a:p>
         </p:txBody>
       </p:sp>
@@ -2168,11 +2210,11 @@
 </file>
 
 <file path=ppt/notesSlides/notesSlide13.xml><?xml version="1.0" encoding="utf-8"?>
-<p:notes xmlns:a="http://schemas.openxmlformats.org/drawingml/2006/main" xmlns:r="http://schemas.openxmlformats.org/officeDocument/2006/relationships" xmlns:p="http://schemas.openxmlformats.org/presentationml/2006/main" showMasterPhAnim="0" showMasterSp="0">
+<p:notes xmlns:a="http://schemas.openxmlformats.org/drawingml/2006/main" xmlns:r="http://schemas.openxmlformats.org/officeDocument/2006/relationships" xmlns:p="http://schemas.openxmlformats.org/presentationml/2006/main" showMasterSp="0" showMasterPhAnim="0">
   <p:cSld>
     <p:spTree>
       <p:nvGrpSpPr>
-        <p:cNvPr id="183" name="Shape 183"/>
+        <p:cNvPr id="1" name="Shape 183"/>
         <p:cNvGrpSpPr/>
         <p:nvPr/>
       </p:nvGrpSpPr>
@@ -2187,7 +2229,9 @@
       <p:sp>
         <p:nvSpPr>
           <p:cNvPr id="184" name="Google Shape;184;p12:notes"/>
-          <p:cNvSpPr/>
+          <p:cNvSpPr>
+            <a:spLocks noGrp="1" noRot="1" noChangeAspect="1"/>
+          </p:cNvSpPr>
           <p:nvPr>
             <p:ph type="sldImg" idx="2"/>
           </p:nvPr>
@@ -2236,7 +2280,9 @@
       <p:sp>
         <p:nvSpPr>
           <p:cNvPr id="185" name="Google Shape;185;p12:notes"/>
-          <p:cNvSpPr txBox="1"/>
+          <p:cNvSpPr txBox="1">
+            <a:spLocks noGrp="1"/>
+          </p:cNvSpPr>
           <p:nvPr>
             <p:ph type="body" idx="1"/>
           </p:nvPr>
@@ -2270,10 +2316,9 @@
               <a:buNone/>
             </a:pPr>
             <a:r>
-              <a:rPr lang="en-US"/>
+              <a:rPr lang="en-US" dirty="0"/>
               <a:t>Inheritance allows a class to be defined that has a certain set of characteristics (fields, methods) and then other classes to be created that are derived from that class.</a:t>
             </a:r>
-            <a:endParaRPr lang="en-US"/>
           </a:p>
         </p:txBody>
       </p:sp>
@@ -2286,11 +2331,11 @@
 </file>
 
 <file path=ppt/notesSlides/notesSlide14.xml><?xml version="1.0" encoding="utf-8"?>
-<p:notes xmlns:a="http://schemas.openxmlformats.org/drawingml/2006/main" xmlns:r="http://schemas.openxmlformats.org/officeDocument/2006/relationships" xmlns:p="http://schemas.openxmlformats.org/presentationml/2006/main" showMasterPhAnim="0" showMasterSp="0">
+<p:notes xmlns:a="http://schemas.openxmlformats.org/drawingml/2006/main" xmlns:r="http://schemas.openxmlformats.org/officeDocument/2006/relationships" xmlns:p="http://schemas.openxmlformats.org/presentationml/2006/main" showMasterSp="0" showMasterPhAnim="0">
   <p:cSld>
     <p:spTree>
       <p:nvGrpSpPr>
-        <p:cNvPr id="197" name="Shape 197"/>
+        <p:cNvPr id="1" name="Shape 197"/>
         <p:cNvGrpSpPr/>
         <p:nvPr/>
       </p:nvGrpSpPr>
@@ -2305,7 +2350,9 @@
       <p:sp>
         <p:nvSpPr>
           <p:cNvPr id="198" name="Google Shape;198;p13:notes"/>
-          <p:cNvSpPr/>
+          <p:cNvSpPr>
+            <a:spLocks noGrp="1" noRot="1" noChangeAspect="1"/>
+          </p:cNvSpPr>
           <p:nvPr>
             <p:ph type="sldImg" idx="2"/>
           </p:nvPr>
@@ -2354,7 +2401,9 @@
       <p:sp>
         <p:nvSpPr>
           <p:cNvPr id="199" name="Google Shape;199;p13:notes"/>
-          <p:cNvSpPr txBox="1"/>
+          <p:cNvSpPr txBox="1">
+            <a:spLocks noGrp="1"/>
+          </p:cNvSpPr>
           <p:nvPr>
             <p:ph type="body" idx="1"/>
           </p:nvPr>
@@ -2387,6 +2436,7 @@
               </a:spcAft>
               <a:buNone/>
             </a:pPr>
+            <a:endParaRPr/>
           </a:p>
         </p:txBody>
       </p:sp>
@@ -2399,11 +2449,11 @@
 </file>
 
 <file path=ppt/notesSlides/notesSlide15.xml><?xml version="1.0" encoding="utf-8"?>
-<p:notes xmlns:a="http://schemas.openxmlformats.org/drawingml/2006/main" xmlns:r="http://schemas.openxmlformats.org/officeDocument/2006/relationships" xmlns:p="http://schemas.openxmlformats.org/presentationml/2006/main" showMasterPhAnim="0" showMasterSp="0">
+<p:notes xmlns:a="http://schemas.openxmlformats.org/drawingml/2006/main" xmlns:r="http://schemas.openxmlformats.org/officeDocument/2006/relationships" xmlns:p="http://schemas.openxmlformats.org/presentationml/2006/main" showMasterSp="0" showMasterPhAnim="0">
   <p:cSld>
     <p:spTree>
       <p:nvGrpSpPr>
-        <p:cNvPr id="226" name="Shape 226"/>
+        <p:cNvPr id="1" name="Shape 226"/>
         <p:cNvGrpSpPr/>
         <p:nvPr/>
       </p:nvGrpSpPr>
@@ -2418,7 +2468,9 @@
       <p:sp>
         <p:nvSpPr>
           <p:cNvPr id="227" name="Google Shape;227;p15:notes"/>
-          <p:cNvSpPr/>
+          <p:cNvSpPr>
+            <a:spLocks noGrp="1" noRot="1" noChangeAspect="1"/>
+          </p:cNvSpPr>
           <p:nvPr>
             <p:ph type="sldImg" idx="2"/>
           </p:nvPr>
@@ -2467,7 +2519,9 @@
       <p:sp>
         <p:nvSpPr>
           <p:cNvPr id="228" name="Google Shape;228;p15:notes"/>
-          <p:cNvSpPr txBox="1"/>
+          <p:cNvSpPr txBox="1">
+            <a:spLocks noGrp="1"/>
+          </p:cNvSpPr>
           <p:nvPr>
             <p:ph type="body" idx="1"/>
           </p:nvPr>
@@ -2504,7 +2558,6 @@
               <a:rPr lang="en-US"/>
               <a:t>Abstraction means dealing with the level of detail that is most appropriate to a task, and it often involves creating abstract classes that can't be instantiated on their own. These abstract classes are meant to be subclassed by other classes that provide concrete implementations of the abstract methods. Dart provides the abstract keyword to define abstract classes and methods.</a:t>
             </a:r>
-            <a:endParaRPr lang="en-US"/>
           </a:p>
         </p:txBody>
       </p:sp>
@@ -2517,11 +2570,11 @@
 </file>
 
 <file path=ppt/notesSlides/notesSlide16.xml><?xml version="1.0" encoding="utf-8"?>
-<p:notes xmlns:a="http://schemas.openxmlformats.org/drawingml/2006/main" xmlns:r="http://schemas.openxmlformats.org/officeDocument/2006/relationships" xmlns:p="http://schemas.openxmlformats.org/presentationml/2006/main" showMasterPhAnim="0" showMasterSp="0">
+<p:notes xmlns:a="http://schemas.openxmlformats.org/drawingml/2006/main" xmlns:r="http://schemas.openxmlformats.org/officeDocument/2006/relationships" xmlns:p="http://schemas.openxmlformats.org/presentationml/2006/main" showMasterSp="0" showMasterPhAnim="0">
   <p:cSld>
     <p:spTree>
       <p:nvGrpSpPr>
-        <p:cNvPr id="212" name="Shape 212"/>
+        <p:cNvPr id="1" name="Shape 212"/>
         <p:cNvGrpSpPr/>
         <p:nvPr/>
       </p:nvGrpSpPr>
@@ -2536,7 +2589,9 @@
       <p:sp>
         <p:nvSpPr>
           <p:cNvPr id="213" name="Google Shape;213;p14:notes"/>
-          <p:cNvSpPr/>
+          <p:cNvSpPr>
+            <a:spLocks noGrp="1" noRot="1" noChangeAspect="1"/>
+          </p:cNvSpPr>
           <p:nvPr>
             <p:ph type="sldImg" idx="2"/>
           </p:nvPr>
@@ -2585,7 +2640,9 @@
       <p:sp>
         <p:nvSpPr>
           <p:cNvPr id="214" name="Google Shape;214;p14:notes"/>
-          <p:cNvSpPr txBox="1"/>
+          <p:cNvSpPr txBox="1">
+            <a:spLocks noGrp="1"/>
+          </p:cNvSpPr>
           <p:nvPr>
             <p:ph type="body" idx="1"/>
           </p:nvPr>
@@ -2622,7 +2679,6 @@
               <a:rPr lang="en-US"/>
               <a:t>Polymorphism in Dart refers to the ability of objects of different classes to be treated as objects of a common superclass.</a:t>
             </a:r>
-            <a:endParaRPr lang="en-US"/>
           </a:p>
         </p:txBody>
       </p:sp>
@@ -2635,11 +2691,11 @@
 </file>
 
 <file path=ppt/notesSlides/notesSlide17.xml><?xml version="1.0" encoding="utf-8"?>
-<p:notes xmlns:a="http://schemas.openxmlformats.org/drawingml/2006/main" xmlns:r="http://schemas.openxmlformats.org/officeDocument/2006/relationships" xmlns:p="http://schemas.openxmlformats.org/presentationml/2006/main" showMasterPhAnim="0" showMasterSp="0">
+<p:notes xmlns:a="http://schemas.openxmlformats.org/drawingml/2006/main" xmlns:r="http://schemas.openxmlformats.org/officeDocument/2006/relationships" xmlns:p="http://schemas.openxmlformats.org/presentationml/2006/main" showMasterSp="0" showMasterPhAnim="0">
   <p:cSld>
     <p:spTree>
       <p:nvGrpSpPr>
-        <p:cNvPr id="240" name="Shape 240"/>
+        <p:cNvPr id="1" name="Shape 240"/>
         <p:cNvGrpSpPr/>
         <p:nvPr/>
       </p:nvGrpSpPr>
@@ -2654,7 +2710,9 @@
       <p:sp>
         <p:nvSpPr>
           <p:cNvPr id="241" name="Google Shape;241;p16:notes"/>
-          <p:cNvSpPr/>
+          <p:cNvSpPr>
+            <a:spLocks noGrp="1" noRot="1" noChangeAspect="1"/>
+          </p:cNvSpPr>
           <p:nvPr>
             <p:ph type="sldImg" idx="2"/>
           </p:nvPr>
@@ -2703,7 +2761,9 @@
       <p:sp>
         <p:nvSpPr>
           <p:cNvPr id="242" name="Google Shape;242;p16:notes"/>
-          <p:cNvSpPr txBox="1"/>
+          <p:cNvSpPr txBox="1">
+            <a:spLocks noGrp="1"/>
+          </p:cNvSpPr>
           <p:nvPr>
             <p:ph type="body" idx="1"/>
           </p:nvPr>
@@ -2736,6 +2796,7 @@
               </a:spcAft>
               <a:buNone/>
             </a:pPr>
+            <a:endParaRPr/>
           </a:p>
         </p:txBody>
       </p:sp>
@@ -2748,11 +2809,11 @@
 </file>
 
 <file path=ppt/notesSlides/notesSlide18.xml><?xml version="1.0" encoding="utf-8"?>
-<p:notes xmlns:a="http://schemas.openxmlformats.org/drawingml/2006/main" xmlns:r="http://schemas.openxmlformats.org/officeDocument/2006/relationships" xmlns:p="http://schemas.openxmlformats.org/presentationml/2006/main" showMasterPhAnim="0" showMasterSp="0">
+<p:notes xmlns:a="http://schemas.openxmlformats.org/drawingml/2006/main" xmlns:r="http://schemas.openxmlformats.org/officeDocument/2006/relationships" xmlns:p="http://schemas.openxmlformats.org/presentationml/2006/main" showMasterSp="0" showMasterPhAnim="0">
   <p:cSld>
     <p:spTree>
       <p:nvGrpSpPr>
-        <p:cNvPr id="254" name="Shape 254"/>
+        <p:cNvPr id="1" name="Shape 254"/>
         <p:cNvGrpSpPr/>
         <p:nvPr/>
       </p:nvGrpSpPr>
@@ -2767,7 +2828,9 @@
       <p:sp>
         <p:nvSpPr>
           <p:cNvPr id="255" name="Google Shape;255;p17:notes"/>
-          <p:cNvSpPr/>
+          <p:cNvSpPr>
+            <a:spLocks noGrp="1" noRot="1" noChangeAspect="1"/>
+          </p:cNvSpPr>
           <p:nvPr>
             <p:ph type="sldImg" idx="2"/>
           </p:nvPr>
@@ -2816,7 +2879,9 @@
       <p:sp>
         <p:nvSpPr>
           <p:cNvPr id="256" name="Google Shape;256;p17:notes"/>
-          <p:cNvSpPr txBox="1"/>
+          <p:cNvSpPr txBox="1">
+            <a:spLocks noGrp="1"/>
+          </p:cNvSpPr>
           <p:nvPr>
             <p:ph type="body" idx="1"/>
           </p:nvPr>
@@ -2853,7 +2918,6 @@
               <a:rPr lang="en-US"/>
               <a:t> Writing clean and maintainable code is important for any programmer. It makes your code easier to understand, debug, and modify. There are a number of best practices for writing clean Dart code, such as using consistent naming conventions, proper commenting, and avoiding unnecessary complexity.</a:t>
             </a:r>
-            <a:endParaRPr lang="en-US"/>
           </a:p>
         </p:txBody>
       </p:sp>
@@ -2866,11 +2930,11 @@
 </file>
 
 <file path=ppt/notesSlides/notesSlide19.xml><?xml version="1.0" encoding="utf-8"?>
-<p:notes xmlns:a="http://schemas.openxmlformats.org/drawingml/2006/main" xmlns:r="http://schemas.openxmlformats.org/officeDocument/2006/relationships" xmlns:p="http://schemas.openxmlformats.org/presentationml/2006/main" showMasterPhAnim="0" showMasterSp="0">
+<p:notes xmlns:a="http://schemas.openxmlformats.org/drawingml/2006/main" xmlns:r="http://schemas.openxmlformats.org/officeDocument/2006/relationships" xmlns:p="http://schemas.openxmlformats.org/presentationml/2006/main" showMasterSp="0" showMasterPhAnim="0">
   <p:cSld>
     <p:spTree>
       <p:nvGrpSpPr>
-        <p:cNvPr id="289" name="Shape 289"/>
+        <p:cNvPr id="1" name="Shape 289"/>
         <p:cNvGrpSpPr/>
         <p:nvPr/>
       </p:nvGrpSpPr>
@@ -2885,7 +2949,9 @@
       <p:sp>
         <p:nvSpPr>
           <p:cNvPr id="290" name="Google Shape;290;p19:notes"/>
-          <p:cNvSpPr/>
+          <p:cNvSpPr>
+            <a:spLocks noGrp="1" noRot="1" noChangeAspect="1"/>
+          </p:cNvSpPr>
           <p:nvPr>
             <p:ph type="sldImg" idx="2"/>
           </p:nvPr>
@@ -2934,7 +3000,9 @@
       <p:sp>
         <p:nvSpPr>
           <p:cNvPr id="291" name="Google Shape;291;p19:notes"/>
-          <p:cNvSpPr txBox="1"/>
+          <p:cNvSpPr txBox="1">
+            <a:spLocks noGrp="1"/>
+          </p:cNvSpPr>
           <p:nvPr>
             <p:ph type="body" idx="1"/>
           </p:nvPr>
@@ -2971,7 +3039,6 @@
               <a:rPr lang="en-US"/>
               <a:t>This presentation has provided a comprehensive overview of Dart programming, covering various essential concepts and practices. Remember that Dart is a continuously evolving language with new features and improvements being introduced regularly. Stay updated with the latest developments and continue to explore its capabilities to become a proficient Dart developer.</a:t>
             </a:r>
-            <a:endParaRPr lang="en-US"/>
           </a:p>
         </p:txBody>
       </p:sp>
@@ -2984,11 +3051,11 @@
 </file>
 
 <file path=ppt/notesSlides/notesSlide2.xml><?xml version="1.0" encoding="utf-8"?>
-<p:notes xmlns:a="http://schemas.openxmlformats.org/drawingml/2006/main" xmlns:r="http://schemas.openxmlformats.org/officeDocument/2006/relationships" xmlns:p="http://schemas.openxmlformats.org/presentationml/2006/main" showMasterPhAnim="0" showMasterSp="0">
+<p:notes xmlns:a="http://schemas.openxmlformats.org/drawingml/2006/main" xmlns:r="http://schemas.openxmlformats.org/officeDocument/2006/relationships" xmlns:p="http://schemas.openxmlformats.org/presentationml/2006/main" showMasterSp="0" showMasterPhAnim="0">
   <p:cSld>
     <p:spTree>
       <p:nvGrpSpPr>
-        <p:cNvPr id="37" name="Shape 37"/>
+        <p:cNvPr id="1" name="Shape 37"/>
         <p:cNvGrpSpPr/>
         <p:nvPr/>
       </p:nvGrpSpPr>
@@ -3003,7 +3070,9 @@
       <p:sp>
         <p:nvSpPr>
           <p:cNvPr id="38" name="Google Shape;38;p2:notes"/>
-          <p:cNvSpPr/>
+          <p:cNvSpPr>
+            <a:spLocks noGrp="1" noRot="1" noChangeAspect="1"/>
+          </p:cNvSpPr>
           <p:nvPr>
             <p:ph type="sldImg" idx="2"/>
           </p:nvPr>
@@ -3052,7 +3121,9 @@
       <p:sp>
         <p:nvSpPr>
           <p:cNvPr id="39" name="Google Shape;39;p2:notes"/>
-          <p:cNvSpPr txBox="1"/>
+          <p:cNvSpPr txBox="1">
+            <a:spLocks noGrp="1"/>
+          </p:cNvSpPr>
           <p:nvPr>
             <p:ph type="body" idx="1"/>
           </p:nvPr>
@@ -3089,7 +3160,6 @@
               <a:rPr lang="en-US"/>
               <a:t>Object-oriented programming (OOP) is a fundamental paradigm in Dart. Classes act as templates for creating objects, encapsulating data and functionality. Inheritance allows code reuse and creates relationships between classes. Polymorphism enables flexible method calls, making code more adaptable. Understanding class members like properties, methods, and constructors is essential for building well-structured and reusable Dart applications.</a:t>
             </a:r>
-            <a:endParaRPr lang="en-US"/>
           </a:p>
         </p:txBody>
       </p:sp>
@@ -3102,11 +3172,11 @@
 </file>
 
 <file path=ppt/notesSlides/notesSlide3.xml><?xml version="1.0" encoding="utf-8"?>
-<p:notes xmlns:a="http://schemas.openxmlformats.org/drawingml/2006/main" xmlns:r="http://schemas.openxmlformats.org/officeDocument/2006/relationships" xmlns:p="http://schemas.openxmlformats.org/presentationml/2006/main" showMasterPhAnim="0" showMasterSp="0">
+<p:notes xmlns:a="http://schemas.openxmlformats.org/drawingml/2006/main" xmlns:r="http://schemas.openxmlformats.org/officeDocument/2006/relationships" xmlns:p="http://schemas.openxmlformats.org/presentationml/2006/main" showMasterSp="0" showMasterPhAnim="0">
   <p:cSld>
     <p:spTree>
       <p:nvGrpSpPr>
-        <p:cNvPr id="37" name="Shape 37"/>
+        <p:cNvPr id="1" name="Shape 37"/>
         <p:cNvGrpSpPr/>
         <p:nvPr/>
       </p:nvGrpSpPr>
@@ -3121,7 +3191,9 @@
       <p:sp>
         <p:nvSpPr>
           <p:cNvPr id="38" name="Google Shape;38;p2:notes"/>
-          <p:cNvSpPr/>
+          <p:cNvSpPr>
+            <a:spLocks noGrp="1" noRot="1" noChangeAspect="1"/>
+          </p:cNvSpPr>
           <p:nvPr>
             <p:ph type="sldImg" idx="2"/>
           </p:nvPr>
@@ -3170,7 +3242,9 @@
       <p:sp>
         <p:nvSpPr>
           <p:cNvPr id="39" name="Google Shape;39;p2:notes"/>
-          <p:cNvSpPr txBox="1"/>
+          <p:cNvSpPr txBox="1">
+            <a:spLocks noGrp="1"/>
+          </p:cNvSpPr>
           <p:nvPr>
             <p:ph type="body" idx="1"/>
           </p:nvPr>
@@ -3207,7 +3281,6 @@
               <a:rPr lang="en-US"/>
               <a:t>Object-oriented programming (OOP) is a fundamental paradigm in Dart. Classes act as templates for creating objects, encapsulating data and functionality. Inheritance allows code reuse and creates relationships between classes. Polymorphism enables flexible method calls, making code more adaptable. Understanding class members like properties, methods, and constructors is essential for building well-structured and reusable Dart applications.</a:t>
             </a:r>
-            <a:endParaRPr lang="en-US"/>
           </a:p>
         </p:txBody>
       </p:sp>
@@ -3220,11 +3293,11 @@
 </file>
 
 <file path=ppt/notesSlides/notesSlide4.xml><?xml version="1.0" encoding="utf-8"?>
-<p:notes xmlns:a="http://schemas.openxmlformats.org/drawingml/2006/main" xmlns:r="http://schemas.openxmlformats.org/officeDocument/2006/relationships" xmlns:p="http://schemas.openxmlformats.org/presentationml/2006/main" showMasterPhAnim="0" showMasterSp="0">
+<p:notes xmlns:a="http://schemas.openxmlformats.org/drawingml/2006/main" xmlns:r="http://schemas.openxmlformats.org/officeDocument/2006/relationships" xmlns:p="http://schemas.openxmlformats.org/presentationml/2006/main" showMasterSp="0" showMasterPhAnim="0">
   <p:cSld>
     <p:spTree>
       <p:nvGrpSpPr>
-        <p:cNvPr id="50" name="Shape 50"/>
+        <p:cNvPr id="1" name="Shape 50"/>
         <p:cNvGrpSpPr/>
         <p:nvPr/>
       </p:nvGrpSpPr>
@@ -3239,7 +3312,9 @@
       <p:sp>
         <p:nvSpPr>
           <p:cNvPr id="51" name="Google Shape;51;p3:notes"/>
-          <p:cNvSpPr/>
+          <p:cNvSpPr>
+            <a:spLocks noGrp="1" noRot="1" noChangeAspect="1"/>
+          </p:cNvSpPr>
           <p:nvPr>
             <p:ph type="sldImg" idx="2"/>
           </p:nvPr>
@@ -3288,7 +3363,9 @@
       <p:sp>
         <p:nvSpPr>
           <p:cNvPr id="52" name="Google Shape;52;p3:notes"/>
-          <p:cNvSpPr txBox="1"/>
+          <p:cNvSpPr txBox="1">
+            <a:spLocks noGrp="1"/>
+          </p:cNvSpPr>
           <p:nvPr>
             <p:ph type="body" idx="1"/>
           </p:nvPr>
@@ -3325,7 +3402,6 @@
               <a:rPr lang="en-US"/>
               <a:t>A class in terms of Oops is the blueprint of objects.</a:t>
             </a:r>
-            <a:endParaRPr lang="en-US"/>
           </a:p>
           <a:p>
             <a:pPr marL="0" lvl="0" indent="0" algn="l" rtl="0">
@@ -3341,7 +3417,6 @@
               <a:rPr lang="en-US"/>
               <a:t>Fields : a field is any variable declared inside a class. A field represent data pertaining to objects.</a:t>
             </a:r>
-            <a:endParaRPr lang="en-US"/>
           </a:p>
           <a:p>
             <a:pPr marL="0" lvl="0" indent="0" algn="l" rtl="0">
@@ -3357,7 +3432,6 @@
               <a:rPr lang="en-US"/>
               <a:t>Functions :  functions refers to the action an object can take. It can also be called as methods.</a:t>
             </a:r>
-            <a:endParaRPr lang="en-US"/>
           </a:p>
           <a:p>
             <a:pPr marL="0" lvl="0" indent="0" algn="l" rtl="0">
@@ -3373,7 +3447,6 @@
               <a:rPr lang="en-US"/>
               <a:t>Constructors :  responsible for allocating memory to new objects.</a:t>
             </a:r>
-            <a:endParaRPr lang="en-US"/>
           </a:p>
           <a:p>
             <a:pPr marL="0" lvl="0" indent="0" algn="l" rtl="0">
@@ -3389,7 +3462,6 @@
               <a:rPr lang="en-US"/>
               <a:t>Setters/Getters : Allows the program to initialize and retrieve the values of the fields of a class. A default getter/ setter is associated with every class. However, the default ones can be overridden by explicitly defining a setter/ getter.</a:t>
             </a:r>
-            <a:endParaRPr lang="en-US"/>
           </a:p>
         </p:txBody>
       </p:sp>
@@ -3402,11 +3474,11 @@
 </file>
 
 <file path=ppt/notesSlides/notesSlide5.xml><?xml version="1.0" encoding="utf-8"?>
-<p:notes xmlns:a="http://schemas.openxmlformats.org/drawingml/2006/main" xmlns:r="http://schemas.openxmlformats.org/officeDocument/2006/relationships" xmlns:p="http://schemas.openxmlformats.org/presentationml/2006/main" showMasterPhAnim="0" showMasterSp="0">
+<p:notes xmlns:a="http://schemas.openxmlformats.org/drawingml/2006/main" xmlns:r="http://schemas.openxmlformats.org/officeDocument/2006/relationships" xmlns:p="http://schemas.openxmlformats.org/presentationml/2006/main" showMasterSp="0" showMasterPhAnim="0">
   <p:cSld>
     <p:spTree>
       <p:nvGrpSpPr>
-        <p:cNvPr id="50" name="Shape 50"/>
+        <p:cNvPr id="1" name="Shape 50"/>
         <p:cNvGrpSpPr/>
         <p:nvPr/>
       </p:nvGrpSpPr>
@@ -3421,7 +3493,9 @@
       <p:sp>
         <p:nvSpPr>
           <p:cNvPr id="51" name="Google Shape;51;p3:notes"/>
-          <p:cNvSpPr/>
+          <p:cNvSpPr>
+            <a:spLocks noGrp="1" noRot="1" noChangeAspect="1"/>
+          </p:cNvSpPr>
           <p:nvPr>
             <p:ph type="sldImg" idx="2"/>
           </p:nvPr>
@@ -3470,7 +3544,9 @@
       <p:sp>
         <p:nvSpPr>
           <p:cNvPr id="52" name="Google Shape;52;p3:notes"/>
-          <p:cNvSpPr txBox="1"/>
+          <p:cNvSpPr txBox="1">
+            <a:spLocks noGrp="1"/>
+          </p:cNvSpPr>
           <p:nvPr>
             <p:ph type="body" idx="1"/>
           </p:nvPr>
@@ -3507,7 +3583,6 @@
               <a:rPr lang="en-US"/>
               <a:t>A class in terms of Oops is the blueprint of objects.</a:t>
             </a:r>
-            <a:endParaRPr lang="en-US"/>
           </a:p>
           <a:p>
             <a:pPr marL="0" lvl="0" indent="0" algn="l" rtl="0">
@@ -3523,7 +3598,6 @@
               <a:rPr lang="en-US"/>
               <a:t>Fields : a field is any variable declared inside a class. A field represent data pertaining to objects.</a:t>
             </a:r>
-            <a:endParaRPr lang="en-US"/>
           </a:p>
           <a:p>
             <a:pPr marL="0" lvl="0" indent="0" algn="l" rtl="0">
@@ -3539,7 +3613,6 @@
               <a:rPr lang="en-US"/>
               <a:t>Functions :  functions refers to the action an object can take. It can also be called as methods.</a:t>
             </a:r>
-            <a:endParaRPr lang="en-US"/>
           </a:p>
           <a:p>
             <a:pPr marL="0" lvl="0" indent="0" algn="l" rtl="0">
@@ -3555,7 +3628,6 @@
               <a:rPr lang="en-US"/>
               <a:t>Constructors :  responsible for allocating memory to new objects.</a:t>
             </a:r>
-            <a:endParaRPr lang="en-US"/>
           </a:p>
           <a:p>
             <a:pPr marL="0" lvl="0" indent="0" algn="l" rtl="0">
@@ -3571,7 +3643,6 @@
               <a:rPr lang="en-US"/>
               <a:t>Setters/Getters : Allows the program to initialize and retrieve the values of the fields of a class. A default getter/ setter is associated with every class. However, the default ones can be overridden by explicitly defining a setter/ getter.</a:t>
             </a:r>
-            <a:endParaRPr lang="en-US"/>
           </a:p>
         </p:txBody>
       </p:sp>
@@ -3584,11 +3655,11 @@
 </file>
 
 <file path=ppt/notesSlides/notesSlide6.xml><?xml version="1.0" encoding="utf-8"?>
-<p:notes xmlns:a="http://schemas.openxmlformats.org/drawingml/2006/main" xmlns:r="http://schemas.openxmlformats.org/officeDocument/2006/relationships" xmlns:p="http://schemas.openxmlformats.org/presentationml/2006/main" showMasterPhAnim="0" showMasterSp="0">
+<p:notes xmlns:a="http://schemas.openxmlformats.org/drawingml/2006/main" xmlns:r="http://schemas.openxmlformats.org/officeDocument/2006/relationships" xmlns:p="http://schemas.openxmlformats.org/presentationml/2006/main" showMasterSp="0" showMasterPhAnim="0">
   <p:cSld>
     <p:spTree>
       <p:nvGrpSpPr>
-        <p:cNvPr id="66" name="Shape 66"/>
+        <p:cNvPr id="1" name="Shape 66"/>
         <p:cNvGrpSpPr/>
         <p:nvPr/>
       </p:nvGrpSpPr>
@@ -3603,7 +3674,9 @@
       <p:sp>
         <p:nvSpPr>
           <p:cNvPr id="67" name="Google Shape;67;p4:notes"/>
-          <p:cNvSpPr/>
+          <p:cNvSpPr>
+            <a:spLocks noGrp="1" noRot="1" noChangeAspect="1"/>
+          </p:cNvSpPr>
           <p:nvPr>
             <p:ph type="sldImg" idx="2"/>
           </p:nvPr>
@@ -3652,7 +3725,9 @@
       <p:sp>
         <p:nvSpPr>
           <p:cNvPr id="68" name="Google Shape;68;p4:notes"/>
-          <p:cNvSpPr txBox="1"/>
+          <p:cNvSpPr txBox="1">
+            <a:spLocks noGrp="1"/>
+          </p:cNvSpPr>
           <p:nvPr>
             <p:ph type="body" idx="1"/>
           </p:nvPr>
@@ -3689,7 +3764,6 @@
               <a:rPr lang="en-US"/>
               <a:t>The object itself is what holds any specific data and logic.</a:t>
             </a:r>
-            <a:endParaRPr lang="en-US"/>
           </a:p>
         </p:txBody>
       </p:sp>
@@ -3702,11 +3776,11 @@
 </file>
 
 <file path=ppt/notesSlides/notesSlide7.xml><?xml version="1.0" encoding="utf-8"?>
-<p:notes xmlns:a="http://schemas.openxmlformats.org/drawingml/2006/main" xmlns:r="http://schemas.openxmlformats.org/officeDocument/2006/relationships" xmlns:p="http://schemas.openxmlformats.org/presentationml/2006/main" showMasterPhAnim="0" showMasterSp="0">
+<p:notes xmlns:a="http://schemas.openxmlformats.org/drawingml/2006/main" xmlns:r="http://schemas.openxmlformats.org/officeDocument/2006/relationships" xmlns:p="http://schemas.openxmlformats.org/presentationml/2006/main" showMasterSp="0" showMasterPhAnim="0">
   <p:cSld>
     <p:spTree>
       <p:nvGrpSpPr>
-        <p:cNvPr id="101" name="Shape 101"/>
+        <p:cNvPr id="1" name="Shape 101"/>
         <p:cNvGrpSpPr/>
         <p:nvPr/>
       </p:nvGrpSpPr>
@@ -3721,7 +3795,9 @@
       <p:sp>
         <p:nvSpPr>
           <p:cNvPr id="102" name="Google Shape;102;p6:notes"/>
-          <p:cNvSpPr/>
+          <p:cNvSpPr>
+            <a:spLocks noGrp="1" noRot="1" noChangeAspect="1"/>
+          </p:cNvSpPr>
           <p:nvPr>
             <p:ph type="sldImg" idx="2"/>
           </p:nvPr>
@@ -3770,7 +3846,9 @@
       <p:sp>
         <p:nvSpPr>
           <p:cNvPr id="103" name="Google Shape;103;p6:notes"/>
-          <p:cNvSpPr txBox="1"/>
+          <p:cNvSpPr txBox="1">
+            <a:spLocks noGrp="1"/>
+          </p:cNvSpPr>
           <p:nvPr>
             <p:ph type="body" idx="1"/>
           </p:nvPr>
@@ -3807,7 +3885,6 @@
               <a:rPr lang="en-US"/>
               <a:t>Defining a function - a function definition requires when and how a specific task would be done.</a:t>
             </a:r>
-            <a:endParaRPr lang="en-US"/>
           </a:p>
           <a:p>
             <a:pPr marL="0" lvl="0" indent="0" algn="l" rtl="0">
@@ -3823,7 +3900,6 @@
               <a:rPr lang="en-US"/>
               <a:t>Calling a function - A function must be called in order to execute it.</a:t>
             </a:r>
-            <a:endParaRPr lang="en-US"/>
           </a:p>
           <a:p>
             <a:pPr marL="0" lvl="0" indent="0" algn="l" rtl="0">
@@ -3839,7 +3915,6 @@
               <a:rPr lang="en-US"/>
               <a:t>Returning functions - functions may also return values back along with the control, to the caller.</a:t>
             </a:r>
-            <a:endParaRPr lang="en-US"/>
           </a:p>
           <a:p>
             <a:pPr marL="0" lvl="0" indent="0" algn="l" rtl="0">
@@ -3855,7 +3930,6 @@
               <a:rPr lang="en-US"/>
               <a:t>Parameterised functions - Parameters are a mechanism to pass values between the function.we can pass more than one parameter or what our object we want. But to receive, we must define data type.</a:t>
             </a:r>
-            <a:endParaRPr lang="en-US"/>
           </a:p>
         </p:txBody>
       </p:sp>
@@ -3868,11 +3942,11 @@
 </file>
 
 <file path=ppt/notesSlides/notesSlide8.xml><?xml version="1.0" encoding="utf-8"?>
-<p:notes xmlns:a="http://schemas.openxmlformats.org/drawingml/2006/main" xmlns:r="http://schemas.openxmlformats.org/officeDocument/2006/relationships" xmlns:p="http://schemas.openxmlformats.org/presentationml/2006/main" showMasterPhAnim="0" showMasterSp="0">
+<p:notes xmlns:a="http://schemas.openxmlformats.org/drawingml/2006/main" xmlns:r="http://schemas.openxmlformats.org/officeDocument/2006/relationships" xmlns:p="http://schemas.openxmlformats.org/presentationml/2006/main" showMasterSp="0" showMasterPhAnim="0">
   <p:cSld>
     <p:spTree>
       <p:nvGrpSpPr>
-        <p:cNvPr id="115" name="Shape 115"/>
+        <p:cNvPr id="1" name="Shape 115"/>
         <p:cNvGrpSpPr/>
         <p:nvPr/>
       </p:nvGrpSpPr>
@@ -3887,7 +3961,9 @@
       <p:sp>
         <p:nvSpPr>
           <p:cNvPr id="116" name="Google Shape;116;p7:notes"/>
-          <p:cNvSpPr/>
+          <p:cNvSpPr>
+            <a:spLocks noGrp="1" noRot="1" noChangeAspect="1"/>
+          </p:cNvSpPr>
           <p:nvPr>
             <p:ph type="sldImg" idx="2"/>
           </p:nvPr>
@@ -3936,7 +4012,9 @@
       <p:sp>
         <p:nvSpPr>
           <p:cNvPr id="117" name="Google Shape;117;p7:notes"/>
-          <p:cNvSpPr txBox="1"/>
+          <p:cNvSpPr txBox="1">
+            <a:spLocks noGrp="1"/>
+          </p:cNvSpPr>
           <p:nvPr>
             <p:ph type="body" idx="1"/>
           </p:nvPr>
@@ -4133,6 +4211,11 @@
               </a:spcAft>
               <a:buNone/>
             </a:pPr>
+            <a:endParaRPr>
+              <a:solidFill>
+                <a:srgbClr val="DFBB64"/>
+              </a:solidFill>
+            </a:endParaRPr>
           </a:p>
         </p:txBody>
       </p:sp>
@@ -4145,11 +4228,11 @@
 </file>
 
 <file path=ppt/notesSlides/notesSlide9.xml><?xml version="1.0" encoding="utf-8"?>
-<p:notes xmlns:a="http://schemas.openxmlformats.org/drawingml/2006/main" xmlns:r="http://schemas.openxmlformats.org/officeDocument/2006/relationships" xmlns:p="http://schemas.openxmlformats.org/presentationml/2006/main" showMasterPhAnim="0" showMasterSp="0">
+<p:notes xmlns:a="http://schemas.openxmlformats.org/drawingml/2006/main" xmlns:r="http://schemas.openxmlformats.org/officeDocument/2006/relationships" xmlns:p="http://schemas.openxmlformats.org/presentationml/2006/main" showMasterSp="0" showMasterPhAnim="0">
   <p:cSld>
     <p:spTree>
       <p:nvGrpSpPr>
-        <p:cNvPr id="126" name="Shape 126"/>
+        <p:cNvPr id="1" name="Shape 126"/>
         <p:cNvGrpSpPr/>
         <p:nvPr/>
       </p:nvGrpSpPr>
@@ -4164,7 +4247,9 @@
       <p:sp>
         <p:nvSpPr>
           <p:cNvPr id="127" name="Google Shape;127;p8:notes"/>
-          <p:cNvSpPr/>
+          <p:cNvSpPr>
+            <a:spLocks noGrp="1" noRot="1" noChangeAspect="1"/>
+          </p:cNvSpPr>
           <p:nvPr>
             <p:ph type="sldImg" idx="2"/>
           </p:nvPr>
@@ -4213,7 +4298,9 @@
       <p:sp>
         <p:nvSpPr>
           <p:cNvPr id="128" name="Google Shape;128;p8:notes"/>
-          <p:cNvSpPr txBox="1"/>
+          <p:cNvSpPr txBox="1">
+            <a:spLocks noGrp="1"/>
+          </p:cNvSpPr>
           <p:nvPr>
             <p:ph type="body" idx="1"/>
           </p:nvPr>
@@ -4250,7 +4337,6 @@
               <a:rPr lang="en-US"/>
               <a:t>Dart parameters can be categorized broadly into two types: positional parameters and named parameters. Positional parameters are the traditional way of passing arguments to a function. They are defined in the function declaration and passed into the function in the same order when calling the function.</a:t>
             </a:r>
-            <a:endParaRPr lang="en-US"/>
           </a:p>
         </p:txBody>
       </p:sp>
@@ -4263,11 +4349,11 @@
 </file>
 
 <file path=ppt/slideLayouts/slideLayout1.xml><?xml version="1.0" encoding="utf-8"?>
-<p:sldLayout xmlns:a="http://schemas.openxmlformats.org/drawingml/2006/main" xmlns:r="http://schemas.openxmlformats.org/officeDocument/2006/relationships" xmlns:p="http://schemas.openxmlformats.org/presentationml/2006/main" type="blank" matchingName="Blank">
+<p:sldLayout xmlns:a="http://schemas.openxmlformats.org/drawingml/2006/main" xmlns:r="http://schemas.openxmlformats.org/officeDocument/2006/relationships" xmlns:p="http://schemas.openxmlformats.org/presentationml/2006/main" matchingName="Blank" type="blank">
   <p:cSld name="BLANK">
     <p:spTree>
       <p:nvGrpSpPr>
-        <p:cNvPr id="15" name="Shape 15"/>
+        <p:cNvPr id="1" name="Shape 15"/>
         <p:cNvGrpSpPr/>
         <p:nvPr/>
       </p:nvGrpSpPr>
@@ -4282,7 +4368,9 @@
       <p:sp>
         <p:nvSpPr>
           <p:cNvPr id="16" name="Google Shape;16;p21"/>
-          <p:cNvSpPr txBox="1"/>
+          <p:cNvSpPr txBox="1">
+            <a:spLocks noGrp="1"/>
+          </p:cNvSpPr>
           <p:nvPr>
             <p:ph type="dt" idx="10"/>
           </p:nvPr>
@@ -4459,13 +4547,17 @@
               <a:defRPr/>
             </a:lvl9pPr>
           </a:lstStyle>
-          <a:p/>
+          <a:p>
+            <a:endParaRPr/>
+          </a:p>
         </p:txBody>
       </p:sp>
       <p:sp>
         <p:nvSpPr>
           <p:cNvPr id="17" name="Google Shape;17;p21"/>
-          <p:cNvSpPr txBox="1"/>
+          <p:cNvSpPr txBox="1">
+            <a:spLocks noGrp="1"/>
+          </p:cNvSpPr>
           <p:nvPr>
             <p:ph type="ftr" idx="11"/>
           </p:nvPr>
@@ -4642,13 +4734,17 @@
               <a:defRPr/>
             </a:lvl9pPr>
           </a:lstStyle>
-          <a:p/>
+          <a:p>
+            <a:endParaRPr/>
+          </a:p>
         </p:txBody>
       </p:sp>
       <p:sp>
         <p:nvSpPr>
           <p:cNvPr id="18" name="Google Shape;18;p21"/>
-          <p:cNvSpPr txBox="1"/>
+          <p:cNvSpPr txBox="1">
+            <a:spLocks noGrp="1"/>
+          </p:cNvSpPr>
           <p:nvPr>
             <p:ph type="sldNum" idx="12"/>
           </p:nvPr>
@@ -4891,6 +4987,7 @@
             </a:pPr>
             <a:fld id="{00000000-1234-1234-1234-123412341234}" type="slidenum">
               <a:rPr lang="en-US"/>
+              <a:t>‹#›</a:t>
             </a:fld>
             <a:endParaRPr lang="en-US"/>
           </a:p>
@@ -4905,11 +5002,11 @@
 </file>
 
 <file path=ppt/slideLayouts/slideLayout2.xml><?xml version="1.0" encoding="utf-8"?>
-<p:sldLayout xmlns:a="http://schemas.openxmlformats.org/drawingml/2006/main" xmlns:r="http://schemas.openxmlformats.org/officeDocument/2006/relationships" xmlns:p="http://schemas.openxmlformats.org/presentationml/2006/main" type="title" matchingName="Title slide">
+<p:sldLayout xmlns:a="http://schemas.openxmlformats.org/drawingml/2006/main" xmlns:r="http://schemas.openxmlformats.org/officeDocument/2006/relationships" xmlns:p="http://schemas.openxmlformats.org/presentationml/2006/main" matchingName="Title slide" type="title">
   <p:cSld name="TITLE">
     <p:spTree>
       <p:nvGrpSpPr>
-        <p:cNvPr id="19" name="Shape 19"/>
+        <p:cNvPr id="1" name="Shape 19"/>
         <p:cNvGrpSpPr/>
         <p:nvPr/>
       </p:nvGrpSpPr>
@@ -4924,7 +5021,9 @@
       <p:sp>
         <p:nvSpPr>
           <p:cNvPr id="20" name="Google Shape;20;p22"/>
-          <p:cNvSpPr txBox="1"/>
+          <p:cNvSpPr txBox="1">
+            <a:spLocks noGrp="1"/>
+          </p:cNvSpPr>
           <p:nvPr>
             <p:ph type="ctrTitle"/>
           </p:nvPr>
@@ -5074,13 +5173,17 @@
               <a:defRPr/>
             </a:lvl9pPr>
           </a:lstStyle>
-          <a:p/>
+          <a:p>
+            <a:endParaRPr/>
+          </a:p>
         </p:txBody>
       </p:sp>
       <p:sp>
         <p:nvSpPr>
           <p:cNvPr id="21" name="Google Shape;21;p22"/>
-          <p:cNvSpPr txBox="1"/>
+          <p:cNvSpPr txBox="1">
+            <a:spLocks noGrp="1"/>
+          </p:cNvSpPr>
           <p:nvPr>
             <p:ph type="subTitle" idx="1"/>
           </p:nvPr>
@@ -5257,13 +5360,17 @@
               <a:defRPr sz="1600"/>
             </a:lvl9pPr>
           </a:lstStyle>
-          <a:p/>
+          <a:p>
+            <a:endParaRPr/>
+          </a:p>
         </p:txBody>
       </p:sp>
       <p:sp>
         <p:nvSpPr>
           <p:cNvPr id="22" name="Google Shape;22;p22"/>
-          <p:cNvSpPr txBox="1"/>
+          <p:cNvSpPr txBox="1">
+            <a:spLocks noGrp="1"/>
+          </p:cNvSpPr>
           <p:nvPr>
             <p:ph type="dt" idx="10"/>
           </p:nvPr>
@@ -5440,13 +5547,17 @@
               <a:defRPr/>
             </a:lvl9pPr>
           </a:lstStyle>
-          <a:p/>
+          <a:p>
+            <a:endParaRPr/>
+          </a:p>
         </p:txBody>
       </p:sp>
       <p:sp>
         <p:nvSpPr>
           <p:cNvPr id="23" name="Google Shape;23;p22"/>
-          <p:cNvSpPr txBox="1"/>
+          <p:cNvSpPr txBox="1">
+            <a:spLocks noGrp="1"/>
+          </p:cNvSpPr>
           <p:nvPr>
             <p:ph type="ftr" idx="11"/>
           </p:nvPr>
@@ -5623,13 +5734,17 @@
               <a:defRPr/>
             </a:lvl9pPr>
           </a:lstStyle>
-          <a:p/>
+          <a:p>
+            <a:endParaRPr/>
+          </a:p>
         </p:txBody>
       </p:sp>
       <p:sp>
         <p:nvSpPr>
           <p:cNvPr id="24" name="Google Shape;24;p22"/>
-          <p:cNvSpPr txBox="1"/>
+          <p:cNvSpPr txBox="1">
+            <a:spLocks noGrp="1"/>
+          </p:cNvSpPr>
           <p:nvPr>
             <p:ph type="sldNum" idx="12"/>
           </p:nvPr>
@@ -5872,6 +5987,7 @@
             </a:pPr>
             <a:fld id="{00000000-1234-1234-1234-123412341234}" type="slidenum">
               <a:rPr lang="en-US"/>
+              <a:t>‹#›</a:t>
             </a:fld>
             <a:endParaRPr lang="en-US"/>
           </a:p>
@@ -5898,7 +6014,7 @@
     </p:bg>
     <p:spTree>
       <p:nvGrpSpPr>
-        <p:cNvPr id="9" name="Shape 9"/>
+        <p:cNvPr id="1" name="Shape 9"/>
         <p:cNvGrpSpPr/>
         <p:nvPr/>
       </p:nvGrpSpPr>
@@ -5913,7 +6029,9 @@
       <p:sp>
         <p:nvSpPr>
           <p:cNvPr id="10" name="Google Shape;10;p20"/>
-          <p:cNvSpPr txBox="1"/>
+          <p:cNvSpPr txBox="1">
+            <a:spLocks noGrp="1"/>
+          </p:cNvSpPr>
           <p:nvPr>
             <p:ph type="title"/>
           </p:nvPr>
@@ -6135,13 +6253,17 @@
               </a:defRPr>
             </a:lvl9pPr>
           </a:lstStyle>
-          <a:p/>
+          <a:p>
+            <a:endParaRPr/>
+          </a:p>
         </p:txBody>
       </p:sp>
       <p:sp>
         <p:nvSpPr>
           <p:cNvPr id="11" name="Google Shape;11;p20"/>
-          <p:cNvSpPr txBox="1"/>
+          <p:cNvSpPr txBox="1">
+            <a:spLocks noGrp="1"/>
+          </p:cNvSpPr>
           <p:nvPr>
             <p:ph type="body" idx="1"/>
           </p:nvPr>
@@ -6399,13 +6521,17 @@
               </a:defRPr>
             </a:lvl9pPr>
           </a:lstStyle>
-          <a:p/>
+          <a:p>
+            <a:endParaRPr/>
+          </a:p>
         </p:txBody>
       </p:sp>
       <p:sp>
         <p:nvSpPr>
           <p:cNvPr id="12" name="Google Shape;12;p20"/>
-          <p:cNvSpPr txBox="1"/>
+          <p:cNvSpPr txBox="1">
+            <a:spLocks noGrp="1"/>
+          </p:cNvSpPr>
           <p:nvPr>
             <p:ph type="dt" idx="10"/>
           </p:nvPr>
@@ -6663,13 +6789,17 @@
               </a:defRPr>
             </a:lvl9pPr>
           </a:lstStyle>
-          <a:p/>
+          <a:p>
+            <a:endParaRPr/>
+          </a:p>
         </p:txBody>
       </p:sp>
       <p:sp>
         <p:nvSpPr>
           <p:cNvPr id="13" name="Google Shape;13;p20"/>
-          <p:cNvSpPr txBox="1"/>
+          <p:cNvSpPr txBox="1">
+            <a:spLocks noGrp="1"/>
+          </p:cNvSpPr>
           <p:nvPr>
             <p:ph type="ftr" idx="11"/>
           </p:nvPr>
@@ -6927,13 +7057,17 @@
               </a:defRPr>
             </a:lvl9pPr>
           </a:lstStyle>
-          <a:p/>
+          <a:p>
+            <a:endParaRPr/>
+          </a:p>
         </p:txBody>
       </p:sp>
       <p:sp>
         <p:nvSpPr>
           <p:cNvPr id="14" name="Google Shape;14;p20"/>
-          <p:cNvSpPr txBox="1"/>
+          <p:cNvSpPr txBox="1">
+            <a:spLocks noGrp="1"/>
+          </p:cNvSpPr>
           <p:nvPr>
             <p:ph type="sldNum" idx="12"/>
           </p:nvPr>
@@ -7203,6 +7337,7 @@
             </a:pPr>
             <a:fld id="{00000000-1234-1234-1234-123412341234}" type="slidenum">
               <a:rPr lang="en-US"/>
+              <a:t>‹#›</a:t>
             </a:fld>
             <a:endParaRPr lang="en-US"/>
           </a:p>
@@ -7913,7 +8048,7 @@
   <p:cSld>
     <p:spTree>
       <p:nvGrpSpPr>
-        <p:cNvPr id="28" name="Shape 28"/>
+        <p:cNvPr id="1" name="Shape 28"/>
         <p:cNvGrpSpPr/>
         <p:nvPr/>
       </p:nvGrpSpPr>
@@ -7933,7 +8068,7 @@
         </p:nvSpPr>
         <p:spPr>
           <a:xfrm>
-            <a:off x="0" y="-363220"/>
+            <a:off x="0" y="-353060"/>
             <a:ext cx="12192000" cy="7297420"/>
           </a:xfrm>
           <a:prstGeom prst="rect">
@@ -8196,7 +8331,7 @@
               <a:buNone/>
             </a:pPr>
             <a:r>
-              <a:rPr lang="en-US" sz="4000" b="1" i="0" u="none" strike="noStrike" cap="none">
+              <a:rPr lang="en-US" sz="4000" b="1" i="0" u="none" strike="noStrike" cap="none" dirty="0">
                 <a:solidFill>
                   <a:srgbClr val="DBB768"/>
                 </a:solidFill>
@@ -8207,7 +8342,7 @@
               </a:rPr>
               <a:t>A Comprehensive Guide to Dart Programming: </a:t>
             </a:r>
-            <a:endParaRPr sz="4000" b="1" i="0" u="none" strike="noStrike" cap="none">
+            <a:endParaRPr sz="4000" b="1" i="0" u="none" strike="noStrike" cap="none" dirty="0">
               <a:solidFill>
                 <a:srgbClr val="DBB768"/>
               </a:solidFill>
@@ -8226,7 +8361,7 @@
           <p:nvPr/>
         </p:nvPicPr>
         <p:blipFill rotWithShape="1">
-          <a:blip r:embed="rId1"/>
+          <a:blip r:embed="rId3"/>
           <a:srcRect/>
           <a:stretch>
             <a:fillRect/>
@@ -8253,7 +8388,7 @@
           <p:nvPr/>
         </p:nvPicPr>
         <p:blipFill rotWithShape="1">
-          <a:blip r:embed="rId2"/>
+          <a:blip r:embed="rId4"/>
           <a:srcRect/>
           <a:stretch>
             <a:fillRect/>
@@ -8395,14 +8530,14 @@
                 </p:childTnLst>
               </p:cTn>
               <p:prevCondLst>
-                <p:cond evt="onPrev">
+                <p:cond evt="onPrev" delay="0">
                   <p:tgtEl>
                     <p:sldTgt/>
                   </p:tgtEl>
                 </p:cond>
               </p:prevCondLst>
               <p:nextCondLst>
-                <p:cond evt="onNext">
+                <p:cond evt="onNext" delay="0">
                   <p:tgtEl>
                     <p:sldTgt/>
                   </p:tgtEl>
@@ -8422,7 +8557,7 @@
   <p:cSld>
     <p:spTree>
       <p:nvGrpSpPr>
-        <p:cNvPr id="144" name="Shape 144"/>
+        <p:cNvPr id="1" name="Shape 144"/>
         <p:cNvGrpSpPr/>
         <p:nvPr/>
       </p:nvGrpSpPr>
@@ -8442,7 +8577,7 @@
         </p:nvSpPr>
         <p:spPr>
           <a:xfrm>
-            <a:off x="0" y="0"/>
+            <a:off x="0" y="7620"/>
             <a:ext cx="12192000" cy="6858000"/>
           </a:xfrm>
           <a:prstGeom prst="rect">
@@ -8605,7 +8740,7 @@
               <a:buChar char="Ø"/>
             </a:pPr>
             <a:r>
-              <a:rPr lang="en-US" sz="2800" b="0" i="0" u="none" strike="noStrike" cap="none">
+              <a:rPr lang="en-US" sz="2800" b="0" i="0" u="none" strike="noStrike" cap="none" dirty="0">
                 <a:solidFill>
                   <a:srgbClr val="DFBB64"/>
                 </a:solidFill>
@@ -8617,7 +8752,7 @@
               <a:t>Constructors are function which we will create with the name of class itself and</a:t>
             </a:r>
             <a:r>
-              <a:rPr lang="en-IN" altLang="en-US" sz="2800" b="0" i="0" u="none" strike="noStrike" cap="none">
+              <a:rPr lang="en-IN" altLang="en-US" sz="2800" b="0" i="0" u="none" strike="noStrike" cap="none" dirty="0">
                 <a:solidFill>
                   <a:srgbClr val="DFBB64"/>
                 </a:solidFill>
@@ -8628,7 +8763,26 @@
               </a:rPr>
               <a:t>,</a:t>
             </a:r>
-            <a:endParaRPr lang="en-IN" altLang="en-US" sz="2800" b="0" i="0" u="none" strike="noStrike" cap="none">
+          </a:p>
+          <a:p>
+            <a:pPr marL="0" marR="0" lvl="0" indent="0" algn="l" rtl="0">
+              <a:lnSpc>
+                <a:spcPct val="100000"/>
+              </a:lnSpc>
+              <a:spcBef>
+                <a:spcPts val="0"/>
+              </a:spcBef>
+              <a:spcAft>
+                <a:spcPts val="0"/>
+              </a:spcAft>
+              <a:buClr>
+                <a:srgbClr val="DFBB64"/>
+              </a:buClr>
+              <a:buSzPts val="2800"/>
+              <a:buFont typeface="Wingdings" panose="05000000000000000000" charset="0"/>
+              <a:buNone/>
+            </a:pPr>
+            <a:endParaRPr lang="en-IN" altLang="en-US" sz="2800" b="0" i="0" u="none" strike="noStrike" cap="none" dirty="0">
               <a:solidFill>
                 <a:srgbClr val="DFBB64"/>
               </a:solidFill>
@@ -8639,34 +8793,6 @@
             </a:endParaRPr>
           </a:p>
           <a:p>
-            <a:pPr marL="0" marR="0" lvl="0" indent="0" algn="l" rtl="0">
-              <a:lnSpc>
-                <a:spcPct val="100000"/>
-              </a:lnSpc>
-              <a:spcBef>
-                <a:spcPts val="0"/>
-              </a:spcBef>
-              <a:spcAft>
-                <a:spcPts val="0"/>
-              </a:spcAft>
-              <a:buClr>
-                <a:srgbClr val="DFBB64"/>
-              </a:buClr>
-              <a:buSzPts val="2800"/>
-              <a:buFont typeface="Wingdings" panose="05000000000000000000" charset="0"/>
-              <a:buNone/>
-            </a:pPr>
-            <a:endParaRPr lang="en-IN" altLang="en-US" sz="2800" b="0" i="0" u="none" strike="noStrike" cap="none">
-              <a:solidFill>
-                <a:srgbClr val="DFBB64"/>
-              </a:solidFill>
-              <a:latin typeface="Calibri" panose="020F0502020204030204"/>
-              <a:ea typeface="Calibri" panose="020F0502020204030204"/>
-              <a:cs typeface="Calibri" panose="020F0502020204030204"/>
-              <a:sym typeface="Calibri" panose="020F0502020204030204"/>
-            </a:endParaRPr>
-          </a:p>
-          <a:p>
             <a:pPr marL="457200" marR="0" lvl="0" indent="-457200" algn="l" rtl="0">
               <a:lnSpc>
                 <a:spcPct val="100000"/>
@@ -8685,7 +8811,7 @@
               <a:buChar char="Ø"/>
             </a:pPr>
             <a:r>
-              <a:rPr lang="en-US" sz="2800" b="0" i="0" u="none" strike="noStrike" cap="none">
+              <a:rPr lang="en-US" sz="2800" b="0" i="0" u="none" strike="noStrike" cap="none" dirty="0">
                 <a:solidFill>
                   <a:srgbClr val="DFBB64"/>
                 </a:solidFill>
@@ -8697,7 +8823,7 @@
               <a:t> </a:t>
             </a:r>
             <a:r>
-              <a:rPr lang="en-IN" altLang="en-US" sz="2800" b="0" i="0" u="none" strike="noStrike" cap="none">
+              <a:rPr lang="en-IN" altLang="en-US" sz="2800" b="0" i="0" u="none" strike="noStrike" cap="none" dirty="0">
                 <a:solidFill>
                   <a:srgbClr val="DFBB64"/>
                 </a:solidFill>
@@ -8709,7 +8835,7 @@
               <a:t>W</a:t>
             </a:r>
             <a:r>
-              <a:rPr lang="en-US" sz="2800" b="0" i="0" u="none" strike="noStrike" cap="none">
+              <a:rPr lang="en-US" sz="2800" b="0" i="0" u="none" strike="noStrike" cap="none" dirty="0" err="1">
                 <a:solidFill>
                   <a:srgbClr val="DFBB64"/>
                 </a:solidFill>
@@ -8718,9 +8844,38 @@
                 <a:cs typeface="Calibri" panose="020F0502020204030204"/>
                 <a:sym typeface="Calibri" panose="020F0502020204030204"/>
               </a:rPr>
-              <a:t>hich will execute automatically when the class is called.</a:t>
+              <a:t>hich</a:t>
             </a:r>
-            <a:endParaRPr lang="en-US" sz="2800" b="0" i="0" u="none" strike="noStrike" cap="none">
+            <a:r>
+              <a:rPr lang="en-US" sz="2800" b="0" i="0" u="none" strike="noStrike" cap="none" dirty="0">
+                <a:solidFill>
+                  <a:srgbClr val="DFBB64"/>
+                </a:solidFill>
+                <a:latin typeface="Calibri" panose="020F0502020204030204"/>
+                <a:ea typeface="Calibri" panose="020F0502020204030204"/>
+                <a:cs typeface="Calibri" panose="020F0502020204030204"/>
+                <a:sym typeface="Calibri" panose="020F0502020204030204"/>
+              </a:rPr>
+              <a:t> will execute automatically when the class is called.</a:t>
+            </a:r>
+          </a:p>
+          <a:p>
+            <a:pPr marR="0" lvl="0" algn="l" rtl="0">
+              <a:lnSpc>
+                <a:spcPct val="100000"/>
+              </a:lnSpc>
+              <a:spcBef>
+                <a:spcPts val="0"/>
+              </a:spcBef>
+              <a:spcAft>
+                <a:spcPts val="0"/>
+              </a:spcAft>
+              <a:buClr>
+                <a:srgbClr val="DFBB64"/>
+              </a:buClr>
+              <a:buSzPts val="2800"/>
+            </a:pPr>
+            <a:endParaRPr sz="2800" b="0" i="0" u="none" strike="noStrike" cap="none" dirty="0">
               <a:solidFill>
                 <a:srgbClr val="DFBB64"/>
               </a:solidFill>
@@ -8748,36 +8903,8 @@
               <a:buFont typeface="Wingdings" panose="05000000000000000000" charset="0"/>
               <a:buChar char="Ø"/>
             </a:pPr>
-            <a:endParaRPr sz="2800" b="0" i="0" u="none" strike="noStrike" cap="none">
-              <a:solidFill>
-                <a:srgbClr val="DFBB64"/>
-              </a:solidFill>
-              <a:latin typeface="Calibri" panose="020F0502020204030204"/>
-              <a:ea typeface="Calibri" panose="020F0502020204030204"/>
-              <a:cs typeface="Calibri" panose="020F0502020204030204"/>
-              <a:sym typeface="Calibri" panose="020F0502020204030204"/>
-            </a:endParaRPr>
-          </a:p>
-          <a:p>
-            <a:pPr marL="457200" marR="0" lvl="0" indent="-457200" algn="l" rtl="0">
-              <a:lnSpc>
-                <a:spcPct val="100000"/>
-              </a:lnSpc>
-              <a:spcBef>
-                <a:spcPts val="0"/>
-              </a:spcBef>
-              <a:spcAft>
-                <a:spcPts val="0"/>
-              </a:spcAft>
-              <a:buClr>
-                <a:srgbClr val="DFBB64"/>
-              </a:buClr>
-              <a:buSzPts val="2800"/>
-              <a:buFont typeface="Wingdings" panose="05000000000000000000" charset="0"/>
-              <a:buChar char="Ø"/>
-            </a:pPr>
             <a:r>
-              <a:rPr lang="en-IN" sz="2800" b="0" i="0" u="none" strike="noStrike" cap="none">
+              <a:rPr lang="en-IN" sz="2800" b="0" i="0" u="none" strike="noStrike" cap="none" dirty="0">
                 <a:solidFill>
                   <a:srgbClr val="DFBB64"/>
                 </a:solidFill>
@@ -8788,15 +8915,6 @@
               </a:rPr>
               <a:t>There are named constructors in dart, which will allow us to create and call by the default name we create. This constructor will only execute only if its called by that name.</a:t>
             </a:r>
-            <a:endParaRPr lang="en-IN" sz="2800" b="0" i="0" u="none" strike="noStrike" cap="none">
-              <a:solidFill>
-                <a:srgbClr val="DFBB64"/>
-              </a:solidFill>
-              <a:latin typeface="Calibri" panose="020F0502020204030204"/>
-              <a:ea typeface="Calibri" panose="020F0502020204030204"/>
-              <a:cs typeface="Calibri" panose="020F0502020204030204"/>
-              <a:sym typeface="Calibri" panose="020F0502020204030204"/>
-            </a:endParaRPr>
           </a:p>
         </p:txBody>
       </p:sp>
@@ -8987,7 +9105,7 @@
           <p:nvPr/>
         </p:nvPicPr>
         <p:blipFill rotWithShape="1">
-          <a:blip r:embed="rId1"/>
+          <a:blip r:embed="rId3"/>
           <a:srcRect t="2222" b="1209"/>
           <a:stretch>
             <a:fillRect/>
@@ -8995,7 +9113,7 @@
         </p:blipFill>
         <p:spPr>
           <a:xfrm>
-            <a:off x="7859395" y="318135"/>
+            <a:off x="7859395" y="333375"/>
             <a:ext cx="4029075" cy="6240780"/>
           </a:xfrm>
           <a:prstGeom prst="rect">
@@ -9014,7 +9132,7 @@
           <p:nvPr/>
         </p:nvPicPr>
         <p:blipFill rotWithShape="1">
-          <a:blip r:embed="rId2"/>
+          <a:blip r:embed="rId4"/>
           <a:srcRect/>
           <a:stretch>
             <a:fillRect/>
@@ -9039,13 +9157,13 @@
   <p:clrMapOvr>
     <a:masterClrMapping/>
   </p:clrMapOvr>
-  <mc:AlternateContent xmlns:mc="http://schemas.openxmlformats.org/markup-compatibility/2006">
-    <mc:Choice xmlns:p14="http://schemas.microsoft.com/office/powerpoint/2010/main" Requires="p14">
+  <mc:AlternateContent xmlns:mc="http://schemas.openxmlformats.org/markup-compatibility/2006" xmlns:p14="http://schemas.microsoft.com/office/powerpoint/2010/main">
+    <mc:Choice Requires="p14">
       <p:transition spd="slow" p14:dur="1500">
         <p:split orient="vert" dir="in"/>
       </p:transition>
     </mc:Choice>
-    <mc:Fallback>
+    <mc:Fallback xmlns="">
       <p:transition spd="slow">
         <p:split orient="vert" dir="in"/>
       </p:transition>
@@ -9221,14 +9339,14 @@
                 </p:childTnLst>
               </p:cTn>
               <p:prevCondLst>
-                <p:cond evt="onPrev">
+                <p:cond evt="onPrev" delay="0">
                   <p:tgtEl>
                     <p:sldTgt/>
                   </p:tgtEl>
                 </p:cond>
               </p:prevCondLst>
               <p:nextCondLst>
-                <p:cond evt="onNext">
+                <p:cond evt="onNext" delay="0">
                   <p:tgtEl>
                     <p:sldTgt/>
                   </p:tgtEl>
@@ -9248,7 +9366,7 @@
   <p:cSld>
     <p:spTree>
       <p:nvGrpSpPr>
-        <p:cNvPr id="158" name="Shape 158"/>
+        <p:cNvPr id="1" name="Shape 158"/>
         <p:cNvGrpSpPr/>
         <p:nvPr/>
       </p:nvGrpSpPr>
@@ -9885,7 +10003,7 @@
           <p:nvPr/>
         </p:nvPicPr>
         <p:blipFill rotWithShape="1">
-          <a:blip r:embed="rId1"/>
+          <a:blip r:embed="rId3"/>
           <a:srcRect/>
           <a:stretch>
             <a:fillRect/>
@@ -9912,7 +10030,7 @@
           <p:nvPr/>
         </p:nvPicPr>
         <p:blipFill rotWithShape="1">
-          <a:blip r:embed="rId2"/>
+          <a:blip r:embed="rId4"/>
           <a:srcRect/>
           <a:stretch>
             <a:fillRect/>
@@ -9937,13 +10055,13 @@
   <p:clrMapOvr>
     <a:masterClrMapping/>
   </p:clrMapOvr>
-  <mc:AlternateContent xmlns:mc="http://schemas.openxmlformats.org/markup-compatibility/2006">
-    <mc:Choice xmlns:p14="http://schemas.microsoft.com/office/powerpoint/2010/main" Requires="p14">
+  <mc:AlternateContent xmlns:mc="http://schemas.openxmlformats.org/markup-compatibility/2006" xmlns:p14="http://schemas.microsoft.com/office/powerpoint/2010/main">
+    <mc:Choice Requires="p14">
       <p:transition spd="slow" p14:dur="1500">
         <p:split orient="vert" dir="in"/>
       </p:transition>
     </mc:Choice>
-    <mc:Fallback>
+    <mc:Fallback xmlns="">
       <p:transition spd="slow">
         <p:split orient="vert" dir="in"/>
       </p:transition>
@@ -10119,14 +10237,14 @@
                 </p:childTnLst>
               </p:cTn>
               <p:prevCondLst>
-                <p:cond evt="onPrev">
+                <p:cond evt="onPrev" delay="0">
                   <p:tgtEl>
                     <p:sldTgt/>
                   </p:tgtEl>
                 </p:cond>
               </p:prevCondLst>
               <p:nextCondLst>
-                <p:cond evt="onNext">
+                <p:cond evt="onNext" delay="0">
                   <p:tgtEl>
                     <p:sldTgt/>
                   </p:tgtEl>
@@ -10146,7 +10264,7 @@
   <p:cSld>
     <p:spTree>
       <p:nvGrpSpPr>
-        <p:cNvPr id="172" name="Shape 172"/>
+        <p:cNvPr id="1" name="Shape 172"/>
         <p:cNvGrpSpPr/>
         <p:nvPr/>
       </p:nvGrpSpPr>
@@ -10675,7 +10793,7 @@
           <p:nvPr/>
         </p:nvPicPr>
         <p:blipFill rotWithShape="1">
-          <a:blip r:embed="rId1"/>
+          <a:blip r:embed="rId3"/>
           <a:srcRect t="2423" r="8684" b="1240"/>
           <a:stretch>
             <a:fillRect/>
@@ -10702,7 +10820,7 @@
           <p:nvPr/>
         </p:nvPicPr>
         <p:blipFill rotWithShape="1">
-          <a:blip r:embed="rId2"/>
+          <a:blip r:embed="rId4"/>
           <a:srcRect/>
           <a:stretch>
             <a:fillRect/>
@@ -10727,13 +10845,13 @@
   <p:clrMapOvr>
     <a:masterClrMapping/>
   </p:clrMapOvr>
-  <mc:AlternateContent xmlns:mc="http://schemas.openxmlformats.org/markup-compatibility/2006">
-    <mc:Choice xmlns:p14="http://schemas.microsoft.com/office/powerpoint/2010/main" Requires="p14">
+  <mc:AlternateContent xmlns:mc="http://schemas.openxmlformats.org/markup-compatibility/2006" xmlns:p14="http://schemas.microsoft.com/office/powerpoint/2010/main">
+    <mc:Choice Requires="p14">
       <p:transition spd="slow" p14:dur="1500">
         <p:split orient="vert" dir="in"/>
       </p:transition>
     </mc:Choice>
-    <mc:Fallback>
+    <mc:Fallback xmlns="">
       <p:transition spd="slow">
         <p:split orient="vert" dir="in"/>
       </p:transition>
@@ -10909,14 +11027,14 @@
                 </p:childTnLst>
               </p:cTn>
               <p:prevCondLst>
-                <p:cond evt="onPrev">
+                <p:cond evt="onPrev" delay="0">
                   <p:tgtEl>
                     <p:sldTgt/>
                   </p:tgtEl>
                 </p:cond>
               </p:prevCondLst>
               <p:nextCondLst>
-                <p:cond evt="onNext">
+                <p:cond evt="onNext" delay="0">
                   <p:tgtEl>
                     <p:sldTgt/>
                   </p:tgtEl>
@@ -10936,7 +11054,7 @@
   <p:cSld>
     <p:spTree>
       <p:nvGrpSpPr>
-        <p:cNvPr id="186" name="Shape 186"/>
+        <p:cNvPr id="1" name="Shape 186"/>
         <p:cNvGrpSpPr/>
         <p:nvPr/>
       </p:nvGrpSpPr>
@@ -11084,7 +11202,7 @@
         </p:nvSpPr>
         <p:spPr>
           <a:xfrm>
-            <a:off x="739775" y="1570355"/>
+            <a:off x="445135" y="1259364"/>
             <a:ext cx="7282815" cy="5143500"/>
           </a:xfrm>
           <a:prstGeom prst="rect">
@@ -11119,7 +11237,7 @@
               <a:buNone/>
             </a:pPr>
             <a:r>
-              <a:rPr lang="en-US" sz="2800" b="0" i="0" u="none" strike="noStrike" cap="none">
+              <a:rPr lang="en-US" sz="2800" b="0" i="0" u="none" strike="noStrike" cap="none" dirty="0">
                 <a:solidFill>
                   <a:srgbClr val="DFBB64"/>
                 </a:solidFill>
@@ -11130,7 +11248,7 @@
               </a:rPr>
               <a:t>Class Inheritance is used to access a class(parent class) by another class (child class).</a:t>
             </a:r>
-            <a:endParaRPr sz="2800" b="0" i="0" u="none" strike="noStrike" cap="none">
+            <a:endParaRPr sz="2800" b="0" i="0" u="none" strike="noStrike" cap="none" dirty="0">
               <a:solidFill>
                 <a:srgbClr val="DFBB64"/>
               </a:solidFill>
@@ -11158,7 +11276,7 @@
               <a:buFont typeface="Arial" panose="020B0604020202020204"/>
               <a:buNone/>
             </a:pPr>
-            <a:endParaRPr sz="2800" b="0" i="0" u="none" strike="noStrike" cap="none">
+            <a:endParaRPr sz="2800" b="0" i="0" u="none" strike="noStrike" cap="none" dirty="0">
               <a:solidFill>
                 <a:srgbClr val="DFBB64"/>
               </a:solidFill>
@@ -11187,7 +11305,7 @@
               <a:buNone/>
             </a:pPr>
             <a:r>
-              <a:rPr lang="en-US" sz="2800" b="0" i="0" u="none" strike="noStrike" cap="none">
+              <a:rPr lang="en-US" sz="2800" b="0" i="0" u="none" strike="noStrike" cap="none" dirty="0">
                 <a:solidFill>
                   <a:srgbClr val="DFBB64"/>
                 </a:solidFill>
@@ -11198,7 +11316,26 @@
               </a:rPr>
               <a:t>The inherited class objects by making the object of derived class.</a:t>
             </a:r>
-            <a:endParaRPr lang="en-US" sz="2800" b="0" i="0" u="none" strike="noStrike" cap="none">
+          </a:p>
+          <a:p>
+            <a:pPr marL="0" marR="0" lvl="0" indent="0" algn="l" rtl="0">
+              <a:lnSpc>
+                <a:spcPct val="100000"/>
+              </a:lnSpc>
+              <a:spcBef>
+                <a:spcPts val="0"/>
+              </a:spcBef>
+              <a:spcAft>
+                <a:spcPts val="0"/>
+              </a:spcAft>
+              <a:buClr>
+                <a:srgbClr val="DFBB64"/>
+              </a:buClr>
+              <a:buSzPts val="2800"/>
+              <a:buFont typeface="Arial" panose="020B0604020202020204"/>
+              <a:buNone/>
+            </a:pPr>
+            <a:endParaRPr lang="en-US" sz="2800" b="0" i="0" u="none" strike="noStrike" cap="none" dirty="0">
               <a:solidFill>
                 <a:srgbClr val="DFBB64"/>
               </a:solidFill>
@@ -11226,36 +11363,8 @@
               <a:buFont typeface="Arial" panose="020B0604020202020204"/>
               <a:buNone/>
             </a:pPr>
-            <a:endParaRPr lang="en-US" sz="2800" b="0" i="0" u="none" strike="noStrike" cap="none">
-              <a:solidFill>
-                <a:srgbClr val="DFBB64"/>
-              </a:solidFill>
-              <a:latin typeface="Calibri" panose="020F0502020204030204"/>
-              <a:ea typeface="Calibri" panose="020F0502020204030204"/>
-              <a:cs typeface="Calibri" panose="020F0502020204030204"/>
-              <a:sym typeface="Calibri" panose="020F0502020204030204"/>
-            </a:endParaRPr>
-          </a:p>
-          <a:p>
-            <a:pPr marL="0" marR="0" lvl="0" indent="0" algn="l" rtl="0">
-              <a:lnSpc>
-                <a:spcPct val="100000"/>
-              </a:lnSpc>
-              <a:spcBef>
-                <a:spcPts val="0"/>
-              </a:spcBef>
-              <a:spcAft>
-                <a:spcPts val="0"/>
-              </a:spcAft>
-              <a:buClr>
-                <a:srgbClr val="DFBB64"/>
-              </a:buClr>
-              <a:buSzPts val="2800"/>
-              <a:buFont typeface="Arial" panose="020B0604020202020204"/>
-              <a:buNone/>
-            </a:pPr>
             <a:r>
-              <a:rPr lang="en-IN" altLang="en-US" sz="2800" b="0" i="0" u="none" strike="noStrike" cap="none">
+              <a:rPr lang="en-IN" altLang="en-US" sz="2800" b="0" i="0" u="none" strike="noStrike" cap="none" dirty="0">
                 <a:solidFill>
                   <a:srgbClr val="DFBB64"/>
                 </a:solidFill>
@@ -11266,15 +11375,6 @@
               </a:rPr>
               <a:t>Three are commonly used Inheritance:</a:t>
             </a:r>
-            <a:endParaRPr lang="en-IN" altLang="en-US" sz="2800" b="0" i="0" u="none" strike="noStrike" cap="none">
-              <a:solidFill>
-                <a:srgbClr val="DFBB64"/>
-              </a:solidFill>
-              <a:latin typeface="Calibri" panose="020F0502020204030204"/>
-              <a:ea typeface="Calibri" panose="020F0502020204030204"/>
-              <a:cs typeface="Calibri" panose="020F0502020204030204"/>
-              <a:sym typeface="Calibri" panose="020F0502020204030204"/>
-            </a:endParaRPr>
           </a:p>
           <a:p>
             <a:pPr marL="457200" marR="0" lvl="0" indent="-457200" algn="l" rtl="0">
@@ -11295,7 +11395,7 @@
               <a:buChar char="ü"/>
             </a:pPr>
             <a:r>
-              <a:rPr lang="en-IN" altLang="en-US" sz="2800" b="0" i="0" u="none" strike="noStrike" cap="none">
+              <a:rPr lang="en-IN" altLang="en-US" sz="2800" b="0" i="0" u="none" strike="noStrike" cap="none" dirty="0">
                 <a:solidFill>
                   <a:srgbClr val="DFBB64"/>
                 </a:solidFill>
@@ -11306,7 +11406,26 @@
               </a:rPr>
               <a:t>Single Inheritance</a:t>
             </a:r>
-            <a:endParaRPr lang="en-IN" altLang="en-US" sz="2800" b="0" i="0" u="none" strike="noStrike" cap="none">
+          </a:p>
+          <a:p>
+            <a:pPr marL="0" marR="0" lvl="0" indent="0" algn="l" rtl="0">
+              <a:lnSpc>
+                <a:spcPct val="100000"/>
+              </a:lnSpc>
+              <a:spcBef>
+                <a:spcPts val="0"/>
+              </a:spcBef>
+              <a:spcAft>
+                <a:spcPts val="0"/>
+              </a:spcAft>
+              <a:buClr>
+                <a:srgbClr val="DFBB64"/>
+              </a:buClr>
+              <a:buSzPts val="2800"/>
+              <a:buFont typeface="Wingdings" panose="05000000000000000000" charset="0"/>
+              <a:buNone/>
+            </a:pPr>
+            <a:endParaRPr lang="en-IN" altLang="en-US" sz="2800" b="0" i="0" u="none" strike="noStrike" cap="none" dirty="0">
               <a:solidFill>
                 <a:srgbClr val="DFBB64"/>
               </a:solidFill>
@@ -11317,34 +11436,6 @@
             </a:endParaRPr>
           </a:p>
           <a:p>
-            <a:pPr marL="0" marR="0" lvl="0" indent="0" algn="l" rtl="0">
-              <a:lnSpc>
-                <a:spcPct val="100000"/>
-              </a:lnSpc>
-              <a:spcBef>
-                <a:spcPts val="0"/>
-              </a:spcBef>
-              <a:spcAft>
-                <a:spcPts val="0"/>
-              </a:spcAft>
-              <a:buClr>
-                <a:srgbClr val="DFBB64"/>
-              </a:buClr>
-              <a:buSzPts val="2800"/>
-              <a:buFont typeface="Wingdings" panose="05000000000000000000" charset="0"/>
-              <a:buNone/>
-            </a:pPr>
-            <a:endParaRPr lang="en-IN" altLang="en-US" sz="2800" b="0" i="0" u="none" strike="noStrike" cap="none">
-              <a:solidFill>
-                <a:srgbClr val="DFBB64"/>
-              </a:solidFill>
-              <a:latin typeface="Calibri" panose="020F0502020204030204"/>
-              <a:ea typeface="Calibri" panose="020F0502020204030204"/>
-              <a:cs typeface="Calibri" panose="020F0502020204030204"/>
-              <a:sym typeface="Calibri" panose="020F0502020204030204"/>
-            </a:endParaRPr>
-          </a:p>
-          <a:p>
             <a:pPr marL="457200" marR="0" lvl="0" indent="-457200" algn="l" rtl="0">
               <a:lnSpc>
                 <a:spcPct val="100000"/>
@@ -11363,7 +11454,7 @@
               <a:buChar char="ü"/>
             </a:pPr>
             <a:r>
-              <a:rPr lang="en-IN" altLang="en-US" sz="2800" b="0" i="0" u="none" strike="noStrike" cap="none">
+              <a:rPr lang="en-IN" altLang="en-US" sz="2800" b="0" i="0" u="none" strike="noStrike" cap="none" dirty="0">
                 <a:solidFill>
                   <a:srgbClr val="DFBB64"/>
                 </a:solidFill>
@@ -11374,7 +11465,26 @@
               </a:rPr>
               <a:t>Multi-level Inheritance</a:t>
             </a:r>
-            <a:endParaRPr lang="en-IN" altLang="en-US" sz="2800" b="0" i="0" u="none" strike="noStrike" cap="none">
+          </a:p>
+          <a:p>
+            <a:pPr marL="0" marR="0" lvl="0" indent="0" algn="l" rtl="0">
+              <a:lnSpc>
+                <a:spcPct val="100000"/>
+              </a:lnSpc>
+              <a:spcBef>
+                <a:spcPts val="0"/>
+              </a:spcBef>
+              <a:spcAft>
+                <a:spcPts val="0"/>
+              </a:spcAft>
+              <a:buClr>
+                <a:srgbClr val="DFBB64"/>
+              </a:buClr>
+              <a:buSzPts val="2800"/>
+              <a:buFont typeface="Wingdings" panose="05000000000000000000" charset="0"/>
+              <a:buNone/>
+            </a:pPr>
+            <a:endParaRPr lang="en-IN" altLang="en-US" sz="2800" b="0" i="0" u="none" strike="noStrike" cap="none" dirty="0">
               <a:solidFill>
                 <a:srgbClr val="DFBB64"/>
               </a:solidFill>
@@ -11385,7 +11495,7 @@
             </a:endParaRPr>
           </a:p>
           <a:p>
-            <a:pPr marL="0" marR="0" lvl="0" indent="0" algn="l" rtl="0">
+            <a:pPr marL="457200" marR="0" lvl="0" indent="-457200" algn="l" rtl="0">
               <a:lnSpc>
                 <a:spcPct val="100000"/>
               </a:lnSpc>
@@ -11400,9 +11510,33 @@
               </a:buClr>
               <a:buSzPts val="2800"/>
               <a:buFont typeface="Wingdings" panose="05000000000000000000" charset="0"/>
-              <a:buNone/>
+              <a:buChar char="ü"/>
             </a:pPr>
-            <a:endParaRPr lang="en-IN" altLang="en-US" sz="2800" b="0" i="0" u="none" strike="noStrike" cap="none">
+            <a:r>
+              <a:rPr lang="en-IN" altLang="en-US" sz="2800" b="0" i="0" u="none" strike="noStrike" cap="none" dirty="0" err="1">
+                <a:solidFill>
+                  <a:srgbClr val="DFBB64"/>
+                </a:solidFill>
+                <a:latin typeface="Calibri" panose="020F0502020204030204"/>
+                <a:ea typeface="Calibri" panose="020F0502020204030204"/>
+                <a:cs typeface="Calibri" panose="020F0502020204030204"/>
+                <a:sym typeface="Calibri" panose="020F0502020204030204"/>
+              </a:rPr>
+              <a:t>Hierarchial</a:t>
+            </a:r>
+            <a:r>
+              <a:rPr lang="en-IN" altLang="en-US" sz="2800" b="0" i="0" u="none" strike="noStrike" cap="none" dirty="0">
+                <a:solidFill>
+                  <a:srgbClr val="DFBB64"/>
+                </a:solidFill>
+                <a:latin typeface="Calibri" panose="020F0502020204030204"/>
+                <a:ea typeface="Calibri" panose="020F0502020204030204"/>
+                <a:cs typeface="Calibri" panose="020F0502020204030204"/>
+                <a:sym typeface="Calibri" panose="020F0502020204030204"/>
+              </a:rPr>
+              <a:t> Inheritance</a:t>
+            </a:r>
+            <a:endParaRPr lang="en-US" sz="2800" b="0" i="0" u="none" strike="noStrike" cap="none" dirty="0">
               <a:solidFill>
                 <a:srgbClr val="DFBB64"/>
               </a:solidFill>
@@ -11413,46 +11547,6 @@
             </a:endParaRPr>
           </a:p>
           <a:p>
-            <a:pPr marL="457200" marR="0" lvl="0" indent="-457200" algn="l" rtl="0">
-              <a:lnSpc>
-                <a:spcPct val="100000"/>
-              </a:lnSpc>
-              <a:spcBef>
-                <a:spcPts val="0"/>
-              </a:spcBef>
-              <a:spcAft>
-                <a:spcPts val="0"/>
-              </a:spcAft>
-              <a:buClr>
-                <a:srgbClr val="DFBB64"/>
-              </a:buClr>
-              <a:buSzPts val="2800"/>
-              <a:buFont typeface="Wingdings" panose="05000000000000000000" charset="0"/>
-              <a:buChar char="ü"/>
-            </a:pPr>
-            <a:r>
-              <a:rPr lang="en-IN" altLang="en-US" sz="2800" b="0" i="0" u="none" strike="noStrike" cap="none">
-                <a:solidFill>
-                  <a:srgbClr val="DFBB64"/>
-                </a:solidFill>
-                <a:latin typeface="Calibri" panose="020F0502020204030204"/>
-                <a:ea typeface="Calibri" panose="020F0502020204030204"/>
-                <a:cs typeface="Calibri" panose="020F0502020204030204"/>
-                <a:sym typeface="Calibri" panose="020F0502020204030204"/>
-              </a:rPr>
-              <a:t>Hierarchial Inheritance</a:t>
-            </a:r>
-            <a:endParaRPr lang="en-US" sz="2800" b="0" i="0" u="none" strike="noStrike" cap="none">
-              <a:solidFill>
-                <a:srgbClr val="DFBB64"/>
-              </a:solidFill>
-              <a:latin typeface="Calibri" panose="020F0502020204030204"/>
-              <a:ea typeface="Calibri" panose="020F0502020204030204"/>
-              <a:cs typeface="Calibri" panose="020F0502020204030204"/>
-              <a:sym typeface="Calibri" panose="020F0502020204030204"/>
-            </a:endParaRPr>
-          </a:p>
-          <a:p>
             <a:pPr marL="0" marR="0" lvl="0" indent="0" algn="l" rtl="0">
               <a:lnSpc>
                 <a:spcPct val="100000"/>
@@ -11470,7 +11564,7 @@
               <a:buFont typeface="Arial" panose="020B0604020202020204"/>
               <a:buNone/>
             </a:pPr>
-            <a:endParaRPr sz="2800" b="0" i="0" u="none" strike="noStrike" cap="none">
+            <a:endParaRPr sz="2800" b="0" i="0" u="none" strike="noStrike" cap="none" dirty="0">
               <a:solidFill>
                 <a:srgbClr val="DFBB64"/>
               </a:solidFill>
@@ -11669,7 +11763,7 @@
           <p:nvPr/>
         </p:nvPicPr>
         <p:blipFill rotWithShape="1">
-          <a:blip r:embed="rId1"/>
+          <a:blip r:embed="rId3"/>
           <a:srcRect l="1854"/>
           <a:stretch>
             <a:fillRect/>
@@ -11696,7 +11790,7 @@
           <p:nvPr/>
         </p:nvPicPr>
         <p:blipFill rotWithShape="1">
-          <a:blip r:embed="rId2"/>
+          <a:blip r:embed="rId4"/>
           <a:srcRect/>
           <a:stretch>
             <a:fillRect/>
@@ -11721,13 +11815,13 @@
   <p:clrMapOvr>
     <a:masterClrMapping/>
   </p:clrMapOvr>
-  <mc:AlternateContent xmlns:mc="http://schemas.openxmlformats.org/markup-compatibility/2006">
-    <mc:Choice xmlns:p14="http://schemas.microsoft.com/office/powerpoint/2010/main" Requires="p14">
+  <mc:AlternateContent xmlns:mc="http://schemas.openxmlformats.org/markup-compatibility/2006" xmlns:p14="http://schemas.microsoft.com/office/powerpoint/2010/main">
+    <mc:Choice Requires="p14">
       <p:transition spd="slow" p14:dur="1500">
         <p:split orient="vert" dir="in"/>
       </p:transition>
     </mc:Choice>
-    <mc:Fallback>
+    <mc:Fallback xmlns="">
       <p:transition spd="slow">
         <p:split orient="vert" dir="in"/>
       </p:transition>
@@ -11903,14 +11997,14 @@
                 </p:childTnLst>
               </p:cTn>
               <p:prevCondLst>
-                <p:cond evt="onPrev">
+                <p:cond evt="onPrev" delay="0">
                   <p:tgtEl>
                     <p:sldTgt/>
                   </p:tgtEl>
                 </p:cond>
               </p:prevCondLst>
               <p:nextCondLst>
-                <p:cond evt="onNext">
+                <p:cond evt="onNext" delay="0">
                   <p:tgtEl>
                     <p:sldTgt/>
                   </p:tgtEl>
@@ -11930,7 +12024,7 @@
   <p:cSld>
     <p:spTree>
       <p:nvGrpSpPr>
-        <p:cNvPr id="200" name="Shape 200"/>
+        <p:cNvPr id="1" name="Shape 200"/>
         <p:cNvGrpSpPr/>
         <p:nvPr/>
       </p:nvGrpSpPr>
@@ -12459,7 +12553,7 @@
           <p:nvPr/>
         </p:nvPicPr>
         <p:blipFill rotWithShape="1">
-          <a:blip r:embed="rId1"/>
+          <a:blip r:embed="rId3"/>
           <a:srcRect t="13222" b="3680"/>
           <a:stretch>
             <a:fillRect/>
@@ -12486,7 +12580,7 @@
           <p:nvPr/>
         </p:nvPicPr>
         <p:blipFill rotWithShape="1">
-          <a:blip r:embed="rId2"/>
+          <a:blip r:embed="rId4"/>
           <a:srcRect t="13799" b="1951"/>
           <a:stretch>
             <a:fillRect/>
@@ -12513,7 +12607,7 @@
           <p:nvPr/>
         </p:nvPicPr>
         <p:blipFill rotWithShape="1">
-          <a:blip r:embed="rId3"/>
+          <a:blip r:embed="rId5"/>
           <a:srcRect/>
           <a:stretch>
             <a:fillRect/>
@@ -12538,13 +12632,13 @@
   <p:clrMapOvr>
     <a:masterClrMapping/>
   </p:clrMapOvr>
-  <mc:AlternateContent xmlns:mc="http://schemas.openxmlformats.org/markup-compatibility/2006">
-    <mc:Choice xmlns:p14="http://schemas.microsoft.com/office/powerpoint/2010/main" Requires="p14">
+  <mc:AlternateContent xmlns:mc="http://schemas.openxmlformats.org/markup-compatibility/2006" xmlns:p14="http://schemas.microsoft.com/office/powerpoint/2010/main">
+    <mc:Choice Requires="p14">
       <p:transition spd="slow" p14:dur="1500">
         <p:split orient="vert" dir="in"/>
       </p:transition>
     </mc:Choice>
-    <mc:Fallback>
+    <mc:Fallback xmlns="">
       <p:transition spd="slow">
         <p:split orient="vert" dir="in"/>
       </p:transition>
@@ -12755,14 +12849,14 @@
                 </p:childTnLst>
               </p:cTn>
               <p:prevCondLst>
-                <p:cond evt="onPrev">
+                <p:cond evt="onPrev" delay="0">
                   <p:tgtEl>
                     <p:sldTgt/>
                   </p:tgtEl>
                 </p:cond>
               </p:prevCondLst>
               <p:nextCondLst>
-                <p:cond evt="onNext">
+                <p:cond evt="onNext" delay="0">
                   <p:tgtEl>
                     <p:sldTgt/>
                   </p:tgtEl>
@@ -12782,7 +12876,7 @@
   <p:cSld>
     <p:spTree>
       <p:nvGrpSpPr>
-        <p:cNvPr id="229" name="Shape 229"/>
+        <p:cNvPr id="1" name="Shape 229"/>
         <p:cNvGrpSpPr/>
         <p:nvPr/>
       </p:nvGrpSpPr>
@@ -13483,7 +13577,7 @@
           <p:nvPr/>
         </p:nvPicPr>
         <p:blipFill rotWithShape="1">
-          <a:blip r:embed="rId1"/>
+          <a:blip r:embed="rId3"/>
           <a:srcRect/>
           <a:stretch>
             <a:fillRect/>
@@ -13510,7 +13604,7 @@
           <p:nvPr/>
         </p:nvPicPr>
         <p:blipFill rotWithShape="1">
-          <a:blip r:embed="rId2"/>
+          <a:blip r:embed="rId4"/>
           <a:srcRect/>
           <a:stretch>
             <a:fillRect/>
@@ -13535,13 +13629,13 @@
   <p:clrMapOvr>
     <a:masterClrMapping/>
   </p:clrMapOvr>
-  <mc:AlternateContent xmlns:mc="http://schemas.openxmlformats.org/markup-compatibility/2006">
-    <mc:Choice xmlns:p14="http://schemas.microsoft.com/office/powerpoint/2010/main" Requires="p14">
+  <mc:AlternateContent xmlns:mc="http://schemas.openxmlformats.org/markup-compatibility/2006" xmlns:p14="http://schemas.microsoft.com/office/powerpoint/2010/main">
+    <mc:Choice Requires="p14">
       <p:transition spd="slow" p14:dur="1500">
         <p:split orient="vert" dir="in"/>
       </p:transition>
     </mc:Choice>
-    <mc:Fallback>
+    <mc:Fallback xmlns="">
       <p:transition spd="slow">
         <p:split orient="vert" dir="in"/>
       </p:transition>
@@ -13717,14 +13811,14 @@
                 </p:childTnLst>
               </p:cTn>
               <p:prevCondLst>
-                <p:cond evt="onPrev">
+                <p:cond evt="onPrev" delay="0">
                   <p:tgtEl>
                     <p:sldTgt/>
                   </p:tgtEl>
                 </p:cond>
               </p:prevCondLst>
               <p:nextCondLst>
-                <p:cond evt="onNext">
+                <p:cond evt="onNext" delay="0">
                   <p:tgtEl>
                     <p:sldTgt/>
                   </p:tgtEl>
@@ -13744,7 +13838,7 @@
   <p:cSld>
     <p:spTree>
       <p:nvGrpSpPr>
-        <p:cNvPr id="215" name="Shape 215"/>
+        <p:cNvPr id="1" name="Shape 215"/>
         <p:cNvGrpSpPr/>
         <p:nvPr/>
       </p:nvGrpSpPr>
@@ -14325,7 +14419,7 @@
           <p:nvPr/>
         </p:nvPicPr>
         <p:blipFill rotWithShape="1">
-          <a:blip r:embed="rId1"/>
+          <a:blip r:embed="rId3"/>
           <a:srcRect l="2908" r="3163"/>
           <a:stretch>
             <a:fillRect/>
@@ -14352,7 +14446,7 @@
           <p:nvPr/>
         </p:nvPicPr>
         <p:blipFill rotWithShape="1">
-          <a:blip r:embed="rId2"/>
+          <a:blip r:embed="rId4"/>
           <a:srcRect/>
           <a:stretch>
             <a:fillRect/>
@@ -14377,13 +14471,13 @@
   <p:clrMapOvr>
     <a:masterClrMapping/>
   </p:clrMapOvr>
-  <mc:AlternateContent xmlns:mc="http://schemas.openxmlformats.org/markup-compatibility/2006">
-    <mc:Choice xmlns:p14="http://schemas.microsoft.com/office/powerpoint/2010/main" Requires="p14">
+  <mc:AlternateContent xmlns:mc="http://schemas.openxmlformats.org/markup-compatibility/2006" xmlns:p14="http://schemas.microsoft.com/office/powerpoint/2010/main">
+    <mc:Choice Requires="p14">
       <p:transition spd="slow" p14:dur="1500">
         <p:split orient="vert" dir="in"/>
       </p:transition>
     </mc:Choice>
-    <mc:Fallback>
+    <mc:Fallback xmlns="">
       <p:transition spd="slow">
         <p:split orient="vert" dir="in"/>
       </p:transition>
@@ -14559,14 +14653,14 @@
                 </p:childTnLst>
               </p:cTn>
               <p:prevCondLst>
-                <p:cond evt="onPrev">
+                <p:cond evt="onPrev" delay="0">
                   <p:tgtEl>
                     <p:sldTgt/>
                   </p:tgtEl>
                 </p:cond>
               </p:prevCondLst>
               <p:nextCondLst>
-                <p:cond evt="onNext">
+                <p:cond evt="onNext" delay="0">
                   <p:tgtEl>
                     <p:sldTgt/>
                   </p:tgtEl>
@@ -14586,7 +14680,7 @@
   <p:cSld>
     <p:spTree>
       <p:nvGrpSpPr>
-        <p:cNvPr id="243" name="Shape 243"/>
+        <p:cNvPr id="1" name="Shape 243"/>
         <p:cNvGrpSpPr/>
         <p:nvPr/>
       </p:nvGrpSpPr>
@@ -15167,7 +15261,7 @@
           <p:nvPr/>
         </p:nvPicPr>
         <p:blipFill rotWithShape="1">
-          <a:blip r:embed="rId1"/>
+          <a:blip r:embed="rId3"/>
           <a:srcRect/>
           <a:stretch>
             <a:fillRect/>
@@ -15196,7 +15290,7 @@
           <p:nvPr/>
         </p:nvPicPr>
         <p:blipFill>
-          <a:blip r:embed="rId2"/>
+          <a:blip r:embed="rId4"/>
           <a:srcRect r="3333"/>
           <a:stretch>
             <a:fillRect/>
@@ -15217,13 +15311,13 @@
   <p:clrMapOvr>
     <a:masterClrMapping/>
   </p:clrMapOvr>
-  <mc:AlternateContent xmlns:mc="http://schemas.openxmlformats.org/markup-compatibility/2006">
-    <mc:Choice xmlns:p14="http://schemas.microsoft.com/office/powerpoint/2010/main" Requires="p14">
+  <mc:AlternateContent xmlns:mc="http://schemas.openxmlformats.org/markup-compatibility/2006" xmlns:p14="http://schemas.microsoft.com/office/powerpoint/2010/main">
+    <mc:Choice Requires="p14">
       <p:transition spd="slow" p14:dur="1500">
         <p:split orient="vert" dir="in"/>
       </p:transition>
     </mc:Choice>
-    <mc:Fallback>
+    <mc:Fallback xmlns="">
       <p:transition spd="slow">
         <p:split orient="vert" dir="in"/>
       </p:transition>
@@ -15346,14 +15440,14 @@
                 </p:childTnLst>
               </p:cTn>
               <p:prevCondLst>
-                <p:cond evt="onPrev">
+                <p:cond evt="onPrev" delay="0">
                   <p:tgtEl>
                     <p:sldTgt/>
                   </p:tgtEl>
                 </p:cond>
               </p:prevCondLst>
               <p:nextCondLst>
-                <p:cond evt="onNext">
+                <p:cond evt="onNext" delay="0">
                   <p:tgtEl>
                     <p:sldTgt/>
                   </p:tgtEl>
@@ -15373,7 +15467,7 @@
   <p:cSld>
     <p:spTree>
       <p:nvGrpSpPr>
-        <p:cNvPr id="257" name="Shape 257"/>
+        <p:cNvPr id="1" name="Shape 257"/>
         <p:cNvGrpSpPr/>
         <p:nvPr/>
       </p:nvGrpSpPr>
@@ -16126,7 +16220,7 @@
           <p:nvPr/>
         </p:nvPicPr>
         <p:blipFill rotWithShape="1">
-          <a:blip r:embed="rId1"/>
+          <a:blip r:embed="rId3"/>
           <a:srcRect/>
           <a:stretch>
             <a:fillRect/>
@@ -16219,7 +16313,7 @@
           <p:nvPr/>
         </p:nvPicPr>
         <p:blipFill rotWithShape="1">
-          <a:blip r:embed="rId2"/>
+          <a:blip r:embed="rId4"/>
           <a:srcRect/>
           <a:stretch>
             <a:fillRect/>
@@ -16244,13 +16338,13 @@
   <p:clrMapOvr>
     <a:masterClrMapping/>
   </p:clrMapOvr>
-  <mc:AlternateContent xmlns:mc="http://schemas.openxmlformats.org/markup-compatibility/2006">
-    <mc:Choice xmlns:p14="http://schemas.microsoft.com/office/powerpoint/2010/main" Requires="p14">
+  <mc:AlternateContent xmlns:mc="http://schemas.openxmlformats.org/markup-compatibility/2006" xmlns:p14="http://schemas.microsoft.com/office/powerpoint/2010/main">
+    <mc:Choice Requires="p14">
       <p:transition spd="slow" p14:dur="1500">
         <p:split orient="vert" dir="in"/>
       </p:transition>
     </mc:Choice>
-    <mc:Fallback>
+    <mc:Fallback xmlns="">
       <p:transition spd="slow">
         <p:split orient="vert" dir="in"/>
       </p:transition>
@@ -16742,14 +16836,14 @@
                 </p:childTnLst>
               </p:cTn>
               <p:prevCondLst>
-                <p:cond evt="onPrev">
+                <p:cond evt="onPrev" delay="0">
                   <p:tgtEl>
                     <p:sldTgt/>
                   </p:tgtEl>
                 </p:cond>
               </p:prevCondLst>
               <p:nextCondLst>
-                <p:cond evt="onNext">
+                <p:cond evt="onNext" delay="0">
                   <p:tgtEl>
                     <p:sldTgt/>
                   </p:tgtEl>
@@ -16769,7 +16863,7 @@
   <p:cSld>
     <p:spTree>
       <p:nvGrpSpPr>
-        <p:cNvPr id="292" name="Shape 292"/>
+        <p:cNvPr id="1" name="Shape 292"/>
         <p:cNvGrpSpPr/>
         <p:nvPr/>
       </p:nvGrpSpPr>
@@ -16900,7 +16994,7 @@
           <p:nvPr/>
         </p:nvPicPr>
         <p:blipFill rotWithShape="1">
-          <a:blip r:embed="rId1"/>
+          <a:blip r:embed="rId3"/>
           <a:srcRect/>
           <a:stretch>
             <a:fillRect/>
@@ -16972,31 +17066,7 @@
                 <a:cs typeface="Arial" panose="020B0604020202020204"/>
                 <a:sym typeface="Arial" panose="020B0604020202020204"/>
               </a:rPr>
-              <a:t>Conclusi</a:t>
-            </a:r>
-            <a:r>
-              <a:rPr lang="en-US" sz="4000" b="0" i="0" u="none" strike="noStrike" cap="none">
-                <a:solidFill>
-                  <a:schemeClr val="lt1"/>
-                </a:solidFill>
-                <a:latin typeface="Arial" panose="020B0604020202020204"/>
-                <a:ea typeface="Arial" panose="020B0604020202020204"/>
-                <a:cs typeface="Arial" panose="020B0604020202020204"/>
-                <a:sym typeface="Arial" panose="020B0604020202020204"/>
-              </a:rPr>
-              <a:t>o</a:t>
-            </a:r>
-            <a:r>
-              <a:rPr lang="en-US" sz="4000" b="0" i="0" u="none" strike="noStrike" cap="none">
-                <a:solidFill>
-                  <a:schemeClr val="lt1"/>
-                </a:solidFill>
-                <a:latin typeface="Arial" panose="020B0604020202020204"/>
-                <a:ea typeface="Arial" panose="020B0604020202020204"/>
-                <a:cs typeface="Arial" panose="020B0604020202020204"/>
-                <a:sym typeface="Arial" panose="020B0604020202020204"/>
-              </a:rPr>
-              <a:t>n</a:t>
+              <a:t>Conclusion</a:t>
             </a:r>
             <a:endParaRPr sz="4000" b="0" i="0" u="none" strike="noStrike" cap="none">
               <a:solidFill>
@@ -17190,15 +17260,6 @@
               </a:rPr>
               <a:t>:</a:t>
             </a:r>
-            <a:endParaRPr lang="en-IN" altLang="en-US" sz="2800" b="0" i="0" u="none" strike="noStrike" cap="none">
-              <a:solidFill>
-                <a:srgbClr val="DAB865"/>
-              </a:solidFill>
-              <a:latin typeface="Calibri" panose="020F0502020204030204"/>
-              <a:ea typeface="Calibri" panose="020F0502020204030204"/>
-              <a:cs typeface="Calibri" panose="020F0502020204030204"/>
-              <a:sym typeface="Calibri" panose="020F0502020204030204"/>
-            </a:endParaRPr>
           </a:p>
           <a:p>
             <a:pPr marL="457200" marR="0" lvl="0" indent="-457200" algn="l" rtl="0">
@@ -17230,15 +17291,6 @@
               </a:rPr>
               <a:t>Class &amp; Object</a:t>
             </a:r>
-            <a:endParaRPr lang="en-IN" altLang="en-US" sz="2800" b="0" i="0" u="none" strike="noStrike" cap="none">
-              <a:solidFill>
-                <a:srgbClr val="DAB865"/>
-              </a:solidFill>
-              <a:latin typeface="Calibri" panose="020F0502020204030204"/>
-              <a:ea typeface="Calibri" panose="020F0502020204030204"/>
-              <a:cs typeface="Calibri" panose="020F0502020204030204"/>
-              <a:sym typeface="Calibri" panose="020F0502020204030204"/>
-            </a:endParaRPr>
           </a:p>
           <a:p>
             <a:pPr marL="457200" marR="0" lvl="0" indent="-457200" algn="l" rtl="0">
@@ -17270,15 +17322,6 @@
               </a:rPr>
               <a:t>Constructors</a:t>
             </a:r>
-            <a:endParaRPr lang="en-IN" altLang="en-US" sz="2800" b="0" i="0" u="none" strike="noStrike" cap="none">
-              <a:solidFill>
-                <a:srgbClr val="DAB865"/>
-              </a:solidFill>
-              <a:latin typeface="Calibri" panose="020F0502020204030204"/>
-              <a:ea typeface="Calibri" panose="020F0502020204030204"/>
-              <a:cs typeface="Calibri" panose="020F0502020204030204"/>
-              <a:sym typeface="Calibri" panose="020F0502020204030204"/>
-            </a:endParaRPr>
           </a:p>
           <a:p>
             <a:pPr marL="457200" marR="0" lvl="0" indent="-457200" algn="l" rtl="0">
@@ -17310,15 +17353,6 @@
               </a:rPr>
               <a:t>Parameter function</a:t>
             </a:r>
-            <a:endParaRPr lang="en-IN" altLang="en-US" sz="2800" b="0" i="0" u="none" strike="noStrike" cap="none">
-              <a:solidFill>
-                <a:srgbClr val="DAB865"/>
-              </a:solidFill>
-              <a:latin typeface="Calibri" panose="020F0502020204030204"/>
-              <a:ea typeface="Calibri" panose="020F0502020204030204"/>
-              <a:cs typeface="Calibri" panose="020F0502020204030204"/>
-              <a:sym typeface="Calibri" panose="020F0502020204030204"/>
-            </a:endParaRPr>
           </a:p>
           <a:p>
             <a:pPr marL="0" marR="0" lvl="0" indent="0" algn="l" rtl="0">
@@ -17665,7 +17699,7 @@
           <p:nvPr/>
         </p:nvPicPr>
         <p:blipFill rotWithShape="1">
-          <a:blip r:embed="rId2"/>
+          <a:blip r:embed="rId4"/>
           <a:srcRect r="1437"/>
           <a:stretch>
             <a:fillRect/>
@@ -17692,7 +17726,7 @@
           <p:nvPr/>
         </p:nvPicPr>
         <p:blipFill rotWithShape="1">
-          <a:blip r:embed="rId3"/>
+          <a:blip r:embed="rId5"/>
           <a:srcRect/>
           <a:stretch>
             <a:fillRect/>
@@ -17717,13 +17751,13 @@
   <p:clrMapOvr>
     <a:masterClrMapping/>
   </p:clrMapOvr>
-  <mc:AlternateContent xmlns:mc="http://schemas.openxmlformats.org/markup-compatibility/2006">
-    <mc:Choice xmlns:p14="http://schemas.microsoft.com/office/powerpoint/2010/main" Requires="p14">
+  <mc:AlternateContent xmlns:mc="http://schemas.openxmlformats.org/markup-compatibility/2006" xmlns:p14="http://schemas.microsoft.com/office/powerpoint/2010/main">
+    <mc:Choice Requires="p14">
       <p:transition spd="slow" p14:dur="1500">
         <p:split orient="vert" dir="in"/>
       </p:transition>
     </mc:Choice>
-    <mc:Fallback>
+    <mc:Fallback xmlns="">
       <p:transition spd="slow">
         <p:split orient="vert" dir="in"/>
       </p:transition>
@@ -17837,12 +17871,12 @@
                                         </p:attrNameLst>
                                       </p:cBhvr>
                                       <p:tavLst>
-                                        <p:tav tm="0" fmla="">
+                                        <p:tav tm="0">
                                           <p:val>
                                             <p:strVal val="#ppt_y+1"/>
                                           </p:val>
                                         </p:tav>
-                                        <p:tav tm="100000" fmla="">
+                                        <p:tav tm="100000">
                                           <p:val>
                                             <p:strVal val="#ppt_y"/>
                                           </p:val>
@@ -17887,12 +17921,12 @@
                                         </p:attrNameLst>
                                       </p:cBhvr>
                                       <p:tavLst>
-                                        <p:tav tm="0" fmla="">
+                                        <p:tav tm="0">
                                           <p:val>
                                             <p:strVal val="#ppt_y+1"/>
                                           </p:val>
                                         </p:tav>
-                                        <p:tav tm="100000" fmla="">
+                                        <p:tav tm="100000">
                                           <p:val>
                                             <p:strVal val="#ppt_y"/>
                                           </p:val>
@@ -17964,14 +17998,14 @@
                 </p:childTnLst>
               </p:cTn>
               <p:prevCondLst>
-                <p:cond evt="onPrev">
+                <p:cond evt="onPrev" delay="0">
                   <p:tgtEl>
                     <p:sldTgt/>
                   </p:tgtEl>
                 </p:cond>
               </p:prevCondLst>
               <p:nextCondLst>
-                <p:cond evt="onNext">
+                <p:cond evt="onNext" delay="0">
                   <p:tgtEl>
                     <p:sldTgt/>
                   </p:tgtEl>
@@ -17992,7 +18026,7 @@
     <p:bg>
       <p:bgPr>
         <a:blipFill>
-          <a:blip r:embed="rId1"/>
+          <a:blip r:embed="rId3"/>
           <a:stretch>
             <a:fillRect/>
           </a:stretch>
@@ -18002,7 +18036,7 @@
     </p:bg>
     <p:spTree>
       <p:nvGrpSpPr>
-        <p:cNvPr id="40" name="Shape 40"/>
+        <p:cNvPr id="1" name="Shape 40"/>
         <p:cNvGrpSpPr/>
         <p:nvPr/>
       </p:nvGrpSpPr>
@@ -18022,7 +18056,7 @@
         </p:nvSpPr>
         <p:spPr>
           <a:xfrm>
-            <a:off x="-635" y="0"/>
+            <a:off x="-635" y="9832"/>
             <a:ext cx="12192000" cy="7146925"/>
           </a:xfrm>
           <a:prstGeom prst="rect">
@@ -18304,15 +18338,6 @@
               </a:rPr>
               <a:t>Dart is an object-oriented programming language.</a:t>
             </a:r>
-            <a:endParaRPr sz="2800" b="0" i="0" u="none" strike="noStrike" cap="none">
-              <a:solidFill>
-                <a:srgbClr val="DAB865"/>
-              </a:solidFill>
-              <a:latin typeface="Calibri" panose="020F0502020204030204"/>
-              <a:ea typeface="Calibri" panose="020F0502020204030204"/>
-              <a:cs typeface="Calibri" panose="020F0502020204030204"/>
-              <a:sym typeface="Calibri" panose="020F0502020204030204"/>
-            </a:endParaRPr>
           </a:p>
         </p:txBody>
       </p:sp>
@@ -18323,7 +18348,7 @@
           <p:nvPr/>
         </p:nvPicPr>
         <p:blipFill rotWithShape="1">
-          <a:blip r:embed="rId2"/>
+          <a:blip r:embed="rId4"/>
           <a:srcRect/>
           <a:stretch>
             <a:fillRect/>
@@ -18350,7 +18375,7 @@
           <p:nvPr/>
         </p:nvPicPr>
         <p:blipFill rotWithShape="1">
-          <a:blip r:embed="rId3">
+          <a:blip r:embed="rId5">
             <a:alphaModFix amt="68000"/>
           </a:blip>
           <a:srcRect l="1260" t="1582" r="7610" b="9699"/>
@@ -18395,6 +18420,7 @@
           <a:bodyPr spcFirstLastPara="1" wrap="square" lIns="91425" tIns="45700" rIns="91425" bIns="45700" anchor="t" anchorCtr="0">
             <a:noAutofit/>
           </a:bodyPr>
+          <a:lstStyle/>
           <a:p>
             <a:pPr marL="342900" marR="0" lvl="0" indent="-342900" algn="l" rtl="0">
               <a:lnSpc>
@@ -18414,7 +18440,7 @@
               <a:buChar char="•"/>
             </a:pPr>
             <a:r>
-              <a:rPr sz="2800" b="0" i="0" u="none" strike="noStrike" cap="none">
+              <a:rPr sz="2800" b="0" i="0" u="none" strike="noStrike" cap="none" dirty="0">
                 <a:solidFill>
                   <a:srgbClr val="DAB865"/>
                 </a:solidFill>
@@ -18425,15 +18451,6 @@
               </a:rPr>
               <a:t>The main goal of oops concepts in dart is to reduce programming complexity &amp; can execute many tasks at once.</a:t>
             </a:r>
-            <a:endParaRPr sz="2800" b="0" i="0" u="none" strike="noStrike" cap="none">
-              <a:solidFill>
-                <a:srgbClr val="DAB865"/>
-              </a:solidFill>
-              <a:latin typeface="Calibri" panose="020F0502020204030204"/>
-              <a:ea typeface="Calibri" panose="020F0502020204030204"/>
-              <a:cs typeface="Calibri" panose="020F0502020204030204"/>
-              <a:sym typeface="Calibri" panose="020F0502020204030204"/>
-            </a:endParaRPr>
           </a:p>
         </p:txBody>
       </p:sp>
@@ -18460,6 +18477,7 @@
           <a:bodyPr spcFirstLastPara="1" wrap="square" lIns="91425" tIns="45700" rIns="91425" bIns="45700" anchor="t" anchorCtr="0">
             <a:noAutofit/>
           </a:bodyPr>
+          <a:lstStyle/>
           <a:p>
             <a:pPr marL="342900" marR="0" lvl="0" indent="-342900" algn="l" rtl="0">
               <a:lnSpc>
@@ -18479,7 +18497,7 @@
               <a:buChar char="•"/>
             </a:pPr>
             <a:r>
-              <a:rPr sz="2800" b="0" i="0" u="none" strike="noStrike" cap="none">
+              <a:rPr sz="2800" b="0" i="0" u="none" strike="noStrike" cap="none" dirty="0">
                 <a:solidFill>
                   <a:srgbClr val="DAB865"/>
                 </a:solidFill>
@@ -18490,15 +18508,6 @@
               </a:rPr>
               <a:t>Object-Oriented Programming (OOP) in Dart offers several benefits, making it easier to build scalable, maintainable, and reusable software.</a:t>
             </a:r>
-            <a:endParaRPr sz="2800" b="0" i="0" u="none" strike="noStrike" cap="none">
-              <a:solidFill>
-                <a:srgbClr val="DAB865"/>
-              </a:solidFill>
-              <a:latin typeface="Calibri" panose="020F0502020204030204"/>
-              <a:ea typeface="Calibri" panose="020F0502020204030204"/>
-              <a:cs typeface="Calibri" panose="020F0502020204030204"/>
-              <a:sym typeface="Calibri" panose="020F0502020204030204"/>
-            </a:endParaRPr>
           </a:p>
         </p:txBody>
       </p:sp>
@@ -18507,13 +18516,13 @@
   <p:clrMapOvr>
     <a:masterClrMapping/>
   </p:clrMapOvr>
-  <mc:AlternateContent xmlns:mc="http://schemas.openxmlformats.org/markup-compatibility/2006">
-    <mc:Choice xmlns:p14="http://schemas.microsoft.com/office/powerpoint/2010/main" Requires="p14">
-      <p:transition spd="slow" p14:dur="699">
+  <mc:AlternateContent xmlns:mc="http://schemas.openxmlformats.org/markup-compatibility/2006" xmlns:p14="http://schemas.microsoft.com/office/powerpoint/2010/main">
+    <mc:Choice Requires="p14">
+      <p:transition spd="med" p14:dur="699">
         <p:fade/>
       </p:transition>
     </mc:Choice>
-    <mc:Fallback>
+    <mc:Fallback xmlns="">
       <p:transition spd="slow">
         <p:fade/>
       </p:transition>
@@ -18795,14 +18804,14 @@
                 </p:childTnLst>
               </p:cTn>
               <p:prevCondLst>
-                <p:cond evt="onPrev">
+                <p:cond evt="onPrev" delay="0">
                   <p:tgtEl>
                     <p:sldTgt/>
                   </p:tgtEl>
                 </p:cond>
               </p:prevCondLst>
               <p:nextCondLst>
-                <p:cond evt="onNext">
+                <p:cond evt="onNext" delay="0">
                   <p:tgtEl>
                     <p:sldTgt/>
                   </p:tgtEl>
@@ -18823,7 +18832,7 @@
     <p:bg>
       <p:bgPr>
         <a:blipFill>
-          <a:blip r:embed="rId1"/>
+          <a:blip r:embed="rId3"/>
           <a:stretch>
             <a:fillRect/>
           </a:stretch>
@@ -18833,7 +18842,7 @@
     </p:bg>
     <p:spTree>
       <p:nvGrpSpPr>
-        <p:cNvPr id="40" name="Shape 40"/>
+        <p:cNvPr id="1" name="Shape 40"/>
         <p:cNvGrpSpPr/>
         <p:nvPr/>
       </p:nvGrpSpPr>
@@ -18853,7 +18862,7 @@
         </p:nvSpPr>
         <p:spPr>
           <a:xfrm>
-            <a:off x="-635" y="0"/>
+            <a:off x="-635" y="20320"/>
             <a:ext cx="12192000" cy="7146925"/>
           </a:xfrm>
           <a:prstGeom prst="rect">
@@ -18955,15 +18964,6 @@
               </a:rPr>
               <a:t>Oops</a:t>
             </a:r>
-            <a:endParaRPr lang="en-IN" sz="4000" b="0" i="0" u="none" strike="noStrike" cap="none">
-              <a:solidFill>
-                <a:schemeClr val="lt1"/>
-              </a:solidFill>
-              <a:latin typeface="Arial" panose="020B0604020202020204"/>
-              <a:ea typeface="Arial" panose="020B0604020202020204"/>
-              <a:cs typeface="Arial" panose="020B0604020202020204"/>
-              <a:sym typeface="Arial" panose="020B0604020202020204"/>
-            </a:endParaRPr>
           </a:p>
         </p:txBody>
       </p:sp>
@@ -19124,7 +19124,7 @@
               <a:buChar char="•"/>
             </a:pPr>
             <a:r>
-              <a:rPr lang="en-US" sz="2800" b="0" i="0" u="none" strike="noStrike" cap="none">
+              <a:rPr lang="en-US" sz="2800" b="0" i="0" u="none" strike="noStrike" cap="none" dirty="0">
                 <a:solidFill>
                   <a:srgbClr val="DAB865"/>
                 </a:solidFill>
@@ -19135,7 +19135,7 @@
               </a:rPr>
               <a:t>Defining classes and creating objects</a:t>
             </a:r>
-            <a:endParaRPr sz="2800" b="0" i="0" u="none" strike="noStrike" cap="none">
+            <a:endParaRPr sz="2800" b="0" i="0" u="none" strike="noStrike" cap="none" dirty="0">
               <a:solidFill>
                 <a:srgbClr val="DAB865"/>
               </a:solidFill>
@@ -19190,7 +19190,7 @@
               <a:buChar char="•"/>
             </a:pPr>
             <a:r>
-              <a:rPr lang="en-US" sz="2800" b="0" i="0" u="none" strike="noStrike" cap="none">
+              <a:rPr lang="en-US" sz="2800" b="0" i="0" u="none" strike="noStrike" cap="none" dirty="0">
                 <a:solidFill>
                   <a:srgbClr val="DAB865"/>
                 </a:solidFill>
@@ -19201,7 +19201,7 @@
               </a:rPr>
               <a:t>Understanding class members: properties, methods, and constructors</a:t>
             </a:r>
-            <a:endParaRPr sz="2800" b="0" i="0" u="none" strike="noStrike" cap="none">
+            <a:endParaRPr sz="2800" b="0" i="0" u="none" strike="noStrike" cap="none" dirty="0">
               <a:solidFill>
                 <a:srgbClr val="DAB865"/>
               </a:solidFill>
@@ -19220,7 +19220,7 @@
           <p:nvPr/>
         </p:nvPicPr>
         <p:blipFill rotWithShape="1">
-          <a:blip r:embed="rId1"/>
+          <a:blip r:embed="rId3"/>
           <a:srcRect/>
           <a:stretch>
             <a:fillRect/>
@@ -19247,7 +19247,7 @@
           <p:nvPr/>
         </p:nvPicPr>
         <p:blipFill rotWithShape="1">
-          <a:blip r:embed="rId2"/>
+          <a:blip r:embed="rId4"/>
           <a:srcRect/>
           <a:stretch>
             <a:fillRect/>
@@ -19290,6 +19290,7 @@
           <a:bodyPr spcFirstLastPara="1" wrap="square" lIns="91425" tIns="45700" rIns="91425" bIns="45700" anchor="t" anchorCtr="0">
             <a:spAutoFit/>
           </a:bodyPr>
+          <a:lstStyle/>
           <a:p>
             <a:pPr marL="342900" marR="0" lvl="0" indent="-342900" algn="l" rtl="0">
               <a:lnSpc>
@@ -19356,15 +19357,6 @@
               </a:rPr>
               <a:t>:</a:t>
             </a:r>
-            <a:endParaRPr lang="en-IN" sz="2800" b="0" i="0" u="none" strike="noStrike" cap="none">
-              <a:solidFill>
-                <a:srgbClr val="DAB865"/>
-              </a:solidFill>
-              <a:latin typeface="Calibri" panose="020F0502020204030204"/>
-              <a:ea typeface="Calibri" panose="020F0502020204030204"/>
-              <a:cs typeface="Calibri" panose="020F0502020204030204"/>
-              <a:sym typeface="Calibri" panose="020F0502020204030204"/>
-            </a:endParaRPr>
           </a:p>
           <a:p>
             <a:pPr marL="457200" marR="0" lvl="0" indent="-457200" algn="l" rtl="0">
@@ -19396,15 +19388,6 @@
               </a:rPr>
               <a:t>Inheritance</a:t>
             </a:r>
-            <a:endParaRPr lang="en-IN" sz="2800" b="0" i="0" u="none" strike="noStrike" cap="none">
-              <a:solidFill>
-                <a:srgbClr val="DAB865"/>
-              </a:solidFill>
-              <a:latin typeface="Calibri" panose="020F0502020204030204"/>
-              <a:ea typeface="Calibri" panose="020F0502020204030204"/>
-              <a:cs typeface="Calibri" panose="020F0502020204030204"/>
-              <a:sym typeface="Calibri" panose="020F0502020204030204"/>
-            </a:endParaRPr>
           </a:p>
           <a:p>
             <a:pPr marL="457200" marR="0" lvl="0" indent="-457200" algn="l" rtl="0">
@@ -19436,15 +19419,6 @@
               </a:rPr>
               <a:t>Ploymorphism</a:t>
             </a:r>
-            <a:endParaRPr lang="en-IN" sz="2800" b="0" i="0" u="none" strike="noStrike" cap="none">
-              <a:solidFill>
-                <a:srgbClr val="DAB865"/>
-              </a:solidFill>
-              <a:latin typeface="Calibri" panose="020F0502020204030204"/>
-              <a:ea typeface="Calibri" panose="020F0502020204030204"/>
-              <a:cs typeface="Calibri" panose="020F0502020204030204"/>
-              <a:sym typeface="Calibri" panose="020F0502020204030204"/>
-            </a:endParaRPr>
           </a:p>
           <a:p>
             <a:pPr marL="457200" marR="0" lvl="0" indent="-457200" algn="l" rtl="0">
@@ -19476,15 +19450,6 @@
               </a:rPr>
               <a:t>Abstraction</a:t>
             </a:r>
-            <a:endParaRPr lang="en-IN" sz="2800" b="0" i="0" u="none" strike="noStrike" cap="none">
-              <a:solidFill>
-                <a:srgbClr val="DAB865"/>
-              </a:solidFill>
-              <a:latin typeface="Calibri" panose="020F0502020204030204"/>
-              <a:ea typeface="Calibri" panose="020F0502020204030204"/>
-              <a:cs typeface="Calibri" panose="020F0502020204030204"/>
-              <a:sym typeface="Calibri" panose="020F0502020204030204"/>
-            </a:endParaRPr>
           </a:p>
           <a:p>
             <a:pPr marL="457200" marR="0" lvl="0" indent="-457200" algn="l" rtl="0">
@@ -19516,15 +19481,6 @@
               </a:rPr>
               <a:t>Encapsulation</a:t>
             </a:r>
-            <a:endParaRPr lang="en-IN" sz="2800" b="0" i="0" u="none" strike="noStrike" cap="none">
-              <a:solidFill>
-                <a:srgbClr val="DAB865"/>
-              </a:solidFill>
-              <a:latin typeface="Calibri" panose="020F0502020204030204"/>
-              <a:ea typeface="Calibri" panose="020F0502020204030204"/>
-              <a:cs typeface="Calibri" panose="020F0502020204030204"/>
-              <a:sym typeface="Calibri" panose="020F0502020204030204"/>
-            </a:endParaRPr>
           </a:p>
         </p:txBody>
       </p:sp>
@@ -19533,13 +19489,13 @@
   <p:clrMapOvr>
     <a:masterClrMapping/>
   </p:clrMapOvr>
-  <mc:AlternateContent xmlns:mc="http://schemas.openxmlformats.org/markup-compatibility/2006">
-    <mc:Choice xmlns:p14="http://schemas.microsoft.com/office/powerpoint/2010/main" Requires="p14">
-      <p:transition spd="slow" p14:dur="699">
+  <mc:AlternateContent xmlns:mc="http://schemas.openxmlformats.org/markup-compatibility/2006" xmlns:p14="http://schemas.microsoft.com/office/powerpoint/2010/main">
+    <mc:Choice Requires="p14">
+      <p:transition spd="med" p14:dur="699">
         <p:fade/>
       </p:transition>
     </mc:Choice>
-    <mc:Fallback>
+    <mc:Fallback xmlns="">
       <p:transition spd="slow">
         <p:fade/>
       </p:transition>
@@ -19821,14 +19777,14 @@
                 </p:childTnLst>
               </p:cTn>
               <p:prevCondLst>
-                <p:cond evt="onPrev">
+                <p:cond evt="onPrev" delay="0">
                   <p:tgtEl>
                     <p:sldTgt/>
                   </p:tgtEl>
                 </p:cond>
               </p:prevCondLst>
               <p:nextCondLst>
-                <p:cond evt="onNext">
+                <p:cond evt="onNext" delay="0">
                   <p:tgtEl>
                     <p:sldTgt/>
                   </p:tgtEl>
@@ -19848,7 +19804,7 @@
   <p:cSld>
     <p:spTree>
       <p:nvGrpSpPr>
-        <p:cNvPr id="53" name="Shape 53"/>
+        <p:cNvPr id="1" name="Shape 53"/>
         <p:cNvGrpSpPr/>
         <p:nvPr/>
       </p:nvGrpSpPr>
@@ -19868,7 +19824,7 @@
         </p:nvSpPr>
         <p:spPr>
           <a:xfrm>
-            <a:off x="0" y="0"/>
+            <a:off x="0" y="10160"/>
             <a:ext cx="12192000" cy="6858000"/>
           </a:xfrm>
           <a:prstGeom prst="rect">
@@ -20031,7 +19987,7 @@
               <a:buNone/>
             </a:pPr>
             <a:r>
-              <a:rPr lang="en-US" sz="2400" b="0" i="0" u="none" strike="noStrike" cap="none">
+              <a:rPr lang="en-US" sz="2400" b="0" i="0" u="none" strike="noStrike" cap="none" dirty="0">
                 <a:solidFill>
                   <a:srgbClr val="DFBB64"/>
                 </a:solidFill>
@@ -20040,9 +19996,57 @@
                 <a:cs typeface="Calibri" panose="020F0502020204030204"/>
                 <a:sym typeface="Calibri" panose="020F0502020204030204"/>
               </a:rPr>
-              <a:t>A class in terms of Oops is the blueprint of objects.But compared to other languages, class have less importance in dart.Class can be used for declaring, allocating space, storing, sharing objects.</a:t>
+              <a:t>A class in terms of Oops is the blueprint of </a:t>
             </a:r>
-            <a:endParaRPr sz="2400" b="0" i="0" u="none" strike="noStrike" cap="none">
+            <a:r>
+              <a:rPr lang="en-US" sz="2400" b="0" i="0" u="none" strike="noStrike" cap="none" dirty="0" err="1">
+                <a:solidFill>
+                  <a:srgbClr val="DFBB64"/>
+                </a:solidFill>
+                <a:latin typeface="Calibri" panose="020F0502020204030204"/>
+                <a:ea typeface="Calibri" panose="020F0502020204030204"/>
+                <a:cs typeface="Calibri" panose="020F0502020204030204"/>
+                <a:sym typeface="Calibri" panose="020F0502020204030204"/>
+              </a:rPr>
+              <a:t>objects.But</a:t>
+            </a:r>
+            <a:r>
+              <a:rPr lang="en-US" sz="2400" b="0" i="0" u="none" strike="noStrike" cap="none" dirty="0">
+                <a:solidFill>
+                  <a:srgbClr val="DFBB64"/>
+                </a:solidFill>
+                <a:latin typeface="Calibri" panose="020F0502020204030204"/>
+                <a:ea typeface="Calibri" panose="020F0502020204030204"/>
+                <a:cs typeface="Calibri" panose="020F0502020204030204"/>
+                <a:sym typeface="Calibri" panose="020F0502020204030204"/>
+              </a:rPr>
+              <a:t> compared to other languages, class have less importance in </a:t>
+            </a:r>
+            <a:r>
+              <a:rPr lang="en-US" sz="2400" b="0" i="0" u="none" strike="noStrike" cap="none" dirty="0" err="1">
+                <a:solidFill>
+                  <a:srgbClr val="DFBB64"/>
+                </a:solidFill>
+                <a:latin typeface="Calibri" panose="020F0502020204030204"/>
+                <a:ea typeface="Calibri" panose="020F0502020204030204"/>
+                <a:cs typeface="Calibri" panose="020F0502020204030204"/>
+                <a:sym typeface="Calibri" panose="020F0502020204030204"/>
+              </a:rPr>
+              <a:t>dart.Class</a:t>
+            </a:r>
+            <a:r>
+              <a:rPr lang="en-US" sz="2400" b="0" i="0" u="none" strike="noStrike" cap="none" dirty="0">
+                <a:solidFill>
+                  <a:srgbClr val="DFBB64"/>
+                </a:solidFill>
+                <a:latin typeface="Calibri" panose="020F0502020204030204"/>
+                <a:ea typeface="Calibri" panose="020F0502020204030204"/>
+                <a:cs typeface="Calibri" panose="020F0502020204030204"/>
+                <a:sym typeface="Calibri" panose="020F0502020204030204"/>
+              </a:rPr>
+              <a:t> can be used for declaring, allocating space, storing, sharing objects.</a:t>
+            </a:r>
+            <a:endParaRPr sz="2400" b="0" i="0" u="none" strike="noStrike" cap="none" dirty="0">
               <a:solidFill>
                 <a:srgbClr val="DFBB64"/>
               </a:solidFill>
@@ -20097,7 +20101,7 @@
               <a:buNone/>
             </a:pPr>
             <a:r>
-              <a:rPr lang="en-US" sz="2400" b="0" i="0" u="none" strike="noStrike" cap="none">
+              <a:rPr lang="en-US" sz="2400" b="0" i="0" u="none" strike="noStrike" cap="none" dirty="0">
                 <a:solidFill>
                   <a:srgbClr val="DFBB64"/>
                 </a:solidFill>
@@ -20108,7 +20112,7 @@
               </a:rPr>
               <a:t>The class keyword is followed by the class name. The rules for identifiers must be considered while naming a class.</a:t>
             </a:r>
-            <a:endParaRPr sz="2400" b="0" i="0" u="none" strike="noStrike" cap="none">
+            <a:endParaRPr sz="2400" b="0" i="0" u="none" strike="noStrike" cap="none" dirty="0">
               <a:solidFill>
                 <a:srgbClr val="DFBB64"/>
               </a:solidFill>
@@ -20343,7 +20347,7 @@
               <a:buNone/>
             </a:pPr>
             <a:r>
-              <a:rPr lang="en-US" sz="2400" b="0" i="0" u="none" strike="noStrike" cap="none">
+              <a:rPr lang="en-US" sz="2400" b="0" i="0" u="none" strike="noStrike" cap="none" dirty="0">
                 <a:solidFill>
                   <a:srgbClr val="DFBB64"/>
                 </a:solidFill>
@@ -20354,7 +20358,7 @@
               </a:rPr>
               <a:t>Inside Class there are 4 types of attributes:</a:t>
             </a:r>
-            <a:endParaRPr sz="2400" b="0" i="0" u="none" strike="noStrike" cap="none">
+            <a:endParaRPr sz="2400" b="0" i="0" u="none" strike="noStrike" cap="none" dirty="0">
               <a:solidFill>
                 <a:srgbClr val="DFBB64"/>
               </a:solidFill>
@@ -20382,7 +20386,7 @@
               <a:buFont typeface="Calibri" panose="020F0502020204030204"/>
               <a:buNone/>
             </a:pPr>
-            <a:endParaRPr sz="2400" b="0" i="0" u="none" strike="noStrike" cap="none">
+            <a:endParaRPr sz="2400" b="0" i="0" u="none" strike="noStrike" cap="none" dirty="0">
               <a:solidFill>
                 <a:srgbClr val="DFBB64"/>
               </a:solidFill>
@@ -20411,7 +20415,7 @@
               <a:buChar char="•"/>
             </a:pPr>
             <a:r>
-              <a:rPr lang="en-US" sz="2400" b="0" i="0" u="none" strike="noStrike" cap="none">
+              <a:rPr lang="en-US" sz="2400" b="0" i="0" u="none" strike="noStrike" cap="none" dirty="0">
                 <a:solidFill>
                   <a:srgbClr val="DFBB64"/>
                 </a:solidFill>
@@ -20422,7 +20426,7 @@
               </a:rPr>
               <a:t>fields</a:t>
             </a:r>
-            <a:endParaRPr sz="2400" b="0" i="0" u="none" strike="noStrike" cap="none">
+            <a:endParaRPr sz="2400" b="0" i="0" u="none" strike="noStrike" cap="none" dirty="0">
               <a:solidFill>
                 <a:srgbClr val="DFBB64"/>
               </a:solidFill>
@@ -20451,7 +20455,7 @@
               <a:buChar char="•"/>
             </a:pPr>
             <a:r>
-              <a:rPr lang="en-US" sz="2400" b="0" i="0" u="none" strike="noStrike" cap="none">
+              <a:rPr lang="en-US" sz="2400" b="0" i="0" u="none" strike="noStrike" cap="none" dirty="0">
                 <a:solidFill>
                   <a:srgbClr val="DFBB64"/>
                 </a:solidFill>
@@ -20462,7 +20466,7 @@
               </a:rPr>
               <a:t>getters/setters</a:t>
             </a:r>
-            <a:endParaRPr sz="2400" b="0" i="0" u="none" strike="noStrike" cap="none">
+            <a:endParaRPr sz="2400" b="0" i="0" u="none" strike="noStrike" cap="none" dirty="0">
               <a:solidFill>
                 <a:srgbClr val="DFBB64"/>
               </a:solidFill>
@@ -20491,7 +20495,7 @@
               <a:buChar char="•"/>
             </a:pPr>
             <a:r>
-              <a:rPr lang="en-US" sz="2400" b="0" i="0" u="none" strike="noStrike" cap="none">
+              <a:rPr lang="en-US" sz="2400" b="0" i="0" u="none" strike="noStrike" cap="none" dirty="0">
                 <a:solidFill>
                   <a:srgbClr val="DFBB64"/>
                 </a:solidFill>
@@ -20502,7 +20506,7 @@
               </a:rPr>
               <a:t>Constructors</a:t>
             </a:r>
-            <a:endParaRPr sz="2400" b="0" i="0" u="none" strike="noStrike" cap="none">
+            <a:endParaRPr sz="2400" b="0" i="0" u="none" strike="noStrike" cap="none" dirty="0">
               <a:solidFill>
                 <a:srgbClr val="DFBB64"/>
               </a:solidFill>
@@ -20531,7 +20535,7 @@
               <a:buChar char="•"/>
             </a:pPr>
             <a:r>
-              <a:rPr lang="en-US" sz="2400" b="0" i="0" u="none" strike="noStrike" cap="none">
+              <a:rPr lang="en-US" sz="2400" b="0" i="0" u="none" strike="noStrike" cap="none" dirty="0">
                 <a:solidFill>
                   <a:srgbClr val="DFBB64"/>
                 </a:solidFill>
@@ -20542,7 +20546,7 @@
               </a:rPr>
               <a:t>functions </a:t>
             </a:r>
-            <a:endParaRPr sz="2400" b="0" i="0" u="none" strike="noStrike" cap="none">
+            <a:endParaRPr sz="2400" b="0" i="0" u="none" strike="noStrike" cap="none" dirty="0">
               <a:solidFill>
                 <a:srgbClr val="DFBB64"/>
               </a:solidFill>
@@ -20561,7 +20565,7 @@
           <p:nvPr/>
         </p:nvPicPr>
         <p:blipFill rotWithShape="1">
-          <a:blip r:embed="rId1"/>
+          <a:blip r:embed="rId3"/>
           <a:srcRect/>
           <a:stretch>
             <a:fillRect/>
@@ -20588,7 +20592,7 @@
           <p:nvPr/>
         </p:nvPicPr>
         <p:blipFill rotWithShape="1">
-          <a:blip r:embed="rId2"/>
+          <a:blip r:embed="rId4"/>
           <a:srcRect/>
           <a:stretch>
             <a:fillRect/>
@@ -20613,13 +20617,13 @@
   <p:clrMapOvr>
     <a:masterClrMapping/>
   </p:clrMapOvr>
-  <mc:AlternateContent xmlns:mc="http://schemas.openxmlformats.org/markup-compatibility/2006">
-    <mc:Choice xmlns:p14="http://schemas.microsoft.com/office/powerpoint/2010/main" Requires="p14">
+  <mc:AlternateContent xmlns:mc="http://schemas.openxmlformats.org/markup-compatibility/2006" xmlns:p14="http://schemas.microsoft.com/office/powerpoint/2010/main">
+    <mc:Choice Requires="p14">
       <p:transition spd="slow" p14:dur="1500">
         <p:split orient="vert" dir="in"/>
       </p:transition>
     </mc:Choice>
-    <mc:Fallback>
+    <mc:Fallback xmlns="">
       <p:transition spd="slow">
         <p:split orient="vert" dir="in"/>
       </p:transition>
@@ -20893,14 +20897,14 @@
                 </p:childTnLst>
               </p:cTn>
               <p:prevCondLst>
-                <p:cond evt="onPrev">
+                <p:cond evt="onPrev" delay="0">
                   <p:tgtEl>
                     <p:sldTgt/>
                   </p:tgtEl>
                 </p:cond>
               </p:prevCondLst>
               <p:nextCondLst>
-                <p:cond evt="onNext">
+                <p:cond evt="onNext" delay="0">
                   <p:tgtEl>
                     <p:sldTgt/>
                   </p:tgtEl>
@@ -20920,7 +20924,7 @@
   <p:cSld>
     <p:spTree>
       <p:nvGrpSpPr>
-        <p:cNvPr id="53" name="Shape 53"/>
+        <p:cNvPr id="1" name="Shape 53"/>
         <p:cNvGrpSpPr/>
         <p:nvPr/>
       </p:nvGrpSpPr>
@@ -21103,7 +21107,7 @@
               <a:buNone/>
             </a:pPr>
             <a:r>
-              <a:rPr lang="en-US" sz="2400" b="0" i="0" u="none" strike="noStrike" cap="none">
+              <a:rPr lang="en-US" sz="2400" b="0" i="0" u="none" strike="noStrike" cap="none" dirty="0">
                 <a:solidFill>
                   <a:srgbClr val="DFBB64"/>
                 </a:solidFill>
@@ -21114,7 +21118,7 @@
               </a:rPr>
               <a:t>Inside Class there are 4 types of attributes:</a:t>
             </a:r>
-            <a:endParaRPr sz="2400" b="0" i="0" u="none" strike="noStrike" cap="none">
+            <a:endParaRPr sz="2400" b="0" i="0" u="none" strike="noStrike" cap="none" dirty="0">
               <a:solidFill>
                 <a:srgbClr val="DFBB64"/>
               </a:solidFill>
@@ -21142,7 +21146,7 @@
               <a:buFont typeface="Calibri" panose="020F0502020204030204"/>
               <a:buNone/>
             </a:pPr>
-            <a:endParaRPr sz="2400" b="0" i="0" u="none" strike="noStrike" cap="none">
+            <a:endParaRPr sz="2400" b="0" i="0" u="none" strike="noStrike" cap="none" dirty="0">
               <a:solidFill>
                 <a:srgbClr val="DFBB64"/>
               </a:solidFill>
@@ -21171,7 +21175,7 @@
               <a:buChar char="•"/>
             </a:pPr>
             <a:r>
-              <a:rPr lang="en-US" sz="2400" b="0" i="0" u="none" strike="noStrike" cap="none">
+              <a:rPr lang="en-US" sz="2400" b="0" i="0" u="none" strike="noStrike" cap="none" dirty="0">
                 <a:solidFill>
                   <a:srgbClr val="DFBB64"/>
                 </a:solidFill>
@@ -21183,7 +21187,7 @@
               <a:t>fields</a:t>
             </a:r>
             <a:r>
-              <a:rPr lang="en-IN" altLang="en-US" sz="2400" b="0" i="0" u="none" strike="noStrike" cap="none">
+              <a:rPr lang="en-IN" altLang="en-US" sz="2400" b="0" i="0" u="none" strike="noStrike" cap="none" dirty="0">
                 <a:solidFill>
                   <a:srgbClr val="DFBB64"/>
                 </a:solidFill>
@@ -21194,7 +21198,26 @@
               </a:rPr>
               <a:t> : Fields are variables that store data for objects.</a:t>
             </a:r>
-            <a:endParaRPr lang="en-IN" altLang="en-US" sz="2400" b="0" i="0" u="none" strike="noStrike" cap="none">
+          </a:p>
+          <a:p>
+            <a:pPr marL="0" marR="0" lvl="0" indent="0" algn="l" rtl="0">
+              <a:lnSpc>
+                <a:spcPct val="100000"/>
+              </a:lnSpc>
+              <a:spcBef>
+                <a:spcPts val="0"/>
+              </a:spcBef>
+              <a:spcAft>
+                <a:spcPts val="0"/>
+              </a:spcAft>
+              <a:buClr>
+                <a:srgbClr val="DFBB64"/>
+              </a:buClr>
+              <a:buSzPts val="2400"/>
+              <a:buFont typeface="Arial" panose="020B0604020202020204"/>
+              <a:buNone/>
+            </a:pPr>
+            <a:endParaRPr lang="en-IN" altLang="en-US" sz="2400" b="0" i="0" u="none" strike="noStrike" cap="none" dirty="0">
               <a:solidFill>
                 <a:srgbClr val="DFBB64"/>
               </a:solidFill>
@@ -21205,34 +21228,6 @@
             </a:endParaRPr>
           </a:p>
           <a:p>
-            <a:pPr marL="0" marR="0" lvl="0" indent="0" algn="l" rtl="0">
-              <a:lnSpc>
-                <a:spcPct val="100000"/>
-              </a:lnSpc>
-              <a:spcBef>
-                <a:spcPts val="0"/>
-              </a:spcBef>
-              <a:spcAft>
-                <a:spcPts val="0"/>
-              </a:spcAft>
-              <a:buClr>
-                <a:srgbClr val="DFBB64"/>
-              </a:buClr>
-              <a:buSzPts val="2400"/>
-              <a:buFont typeface="Arial" panose="020B0604020202020204"/>
-              <a:buNone/>
-            </a:pPr>
-            <a:endParaRPr lang="en-IN" altLang="en-US" sz="2400" b="0" i="0" u="none" strike="noStrike" cap="none">
-              <a:solidFill>
-                <a:srgbClr val="DFBB64"/>
-              </a:solidFill>
-              <a:latin typeface="Calibri" panose="020F0502020204030204"/>
-              <a:ea typeface="Calibri" panose="020F0502020204030204"/>
-              <a:cs typeface="Calibri" panose="020F0502020204030204"/>
-              <a:sym typeface="Calibri" panose="020F0502020204030204"/>
-            </a:endParaRPr>
-          </a:p>
-          <a:p>
             <a:pPr marL="457200" marR="0" lvl="0" indent="-457200" algn="l" rtl="0">
               <a:lnSpc>
                 <a:spcPct val="100000"/>
@@ -21251,7 +21246,7 @@
               <a:buChar char="•"/>
             </a:pPr>
             <a:r>
-              <a:rPr lang="en-US" sz="2400" b="0" i="0" u="none" strike="noStrike" cap="none">
+              <a:rPr lang="en-US" sz="2400" b="0" i="0" u="none" strike="noStrike" cap="none" dirty="0">
                 <a:solidFill>
                   <a:srgbClr val="DFBB64"/>
                 </a:solidFill>
@@ -21263,7 +21258,7 @@
               <a:t>getters/setters</a:t>
             </a:r>
             <a:r>
-              <a:rPr lang="en-IN" altLang="en-US" sz="2400" b="0" i="0" u="none" strike="noStrike" cap="none">
+              <a:rPr lang="en-IN" altLang="en-US" sz="2400" b="0" i="0" u="none" strike="noStrike" cap="none" dirty="0">
                 <a:solidFill>
                   <a:srgbClr val="DFBB64"/>
                 </a:solidFill>
@@ -21274,15 +21269,6 @@
               </a:rPr>
               <a:t> :getters are methods that retrieve the value of a property, while setters are methods that update the value of a property, helping to control access to class fields.</a:t>
             </a:r>
-            <a:endParaRPr lang="en-IN" altLang="en-US" sz="2400" b="0" i="0" u="none" strike="noStrike" cap="none">
-              <a:solidFill>
-                <a:srgbClr val="DFBB64"/>
-              </a:solidFill>
-              <a:latin typeface="Calibri" panose="020F0502020204030204"/>
-              <a:ea typeface="Calibri" panose="020F0502020204030204"/>
-              <a:cs typeface="Calibri" panose="020F0502020204030204"/>
-              <a:sym typeface="Calibri" panose="020F0502020204030204"/>
-            </a:endParaRPr>
           </a:p>
           <a:p>
             <a:pPr marL="0" marR="0" lvl="0" indent="0" algn="l" rtl="0">
@@ -21303,7 +21289,7 @@
               <a:buNone/>
             </a:pPr>
             <a:r>
-              <a:rPr lang="en-IN" sz="2400" b="0" i="0" u="none" strike="noStrike" cap="none">
+              <a:rPr lang="en-IN" sz="2400" b="0" i="0" u="none" strike="noStrike" cap="none" dirty="0">
                 <a:solidFill>
                   <a:srgbClr val="DFBB64"/>
                 </a:solidFill>
@@ -21314,7 +21300,7 @@
               </a:rPr>
               <a:t>            </a:t>
             </a:r>
-            <a:endParaRPr sz="2400" b="0" i="0" u="none" strike="noStrike" cap="none">
+            <a:endParaRPr sz="2400" b="0" i="0" u="none" strike="noStrike" cap="none" dirty="0">
               <a:solidFill>
                 <a:srgbClr val="DFBB64"/>
               </a:solidFill>
@@ -21343,7 +21329,7 @@
               <a:buChar char="•"/>
             </a:pPr>
             <a:r>
-              <a:rPr lang="en-US" sz="2400" b="0" i="0" u="none" strike="noStrike" cap="none">
+              <a:rPr lang="en-US" sz="2400" b="0" i="0" u="none" strike="noStrike" cap="none" dirty="0">
                 <a:solidFill>
                   <a:srgbClr val="DFBB64"/>
                 </a:solidFill>
@@ -21355,7 +21341,7 @@
               <a:t>Constructors</a:t>
             </a:r>
             <a:r>
-              <a:rPr lang="en-IN" altLang="en-US" sz="2400" b="0" i="0" u="none" strike="noStrike" cap="none">
+              <a:rPr lang="en-IN" altLang="en-US" sz="2400" b="0" i="0" u="none" strike="noStrike" cap="none" dirty="0">
                 <a:solidFill>
                   <a:srgbClr val="DFBB64"/>
                 </a:solidFill>
@@ -21366,7 +21352,26 @@
               </a:rPr>
               <a:t> :Constructors are special functions that create instances of classes.</a:t>
             </a:r>
-            <a:endParaRPr lang="en-IN" altLang="en-US" sz="2400" b="0" i="0" u="none" strike="noStrike" cap="none">
+          </a:p>
+          <a:p>
+            <a:pPr marL="0" marR="0" lvl="0" indent="0" algn="l" rtl="0">
+              <a:lnSpc>
+                <a:spcPct val="100000"/>
+              </a:lnSpc>
+              <a:spcBef>
+                <a:spcPts val="0"/>
+              </a:spcBef>
+              <a:spcAft>
+                <a:spcPts val="0"/>
+              </a:spcAft>
+              <a:buClr>
+                <a:srgbClr val="DFBB64"/>
+              </a:buClr>
+              <a:buSzPts val="2400"/>
+              <a:buFont typeface="Arial" panose="020B0604020202020204"/>
+              <a:buNone/>
+            </a:pPr>
+            <a:endParaRPr sz="2400" b="0" i="0" u="none" strike="noStrike" cap="none" dirty="0">
               <a:solidFill>
                 <a:srgbClr val="DFBB64"/>
               </a:solidFill>
@@ -21377,34 +21382,6 @@
             </a:endParaRPr>
           </a:p>
           <a:p>
-            <a:pPr marL="0" marR="0" lvl="0" indent="0" algn="l" rtl="0">
-              <a:lnSpc>
-                <a:spcPct val="100000"/>
-              </a:lnSpc>
-              <a:spcBef>
-                <a:spcPts val="0"/>
-              </a:spcBef>
-              <a:spcAft>
-                <a:spcPts val="0"/>
-              </a:spcAft>
-              <a:buClr>
-                <a:srgbClr val="DFBB64"/>
-              </a:buClr>
-              <a:buSzPts val="2400"/>
-              <a:buFont typeface="Arial" panose="020B0604020202020204"/>
-              <a:buNone/>
-            </a:pPr>
-            <a:endParaRPr sz="2400" b="0" i="0" u="none" strike="noStrike" cap="none">
-              <a:solidFill>
-                <a:srgbClr val="DFBB64"/>
-              </a:solidFill>
-              <a:latin typeface="Calibri" panose="020F0502020204030204"/>
-              <a:ea typeface="Calibri" panose="020F0502020204030204"/>
-              <a:cs typeface="Calibri" panose="020F0502020204030204"/>
-              <a:sym typeface="Calibri" panose="020F0502020204030204"/>
-            </a:endParaRPr>
-          </a:p>
-          <a:p>
             <a:pPr marL="457200" marR="0" lvl="0" indent="-457200" algn="l" rtl="0">
               <a:lnSpc>
                 <a:spcPct val="100000"/>
@@ -21423,7 +21400,7 @@
               <a:buChar char="•"/>
             </a:pPr>
             <a:r>
-              <a:rPr lang="en-US" sz="2400" b="0" i="0" u="none" strike="noStrike" cap="none">
+              <a:rPr lang="en-US" sz="2400" b="0" i="0" u="none" strike="noStrike" cap="none" dirty="0">
                 <a:solidFill>
                   <a:srgbClr val="DFBB64"/>
                 </a:solidFill>
@@ -21435,7 +21412,7 @@
               <a:t>functions </a:t>
             </a:r>
             <a:r>
-              <a:rPr lang="en-IN" altLang="en-US" sz="2400" b="0" i="0" u="none" strike="noStrike" cap="none">
+              <a:rPr lang="en-IN" altLang="en-US" sz="2400" b="0" i="0" u="none" strike="noStrike" cap="none" dirty="0">
                 <a:solidFill>
                   <a:srgbClr val="DFBB64"/>
                 </a:solidFill>
@@ -21446,15 +21423,6 @@
               </a:rPr>
               <a:t>:Functions refers to the action an object can take. It can also be called as methods.</a:t>
             </a:r>
-            <a:endParaRPr lang="en-IN" altLang="en-US" sz="2400" b="0" i="0" u="none" strike="noStrike" cap="none">
-              <a:solidFill>
-                <a:srgbClr val="DFBB64"/>
-              </a:solidFill>
-              <a:latin typeface="Calibri" panose="020F0502020204030204"/>
-              <a:ea typeface="Calibri" panose="020F0502020204030204"/>
-              <a:cs typeface="Calibri" panose="020F0502020204030204"/>
-              <a:sym typeface="Calibri" panose="020F0502020204030204"/>
-            </a:endParaRPr>
           </a:p>
           <a:p>
             <a:pPr marL="457200" marR="0" lvl="0" indent="-457200" algn="l" rtl="0">
@@ -21474,7 +21442,7 @@
               <a:buFont typeface="Arial" panose="020B0604020202020204"/>
               <a:buChar char="•"/>
             </a:pPr>
-            <a:endParaRPr lang="en-IN" altLang="en-US" sz="2400" b="0" i="0" u="none" strike="noStrike" cap="none">
+            <a:endParaRPr lang="en-IN" altLang="en-US" sz="2400" b="0" i="0" u="none" strike="noStrike" cap="none" dirty="0">
               <a:solidFill>
                 <a:srgbClr val="DFBB64"/>
               </a:solidFill>
@@ -21522,6 +21490,7 @@
         </p:style>
         <p:txBody>
           <a:bodyPr rtlCol="0" anchor="ctr"/>
+          <a:lstStyle/>
           <a:p>
             <a:pPr algn="ctr"/>
             <a:endParaRPr lang="en-US"/>
@@ -21548,12 +21517,12 @@
           <a:bodyPr wrap="square" rtlCol="0">
             <a:spAutoFit/>
           </a:bodyPr>
+          <a:lstStyle/>
           <a:p>
             <a:r>
               <a:rPr lang="en-IN" altLang="en-US" sz="1600"/>
               <a:t>class Student{</a:t>
             </a:r>
-            <a:endParaRPr lang="en-IN" altLang="en-US" sz="1600"/>
           </a:p>
           <a:p>
             <a:endParaRPr lang="en-IN" altLang="en-US" sz="1600"/>
@@ -21567,18 +21536,12 @@
               </a:rPr>
               <a:t>    // field</a:t>
             </a:r>
-            <a:endParaRPr lang="en-IN" altLang="en-US" sz="1600">
-              <a:solidFill>
-                <a:schemeClr val="accent2"/>
-              </a:solidFill>
-            </a:endParaRPr>
           </a:p>
           <a:p>
             <a:r>
               <a:rPr lang="en-IN" altLang="en-US" sz="1600"/>
               <a:t>  String name =”Name”;</a:t>
             </a:r>
-            <a:endParaRPr lang="en-IN" altLang="en-US" sz="1600"/>
           </a:p>
           <a:p>
             <a:endParaRPr lang="en-IN" altLang="en-US" sz="1600"/>
@@ -21592,18 +21555,12 @@
               </a:rPr>
               <a:t>   //function</a:t>
             </a:r>
-            <a:endParaRPr lang="en-IN" altLang="en-US" sz="1600">
-              <a:solidFill>
-                <a:schemeClr val="accent2"/>
-              </a:solidFill>
-            </a:endParaRPr>
           </a:p>
           <a:p>
             <a:r>
               <a:rPr lang="en-IN" altLang="en-US" sz="1600"/>
               <a:t>   void detail(){</a:t>
             </a:r>
-            <a:endParaRPr lang="en-IN" altLang="en-US" sz="1600"/>
           </a:p>
           <a:p>
             <a:endParaRPr lang="en-IN" altLang="en-US" sz="1600"/>
@@ -21613,7 +21570,6 @@
               <a:rPr lang="en-IN" altLang="en-US" sz="1600"/>
               <a:t>    print(name);</a:t>
             </a:r>
-            <a:endParaRPr lang="en-IN" altLang="en-US" sz="1600"/>
           </a:p>
           <a:p>
             <a:endParaRPr lang="en-IN" altLang="en-US" sz="1600"/>
@@ -21623,7 +21579,6 @@
               <a:rPr lang="en-IN" altLang="en-US" sz="1600"/>
               <a:t>}</a:t>
             </a:r>
-            <a:endParaRPr lang="en-IN" altLang="en-US" sz="1600"/>
           </a:p>
           <a:p>
             <a:endParaRPr lang="en-IN" altLang="en-US" sz="1600"/>
@@ -21633,7 +21588,6 @@
               <a:rPr lang="en-IN" altLang="en-US" sz="1600"/>
               <a:t>}</a:t>
             </a:r>
-            <a:endParaRPr lang="en-IN" altLang="en-US" sz="1600"/>
           </a:p>
         </p:txBody>
       </p:sp>
@@ -21644,7 +21598,7 @@
           <p:nvPr/>
         </p:nvPicPr>
         <p:blipFill rotWithShape="1">
-          <a:blip r:embed="rId1"/>
+          <a:blip r:embed="rId3"/>
           <a:srcRect/>
           <a:stretch>
             <a:fillRect/>
@@ -21669,13 +21623,13 @@
   <p:clrMapOvr>
     <a:masterClrMapping/>
   </p:clrMapOvr>
-  <mc:AlternateContent xmlns:mc="http://schemas.openxmlformats.org/markup-compatibility/2006">
-    <mc:Choice xmlns:p14="http://schemas.microsoft.com/office/powerpoint/2010/main" Requires="p14">
+  <mc:AlternateContent xmlns:mc="http://schemas.openxmlformats.org/markup-compatibility/2006" xmlns:p14="http://schemas.microsoft.com/office/powerpoint/2010/main">
+    <mc:Choice Requires="p14">
       <p:transition spd="slow" p14:dur="1500">
         <p:split orient="vert" dir="in"/>
       </p:transition>
     </mc:Choice>
-    <mc:Fallback>
+    <mc:Fallback xmlns="">
       <p:transition spd="slow">
         <p:split orient="vert" dir="in"/>
       </p:transition>
@@ -21745,14 +21699,14 @@
                 </p:childTnLst>
               </p:cTn>
               <p:prevCondLst>
-                <p:cond evt="onPrev">
+                <p:cond evt="onPrev" delay="0">
                   <p:tgtEl>
                     <p:sldTgt/>
                   </p:tgtEl>
                 </p:cond>
               </p:prevCondLst>
               <p:nextCondLst>
-                <p:cond evt="onNext">
+                <p:cond evt="onNext" delay="0">
                   <p:tgtEl>
                     <p:sldTgt/>
                   </p:tgtEl>
@@ -21772,7 +21726,7 @@
   <p:cSld>
     <p:spTree>
       <p:nvGrpSpPr>
-        <p:cNvPr id="69" name="Shape 69"/>
+        <p:cNvPr id="1" name="Shape 69"/>
         <p:cNvGrpSpPr/>
         <p:nvPr/>
       </p:nvGrpSpPr>
@@ -22343,7 +22297,7 @@
           <p:nvPr/>
         </p:nvPicPr>
         <p:blipFill rotWithShape="1">
-          <a:blip r:embed="rId1"/>
+          <a:blip r:embed="rId3"/>
           <a:srcRect/>
           <a:stretch>
             <a:fillRect/>
@@ -22370,7 +22324,7 @@
           <p:nvPr/>
         </p:nvPicPr>
         <p:blipFill rotWithShape="1">
-          <a:blip r:embed="rId2"/>
+          <a:blip r:embed="rId4"/>
           <a:srcRect/>
           <a:stretch>
             <a:fillRect/>
@@ -22397,7 +22351,7 @@
           <p:nvPr/>
         </p:nvPicPr>
         <p:blipFill rotWithShape="1">
-          <a:blip r:embed="rId3"/>
+          <a:blip r:embed="rId5"/>
           <a:srcRect/>
           <a:stretch>
             <a:fillRect/>
@@ -22440,6 +22394,7 @@
           <a:bodyPr spcFirstLastPara="1" wrap="square" lIns="91425" tIns="45700" rIns="91425" bIns="45700" anchor="t" anchorCtr="0">
             <a:noAutofit/>
           </a:bodyPr>
+          <a:lstStyle/>
           <a:p>
             <a:pPr marL="0" marR="0" lvl="0" indent="0" algn="l" rtl="0">
               <a:lnSpc>
@@ -22470,15 +22425,6 @@
               </a:rPr>
               <a:t>Objects are instances of classes and have properties (attributes) and methods (actions).</a:t>
             </a:r>
-            <a:endParaRPr sz="2400" b="0" i="0" u="none" strike="noStrike" cap="none">
-              <a:solidFill>
-                <a:srgbClr val="DFBB64"/>
-              </a:solidFill>
-              <a:latin typeface="Calibri" panose="020F0502020204030204"/>
-              <a:ea typeface="Calibri" panose="020F0502020204030204"/>
-              <a:cs typeface="Calibri" panose="020F0502020204030204"/>
-              <a:sym typeface="Calibri" panose="020F0502020204030204"/>
-            </a:endParaRPr>
           </a:p>
           <a:p>
             <a:pPr marL="0" marR="0" lvl="0" indent="0" algn="l" rtl="0">
@@ -22543,13 +22489,13 @@
   <p:clrMapOvr>
     <a:masterClrMapping/>
   </p:clrMapOvr>
-  <mc:AlternateContent xmlns:mc="http://schemas.openxmlformats.org/markup-compatibility/2006">
-    <mc:Choice xmlns:p14="http://schemas.microsoft.com/office/powerpoint/2010/main" Requires="p14">
+  <mc:AlternateContent xmlns:mc="http://schemas.openxmlformats.org/markup-compatibility/2006" xmlns:p14="http://schemas.microsoft.com/office/powerpoint/2010/main">
+    <mc:Choice Requires="p14">
       <p:transition spd="slow" p14:dur="1500">
         <p:split orient="vert" dir="in"/>
       </p:transition>
     </mc:Choice>
-    <mc:Fallback>
+    <mc:Fallback xmlns="">
       <p:transition spd="slow">
         <p:split orient="vert" dir="in"/>
       </p:transition>
@@ -22813,14 +22759,14 @@
                 </p:childTnLst>
               </p:cTn>
               <p:prevCondLst>
-                <p:cond evt="onPrev">
+                <p:cond evt="onPrev" delay="0">
                   <p:tgtEl>
                     <p:sldTgt/>
                   </p:tgtEl>
                 </p:cond>
               </p:prevCondLst>
               <p:nextCondLst>
-                <p:cond evt="onNext">
+                <p:cond evt="onNext" delay="0">
                   <p:tgtEl>
                     <p:sldTgt/>
                   </p:tgtEl>
@@ -22840,7 +22786,7 @@
   <p:cSld>
     <p:spTree>
       <p:nvGrpSpPr>
-        <p:cNvPr id="104" name="Shape 104"/>
+        <p:cNvPr id="1" name="Shape 104"/>
         <p:cNvGrpSpPr/>
         <p:nvPr/>
       </p:nvGrpSpPr>
@@ -22860,7 +22806,7 @@
         </p:nvSpPr>
         <p:spPr>
           <a:xfrm>
-            <a:off x="0" y="0"/>
+            <a:off x="0" y="20320"/>
             <a:ext cx="12192000" cy="6858000"/>
           </a:xfrm>
           <a:prstGeom prst="rect">
@@ -22914,15 +22860,6 @@
               </a:rPr>
               <a:t> </a:t>
             </a:r>
-            <a:endParaRPr sz="1800" b="0" i="0" u="none" strike="noStrike" cap="none">
-              <a:solidFill>
-                <a:schemeClr val="lt1"/>
-              </a:solidFill>
-              <a:latin typeface="Calibri" panose="020F0502020204030204"/>
-              <a:ea typeface="Calibri" panose="020F0502020204030204"/>
-              <a:cs typeface="Calibri" panose="020F0502020204030204"/>
-              <a:sym typeface="Calibri" panose="020F0502020204030204"/>
-            </a:endParaRPr>
           </a:p>
         </p:txBody>
       </p:sp>
@@ -23035,7 +22972,7 @@
               <a:buChar char="•"/>
             </a:pPr>
             <a:r>
-              <a:rPr lang="en-US" sz="2800" b="0" i="0" u="none" strike="noStrike" cap="none">
+              <a:rPr lang="en-US" sz="2800" b="0" i="0" u="none" strike="noStrike" cap="none" dirty="0">
                 <a:solidFill>
                   <a:srgbClr val="DFBB64"/>
                 </a:solidFill>
@@ -23046,15 +22983,6 @@
               </a:rPr>
               <a:t>Functions are the building blocks of readable, maintainable, and reusable code.</a:t>
             </a:r>
-            <a:endParaRPr lang="en-US" sz="2800" b="0" i="0" u="none" strike="noStrike" cap="none">
-              <a:solidFill>
-                <a:srgbClr val="DFBB64"/>
-              </a:solidFill>
-              <a:latin typeface="Calibri" panose="020F0502020204030204"/>
-              <a:ea typeface="Calibri" panose="020F0502020204030204"/>
-              <a:cs typeface="Calibri" panose="020F0502020204030204"/>
-              <a:sym typeface="Calibri" panose="020F0502020204030204"/>
-            </a:endParaRPr>
           </a:p>
           <a:p>
             <a:pPr marL="457200" marR="0" lvl="0" indent="-457200" algn="l" rtl="0">
@@ -23074,7 +23002,7 @@
               <a:buFont typeface="Arial" panose="020B0604020202020204"/>
               <a:buChar char="•"/>
             </a:pPr>
-            <a:endParaRPr lang="en-IN" altLang="en-US" sz="2800" b="0" i="0" u="none" strike="noStrike" cap="none">
+            <a:endParaRPr lang="en-IN" altLang="en-US" sz="2800" b="0" i="0" u="none" strike="noStrike" cap="none" dirty="0">
               <a:solidFill>
                 <a:srgbClr val="DFBB64"/>
               </a:solidFill>
@@ -23273,7 +23201,7 @@
           <p:nvPr/>
         </p:nvPicPr>
         <p:blipFill rotWithShape="1">
-          <a:blip r:embed="rId1"/>
+          <a:blip r:embed="rId3"/>
           <a:srcRect/>
           <a:stretch>
             <a:fillRect/>
@@ -23332,6 +23260,7 @@
         </p:style>
         <p:txBody>
           <a:bodyPr rtlCol="0" anchor="ctr"/>
+          <a:lstStyle/>
           <a:p>
             <a:pPr algn="ctr"/>
             <a:endParaRPr lang="en-US"/>
@@ -23388,13 +23317,13 @@
           <a:bodyPr wrap="square" rtlCol="0">
             <a:spAutoFit/>
           </a:bodyPr>
+          <a:lstStyle/>
           <a:p>
             <a:pPr algn="ctr"/>
             <a:r>
               <a:rPr lang="en-US" sz="2400" b="1"/>
               <a:t>Function</a:t>
             </a:r>
-            <a:endParaRPr lang="en-US" sz="2400" b="1"/>
           </a:p>
         </p:txBody>
       </p:sp>
@@ -23418,12 +23347,12 @@
           <a:bodyPr wrap="square" rtlCol="0">
             <a:noAutofit/>
           </a:bodyPr>
+          <a:lstStyle/>
           <a:p>
             <a:r>
               <a:rPr lang="en-US" sz="2000"/>
               <a:t>Return_typefuc_name(parameter_list){</a:t>
             </a:r>
-            <a:endParaRPr lang="en-US" sz="2000"/>
           </a:p>
           <a:p>
             <a:endParaRPr lang="en-US" sz="2000"/>
@@ -23433,7 +23362,6 @@
               <a:rPr lang="en-US" sz="2000"/>
               <a:t>       //statement(s)</a:t>
             </a:r>
-            <a:endParaRPr lang="en-US" sz="2000"/>
           </a:p>
           <a:p>
             <a:endParaRPr lang="en-US" sz="2000"/>
@@ -23443,14 +23371,12 @@
               <a:rPr lang="en-US" sz="2000"/>
               <a:t>        return value;</a:t>
             </a:r>
-            <a:endParaRPr lang="en-US" sz="2000"/>
           </a:p>
           <a:p>
             <a:r>
               <a:rPr lang="en-US" sz="2000"/>
               <a:t>}</a:t>
             </a:r>
-            <a:endParaRPr lang="en-US" sz="2000"/>
           </a:p>
         </p:txBody>
       </p:sp>
@@ -23459,13 +23385,13 @@
   <p:clrMapOvr>
     <a:masterClrMapping/>
   </p:clrMapOvr>
-  <mc:AlternateContent xmlns:mc="http://schemas.openxmlformats.org/markup-compatibility/2006">
-    <mc:Choice xmlns:p14="http://schemas.microsoft.com/office/powerpoint/2010/main" Requires="p14">
+  <mc:AlternateContent xmlns:mc="http://schemas.openxmlformats.org/markup-compatibility/2006" xmlns:p14="http://schemas.microsoft.com/office/powerpoint/2010/main">
+    <mc:Choice Requires="p14">
       <p:transition spd="slow" p14:dur="1500">
         <p:split orient="vert" dir="in"/>
       </p:transition>
     </mc:Choice>
-    <mc:Fallback>
+    <mc:Fallback xmlns="">
       <p:transition spd="slow">
         <p:split orient="vert" dir="in"/>
       </p:transition>
@@ -23588,14 +23514,14 @@
                 </p:childTnLst>
               </p:cTn>
               <p:prevCondLst>
-                <p:cond evt="onPrev">
+                <p:cond evt="onPrev" delay="0">
                   <p:tgtEl>
                     <p:sldTgt/>
                   </p:tgtEl>
                 </p:cond>
               </p:prevCondLst>
               <p:nextCondLst>
-                <p:cond evt="onNext">
+                <p:cond evt="onNext" delay="0">
                   <p:tgtEl>
                     <p:sldTgt/>
                   </p:tgtEl>
@@ -23615,7 +23541,7 @@
   <p:cSld>
     <p:spTree>
       <p:nvGrpSpPr>
-        <p:cNvPr id="118" name="Shape 118"/>
+        <p:cNvPr id="1" name="Shape 118"/>
         <p:cNvGrpSpPr/>
         <p:nvPr/>
       </p:nvGrpSpPr>
@@ -23798,7 +23724,7 @@
               <a:buChar char="•"/>
             </a:pPr>
             <a:r>
-              <a:rPr lang="en-US" sz="2400" b="0" i="0" u="none" strike="noStrike" cap="none">
+              <a:rPr lang="en-US" sz="2400" b="0" i="0" u="none" strike="noStrike" cap="none" dirty="0">
                 <a:solidFill>
                   <a:srgbClr val="DFBB64"/>
                 </a:solidFill>
@@ -23809,7 +23735,7 @@
               </a:rPr>
               <a:t>Defining a function - a function definition requires when and how a specific task would be done.</a:t>
             </a:r>
-            <a:endParaRPr sz="2400" b="0" i="0" u="none" strike="noStrike" cap="none">
+            <a:endParaRPr sz="2400" b="0" i="0" u="none" strike="noStrike" cap="none" dirty="0">
               <a:solidFill>
                 <a:srgbClr val="DFBB64"/>
               </a:solidFill>
@@ -23837,7 +23763,7 @@
               <a:buFont typeface="Arial" panose="020B0604020202020204"/>
               <a:buNone/>
             </a:pPr>
-            <a:endParaRPr sz="2400" b="0" i="0" u="none" strike="noStrike" cap="none">
+            <a:endParaRPr sz="2400" b="0" i="0" u="none" strike="noStrike" cap="none" dirty="0">
               <a:solidFill>
                 <a:srgbClr val="DFBB64"/>
               </a:solidFill>
@@ -23866,7 +23792,7 @@
               <a:buChar char="•"/>
             </a:pPr>
             <a:r>
-              <a:rPr lang="en-US" sz="2400" b="0" i="0" u="none" strike="noStrike" cap="none">
+              <a:rPr lang="en-US" sz="2400" b="0" i="0" u="none" strike="noStrike" cap="none" dirty="0">
                 <a:solidFill>
                   <a:srgbClr val="DFBB64"/>
                 </a:solidFill>
@@ -23877,7 +23803,7 @@
               </a:rPr>
               <a:t>Calling a function - A function must be called in order to execute it.</a:t>
             </a:r>
-            <a:endParaRPr sz="2400" b="0" i="0" u="none" strike="noStrike" cap="none">
+            <a:endParaRPr sz="2400" b="0" i="0" u="none" strike="noStrike" cap="none" dirty="0">
               <a:solidFill>
                 <a:srgbClr val="DFBB64"/>
               </a:solidFill>
@@ -23905,7 +23831,7 @@
               <a:buFont typeface="Arial" panose="020B0604020202020204"/>
               <a:buNone/>
             </a:pPr>
-            <a:endParaRPr sz="2400" b="0" i="0" u="none" strike="noStrike" cap="none">
+            <a:endParaRPr sz="2400" b="0" i="0" u="none" strike="noStrike" cap="none" dirty="0">
               <a:solidFill>
                 <a:srgbClr val="DFBB64"/>
               </a:solidFill>
@@ -23934,7 +23860,7 @@
               <a:buChar char="•"/>
             </a:pPr>
             <a:r>
-              <a:rPr lang="en-US" sz="2400" b="0" i="0" u="none" strike="noStrike" cap="none">
+              <a:rPr lang="en-US" sz="2400" b="0" i="0" u="none" strike="noStrike" cap="none" dirty="0">
                 <a:solidFill>
                   <a:srgbClr val="DFBB64"/>
                 </a:solidFill>
@@ -23945,7 +23871,7 @@
               </a:rPr>
               <a:t>Returning functions - functions may also return values back along with the control, to the caller.</a:t>
             </a:r>
-            <a:endParaRPr sz="2400" b="0" i="0" u="none" strike="noStrike" cap="none">
+            <a:endParaRPr sz="2400" b="0" i="0" u="none" strike="noStrike" cap="none" dirty="0">
               <a:solidFill>
                 <a:srgbClr val="DFBB64"/>
               </a:solidFill>
@@ -23973,7 +23899,7 @@
               <a:buFont typeface="Arial" panose="020B0604020202020204"/>
               <a:buNone/>
             </a:pPr>
-            <a:endParaRPr sz="2400" b="0" i="0" u="none" strike="noStrike" cap="none">
+            <a:endParaRPr sz="2400" b="0" i="0" u="none" strike="noStrike" cap="none" dirty="0">
               <a:solidFill>
                 <a:srgbClr val="DFBB64"/>
               </a:solidFill>
@@ -24002,7 +23928,7 @@
               <a:buChar char="•"/>
             </a:pPr>
             <a:r>
-              <a:rPr lang="en-US" sz="2400" b="0" i="0" u="none" strike="noStrike" cap="none">
+              <a:rPr lang="en-US" sz="2400" b="0" i="0" u="none" strike="noStrike" cap="none" dirty="0" err="1">
                 <a:solidFill>
                   <a:srgbClr val="DFBB64"/>
                 </a:solidFill>
@@ -24011,9 +23937,45 @@
                 <a:cs typeface="Calibri" panose="020F0502020204030204"/>
                 <a:sym typeface="Calibri" panose="020F0502020204030204"/>
               </a:rPr>
-              <a:t>Parameterised functions - Parameters are a mechanism to pass values between the function.we can pass more than one parameter or what our object we want. But to receive, we must define data type.</a:t>
+              <a:t>Parameterised</a:t>
             </a:r>
-            <a:endParaRPr sz="2400" b="0" i="0" u="none" strike="noStrike" cap="none">
+            <a:r>
+              <a:rPr lang="en-US" sz="2400" b="0" i="0" u="none" strike="noStrike" cap="none" dirty="0">
+                <a:solidFill>
+                  <a:srgbClr val="DFBB64"/>
+                </a:solidFill>
+                <a:latin typeface="Calibri" panose="020F0502020204030204"/>
+                <a:ea typeface="Calibri" panose="020F0502020204030204"/>
+                <a:cs typeface="Calibri" panose="020F0502020204030204"/>
+                <a:sym typeface="Calibri" panose="020F0502020204030204"/>
+              </a:rPr>
+              <a:t> functions - Parameters are a mechanism to pass values between the </a:t>
+            </a:r>
+            <a:r>
+              <a:rPr lang="en-US" sz="2400" b="0" i="0" u="none" strike="noStrike" cap="none" dirty="0" err="1">
+                <a:solidFill>
+                  <a:srgbClr val="DFBB64"/>
+                </a:solidFill>
+                <a:latin typeface="Calibri" panose="020F0502020204030204"/>
+                <a:ea typeface="Calibri" panose="020F0502020204030204"/>
+                <a:cs typeface="Calibri" panose="020F0502020204030204"/>
+                <a:sym typeface="Calibri" panose="020F0502020204030204"/>
+              </a:rPr>
+              <a:t>function.we</a:t>
+            </a:r>
+            <a:r>
+              <a:rPr lang="en-US" sz="2400" b="0" i="0" u="none" strike="noStrike" cap="none" dirty="0">
+                <a:solidFill>
+                  <a:srgbClr val="DFBB64"/>
+                </a:solidFill>
+                <a:latin typeface="Calibri" panose="020F0502020204030204"/>
+                <a:ea typeface="Calibri" panose="020F0502020204030204"/>
+                <a:cs typeface="Calibri" panose="020F0502020204030204"/>
+                <a:sym typeface="Calibri" panose="020F0502020204030204"/>
+              </a:rPr>
+              <a:t> can pass more than one parameter or what our object we want. But to receive, we must define data type.</a:t>
+            </a:r>
+            <a:endParaRPr sz="2400" b="0" i="0" u="none" strike="noStrike" cap="none" dirty="0">
               <a:solidFill>
                 <a:srgbClr val="DFBB64"/>
               </a:solidFill>
@@ -24032,7 +23994,7 @@
           <p:nvPr/>
         </p:nvPicPr>
         <p:blipFill rotWithShape="1">
-          <a:blip r:embed="rId1"/>
+          <a:blip r:embed="rId3"/>
           <a:srcRect t="3346"/>
           <a:stretch>
             <a:fillRect/>
@@ -24059,7 +24021,7 @@
           <p:nvPr/>
         </p:nvPicPr>
         <p:blipFill rotWithShape="1">
-          <a:blip r:embed="rId2"/>
+          <a:blip r:embed="rId4"/>
           <a:srcRect/>
           <a:stretch>
             <a:fillRect/>
@@ -24084,13 +24046,13 @@
   <p:clrMapOvr>
     <a:masterClrMapping/>
   </p:clrMapOvr>
-  <mc:AlternateContent xmlns:mc="http://schemas.openxmlformats.org/markup-compatibility/2006">
-    <mc:Choice xmlns:p14="http://schemas.microsoft.com/office/powerpoint/2010/main" Requires="p14">
+  <mc:AlternateContent xmlns:mc="http://schemas.openxmlformats.org/markup-compatibility/2006" xmlns:p14="http://schemas.microsoft.com/office/powerpoint/2010/main">
+    <mc:Choice Requires="p14">
       <p:transition spd="slow" p14:dur="1500">
         <p:split orient="vert" dir="in"/>
       </p:transition>
     </mc:Choice>
-    <mc:Fallback>
+    <mc:Fallback xmlns="">
       <p:transition spd="slow">
         <p:split orient="vert" dir="in"/>
       </p:transition>
@@ -24213,14 +24175,14 @@
                 </p:childTnLst>
               </p:cTn>
               <p:prevCondLst>
-                <p:cond evt="onPrev">
+                <p:cond evt="onPrev" delay="0">
                   <p:tgtEl>
                     <p:sldTgt/>
                   </p:tgtEl>
                 </p:cond>
               </p:prevCondLst>
               <p:nextCondLst>
-                <p:cond evt="onNext">
+                <p:cond evt="onNext" delay="0">
                   <p:tgtEl>
                     <p:sldTgt/>
                   </p:tgtEl>
@@ -24240,7 +24202,7 @@
   <p:cSld>
     <p:spTree>
       <p:nvGrpSpPr>
-        <p:cNvPr id="129" name="Shape 129"/>
+        <p:cNvPr id="1" name="Shape 129"/>
         <p:cNvGrpSpPr/>
         <p:nvPr/>
       </p:nvGrpSpPr>
@@ -24423,7 +24385,7 @@
               <a:buChar char="Ø"/>
             </a:pPr>
             <a:r>
-              <a:rPr lang="en-US" sz="2400" b="1" i="0" u="none" strike="noStrike" cap="none">
+              <a:rPr lang="en-US" sz="2400" b="1" i="0" u="none" strike="noStrike" cap="none" dirty="0">
                 <a:solidFill>
                   <a:srgbClr val="DFBB64"/>
                 </a:solidFill>
@@ -24435,7 +24397,7 @@
               <a:t>Optional positional parameter</a:t>
             </a:r>
             <a:r>
-              <a:rPr lang="en-US" sz="2400" b="0" i="0" u="none" strike="noStrike" cap="none">
+              <a:rPr lang="en-US" sz="2400" b="0" i="0" u="none" strike="noStrike" cap="none" dirty="0">
                 <a:solidFill>
                   <a:srgbClr val="DFBB64"/>
                 </a:solidFill>
@@ -24446,7 +24408,7 @@
               </a:rPr>
               <a:t> - To specify optional positional parameters, use square [] brackets</a:t>
             </a:r>
-            <a:endParaRPr sz="2400" b="0" i="0" u="none" strike="noStrike" cap="none">
+            <a:endParaRPr sz="2400" b="0" i="0" u="none" strike="noStrike" cap="none" dirty="0">
               <a:solidFill>
                 <a:srgbClr val="DFBB64"/>
               </a:solidFill>
@@ -24474,7 +24436,7 @@
               <a:buFont typeface="Calibri" panose="020F0502020204030204"/>
               <a:buNone/>
             </a:pPr>
-            <a:endParaRPr sz="2400" b="0" i="0" u="none" strike="noStrike" cap="none">
+            <a:endParaRPr sz="2400" b="0" i="0" u="none" strike="noStrike" cap="none" dirty="0">
               <a:solidFill>
                 <a:srgbClr val="DFBB64"/>
               </a:solidFill>
@@ -24503,7 +24465,7 @@
               <a:buChar char="Ø"/>
             </a:pPr>
             <a:r>
-              <a:rPr lang="en-US" sz="2400" b="1" i="0" u="none" strike="noStrike" cap="none">
+              <a:rPr lang="en-US" sz="2400" b="1" i="0" u="none" strike="noStrike" cap="none" dirty="0">
                 <a:solidFill>
                   <a:srgbClr val="DFBB64"/>
                 </a:solidFill>
@@ -24515,7 +24477,7 @@
               <a:t>Optional named parameter</a:t>
             </a:r>
             <a:r>
-              <a:rPr lang="en-US" sz="2400" b="0" i="0" u="none" strike="noStrike" cap="none">
+              <a:rPr lang="en-US" sz="2400" b="0" i="0" u="none" strike="noStrike" cap="none" dirty="0">
                 <a:solidFill>
                   <a:srgbClr val="DFBB64"/>
                 </a:solidFill>
@@ -24526,7 +24488,7 @@
               </a:rPr>
               <a:t> - Unlike positional parameters, the parameter's name must be specified while the value is being passed. Curly brace {} can be used to specify optional named parameters.</a:t>
             </a:r>
-            <a:endParaRPr sz="2400" b="0" i="0" u="none" strike="noStrike" cap="none">
+            <a:endParaRPr sz="2400" b="0" i="0" u="none" strike="noStrike" cap="none" dirty="0">
               <a:solidFill>
                 <a:srgbClr val="DFBB64"/>
               </a:solidFill>
@@ -24554,7 +24516,7 @@
               <a:buFont typeface="Calibri" panose="020F0502020204030204"/>
               <a:buNone/>
             </a:pPr>
-            <a:endParaRPr sz="2400" b="0" i="0" u="none" strike="noStrike" cap="none">
+            <a:endParaRPr sz="2400" b="0" i="0" u="none" strike="noStrike" cap="none" dirty="0">
               <a:solidFill>
                 <a:srgbClr val="DFBB64"/>
               </a:solidFill>
@@ -24583,7 +24545,7 @@
               <a:buChar char="Ø"/>
             </a:pPr>
             <a:r>
-              <a:rPr lang="en-US" sz="2400" b="1" i="0" u="none" strike="noStrike" cap="none">
+              <a:rPr lang="en-US" sz="2400" b="1" i="0" u="none" strike="noStrike" cap="none" dirty="0">
                 <a:solidFill>
                   <a:srgbClr val="DFBB64"/>
                 </a:solidFill>
@@ -24595,7 +24557,7 @@
               <a:t>Optional parameter with default value </a:t>
             </a:r>
             <a:r>
-              <a:rPr lang="en-US" sz="2400" b="0" i="0" u="none" strike="noStrike" cap="none">
+              <a:rPr lang="en-US" sz="2400" b="0" i="0" u="none" strike="noStrike" cap="none" dirty="0">
                 <a:solidFill>
                   <a:srgbClr val="DFBB64"/>
                 </a:solidFill>
@@ -24606,7 +24568,7 @@
               </a:rPr>
               <a:t>- Function parameters can also be assigned values by default. However, such parameters can also be explicitly passed values.</a:t>
             </a:r>
-            <a:endParaRPr sz="2400" b="0" i="0" u="none" strike="noStrike" cap="none">
+            <a:endParaRPr sz="2400" b="0" i="0" u="none" strike="noStrike" cap="none" dirty="0">
               <a:solidFill>
                 <a:srgbClr val="DFBB64"/>
               </a:solidFill>
@@ -24805,7 +24767,7 @@
           <p:nvPr/>
         </p:nvPicPr>
         <p:blipFill rotWithShape="1">
-          <a:blip r:embed="rId1"/>
+          <a:blip r:embed="rId3"/>
           <a:srcRect/>
           <a:stretch>
             <a:fillRect/>
@@ -24832,7 +24794,7 @@
           <p:nvPr/>
         </p:nvPicPr>
         <p:blipFill rotWithShape="1">
-          <a:blip r:embed="rId2"/>
+          <a:blip r:embed="rId4"/>
           <a:srcRect/>
           <a:stretch>
             <a:fillRect/>
@@ -24859,7 +24821,7 @@
           <p:nvPr/>
         </p:nvPicPr>
         <p:blipFill rotWithShape="1">
-          <a:blip r:embed="rId3"/>
+          <a:blip r:embed="rId5"/>
           <a:srcRect/>
           <a:stretch>
             <a:fillRect/>
@@ -24884,13 +24846,13 @@
   <p:clrMapOvr>
     <a:masterClrMapping/>
   </p:clrMapOvr>
-  <mc:AlternateContent xmlns:mc="http://schemas.openxmlformats.org/markup-compatibility/2006">
-    <mc:Choice xmlns:p14="http://schemas.microsoft.com/office/powerpoint/2010/main" Requires="p14">
+  <mc:AlternateContent xmlns:mc="http://schemas.openxmlformats.org/markup-compatibility/2006" xmlns:p14="http://schemas.microsoft.com/office/powerpoint/2010/main">
+    <mc:Choice Requires="p14">
       <p:transition spd="slow" p14:dur="1500">
         <p:split orient="vert" dir="in"/>
       </p:transition>
     </mc:Choice>
-    <mc:Fallback>
+    <mc:Fallback xmlns="">
       <p:transition spd="slow">
         <p:split orient="vert" dir="in"/>
       </p:transition>
@@ -25101,14 +25063,14 @@
                 </p:childTnLst>
               </p:cTn>
               <p:prevCondLst>
-                <p:cond evt="onPrev">
+                <p:cond evt="onPrev" delay="0">
                   <p:tgtEl>
                     <p:sldTgt/>
                   </p:tgtEl>
                 </p:cond>
               </p:prevCondLst>
               <p:nextCondLst>
-                <p:cond evt="onNext">
+                <p:cond evt="onNext" delay="0">
                   <p:tgtEl>
                     <p:sldTgt/>
                   </p:tgtEl>
@@ -25399,6 +25361,8 @@
       </a:bgFillStyleLst>
     </a:fmtScheme>
   </a:themeElements>
+  <a:objectDefaults/>
+  <a:extraClrSchemeLst/>
   <a:extLst>
     <a:ext uri="{05A4C25C-085E-4340-85A3-A5531E510DB2}">
       <thm15:themeFamily xmlns:thm15="http://schemas.microsoft.com/office/thememl/2012/main" name="Office Theme" id="{62F939B6-93AF-4DB8-9C6B-D6C7DFDC589F}" vid="{4A3C46E8-61CC-4603-A589-7422A47A8E4A}"/>
@@ -25683,6 +25647,8 @@
       </a:bgFillStyleLst>
     </a:fmtScheme>
   </a:themeElements>
+  <a:objectDefaults/>
+  <a:extraClrSchemeLst/>
   <a:extLst>
     <a:ext uri="{05A4C25C-085E-4340-85A3-A5531E510DB2}">
       <thm15:themeFamily xmlns:thm15="http://schemas.microsoft.com/office/thememl/2012/main" name="Office Theme" id="{62F939B6-93AF-4DB8-9C6B-D6C7DFDC589F}" vid="{4A3C46E8-61CC-4603-A589-7422A47A8E4A}"/>

--- a/flutter/Module 3 Dart Foundation/Chapter 2/PPT/Chap 2-A Comprehensive Guide to Dart Programming.pptx
+++ b/flutter/Module 3 Dart Foundation/Chapter 2/PPT/Chap 2-A Comprehensive Guide to Dart Programming.pptx
@@ -9386,7 +9386,7 @@
         </p:nvSpPr>
         <p:spPr>
           <a:xfrm>
-            <a:off x="0" y="0"/>
+            <a:off x="0" y="-29496"/>
             <a:ext cx="12192000" cy="6858000"/>
           </a:xfrm>
           <a:prstGeom prst="rect">
@@ -9549,7 +9549,7 @@
               <a:buNone/>
             </a:pPr>
             <a:r>
-              <a:rPr lang="en-US" sz="2800" b="0" i="0" u="none" strike="noStrike" cap="none">
+              <a:rPr lang="en-US" sz="2800" b="0" i="0" u="none" strike="noStrike" cap="none" dirty="0">
                 <a:solidFill>
                   <a:srgbClr val="DFBB64"/>
                 </a:solidFill>
@@ -9560,7 +9560,7 @@
               </a:rPr>
               <a:t>The keyword this refers to the current instance of the class.</a:t>
             </a:r>
-            <a:endParaRPr sz="2800" b="0" i="0" u="none" strike="noStrike" cap="none">
+            <a:endParaRPr sz="2800" b="0" i="0" u="none" strike="noStrike" cap="none" dirty="0">
               <a:solidFill>
                 <a:srgbClr val="DFBB64"/>
               </a:solidFill>
@@ -9588,7 +9588,7 @@
               <a:buFont typeface="Calibri" panose="020F0502020204030204"/>
               <a:buNone/>
             </a:pPr>
-            <a:endParaRPr sz="2800" b="0" i="0" u="none" strike="noStrike" cap="none">
+            <a:endParaRPr sz="2800" b="0" i="0" u="none" strike="noStrike" cap="none" dirty="0">
               <a:solidFill>
                 <a:srgbClr val="DFBB64"/>
               </a:solidFill>
@@ -9617,7 +9617,7 @@
               <a:buNone/>
             </a:pPr>
             <a:r>
-              <a:rPr lang="en-US" sz="2800" b="0" i="0" u="none" strike="noStrike" cap="none">
+              <a:rPr lang="en-US" sz="2800" b="0" i="0" u="none" strike="noStrike" cap="none" dirty="0">
                 <a:solidFill>
                   <a:srgbClr val="DFBB64"/>
                 </a:solidFill>
@@ -9628,7 +9628,7 @@
               </a:rPr>
               <a:t>In the example, we have two string values with name str,</a:t>
             </a:r>
-            <a:endParaRPr sz="2800" b="0" i="0" u="none" strike="noStrike" cap="none">
+            <a:endParaRPr sz="2800" b="0" i="0" u="none" strike="noStrike" cap="none" dirty="0">
               <a:solidFill>
                 <a:srgbClr val="DFBB64"/>
               </a:solidFill>
@@ -9656,7 +9656,7 @@
               <a:buFont typeface="Calibri" panose="020F0502020204030204"/>
               <a:buNone/>
             </a:pPr>
-            <a:endParaRPr sz="2800" b="0" i="0" u="none" strike="noStrike" cap="none">
+            <a:endParaRPr sz="2800" b="0" i="0" u="none" strike="noStrike" cap="none" dirty="0">
               <a:solidFill>
                 <a:srgbClr val="DFBB64"/>
               </a:solidFill>
@@ -9685,7 +9685,7 @@
               <a:buNone/>
             </a:pPr>
             <a:r>
-              <a:rPr lang="en-US" sz="2000" b="0" i="0" u="none" strike="noStrike" cap="none">
+              <a:rPr lang="en-US" sz="2000" b="0" i="0" u="none" strike="noStrike" cap="none" dirty="0">
                 <a:solidFill>
                   <a:srgbClr val="DFBB64"/>
                 </a:solidFill>
@@ -9696,7 +9696,7 @@
               </a:rPr>
               <a:t>One already defined in the class</a:t>
             </a:r>
-            <a:endParaRPr sz="2000" b="0" i="0" u="none" strike="noStrike" cap="none">
+            <a:endParaRPr sz="2000" b="0" i="0" u="none" strike="noStrike" cap="none" dirty="0">
               <a:solidFill>
                 <a:srgbClr val="DFBB64"/>
               </a:solidFill>
@@ -9725,7 +9725,7 @@
               <a:buNone/>
             </a:pPr>
             <a:r>
-              <a:rPr lang="en-US" sz="2000" b="0" i="0" u="none" strike="noStrike" cap="none">
+              <a:rPr lang="en-US" sz="2000" b="0" i="0" u="none" strike="noStrike" cap="none" dirty="0">
                 <a:solidFill>
                   <a:srgbClr val="DFBB64"/>
                 </a:solidFill>
@@ -9736,7 +9736,7 @@
               </a:rPr>
               <a:t>Second is received from the parameter</a:t>
             </a:r>
-            <a:endParaRPr sz="2000" b="0" i="0" u="none" strike="noStrike" cap="none">
+            <a:endParaRPr sz="2000" b="0" i="0" u="none" strike="noStrike" cap="none" dirty="0">
               <a:solidFill>
                 <a:srgbClr val="DFBB64"/>
               </a:solidFill>
@@ -9764,7 +9764,7 @@
               <a:buFont typeface="Calibri" panose="020F0502020204030204"/>
               <a:buNone/>
             </a:pPr>
-            <a:endParaRPr sz="2000" b="0" i="0" u="none" strike="noStrike" cap="none">
+            <a:endParaRPr sz="2000" b="0" i="0" u="none" strike="noStrike" cap="none" dirty="0">
               <a:solidFill>
                 <a:srgbClr val="DFBB64"/>
               </a:solidFill>
@@ -9793,7 +9793,7 @@
               <a:buNone/>
             </a:pPr>
             <a:r>
-              <a:rPr lang="en-US" sz="2800" b="0" i="0" u="none" strike="noStrike" cap="none">
+              <a:rPr lang="en-US" sz="2800" b="0" i="0" u="none" strike="noStrike" cap="none" dirty="0">
                 <a:solidFill>
                   <a:srgbClr val="DFBB64"/>
                 </a:solidFill>
@@ -9804,7 +9804,7 @@
               </a:rPr>
               <a:t>By only using this keyword we printed the value from the class.</a:t>
             </a:r>
-            <a:endParaRPr sz="2800" b="0" i="0" u="none" strike="noStrike" cap="none">
+            <a:endParaRPr sz="2800" b="0" i="0" u="none" strike="noStrike" cap="none" dirty="0">
               <a:solidFill>
                 <a:srgbClr val="DFBB64"/>
               </a:solidFill>
@@ -10801,7 +10801,7 @@
         </p:blipFill>
         <p:spPr>
           <a:xfrm>
-            <a:off x="7926070" y="540385"/>
+            <a:off x="7926070" y="560049"/>
             <a:ext cx="3827780" cy="5965825"/>
           </a:xfrm>
           <a:prstGeom prst="rect">
@@ -13059,7 +13059,7 @@
               <a:buChar char="⮚"/>
             </a:pPr>
             <a:r>
-              <a:rPr lang="en-US" sz="2800" b="0" i="0" u="none" strike="noStrike" cap="none">
+              <a:rPr lang="en-US" sz="2800" b="0" i="0" u="none" strike="noStrike" cap="none" dirty="0">
                 <a:solidFill>
                   <a:srgbClr val="DFBB64"/>
                 </a:solidFill>
@@ -13070,7 +13070,7 @@
               </a:rPr>
               <a:t>Abstract Method</a:t>
             </a:r>
-            <a:endParaRPr sz="2800" b="0" i="0" u="none" strike="noStrike" cap="none">
+            <a:endParaRPr sz="2800" b="0" i="0" u="none" strike="noStrike" cap="none" dirty="0">
               <a:solidFill>
                 <a:srgbClr val="DFBB64"/>
               </a:solidFill>
@@ -13099,7 +13099,7 @@
               <a:buChar char="•"/>
             </a:pPr>
             <a:r>
-              <a:rPr lang="en-US" sz="2400" b="0" i="0" u="none" strike="noStrike" cap="none">
+              <a:rPr lang="en-US" sz="2400" b="0" i="0" u="none" strike="noStrike" cap="none" dirty="0">
                 <a:solidFill>
                   <a:srgbClr val="DFBB64"/>
                 </a:solidFill>
@@ -13110,7 +13110,7 @@
               </a:rPr>
               <a:t>To make a method abstract, use semicolon (;)Instead of method body</a:t>
             </a:r>
-            <a:endParaRPr sz="2400" b="0" i="0" u="none" strike="noStrike" cap="none">
+            <a:endParaRPr sz="2400" b="0" i="0" u="none" strike="noStrike" cap="none" dirty="0">
               <a:solidFill>
                 <a:srgbClr val="DFBB64"/>
               </a:solidFill>
@@ -13139,7 +13139,7 @@
               <a:buChar char="•"/>
             </a:pPr>
             <a:r>
-              <a:rPr lang="en-US" sz="2400" b="0" i="0" u="none" strike="noStrike" cap="none">
+              <a:rPr lang="en-US" sz="2400" b="0" i="0" u="none" strike="noStrike" cap="none" dirty="0">
                 <a:solidFill>
                   <a:srgbClr val="DFBB64"/>
                 </a:solidFill>
@@ -13150,7 +13150,7 @@
               </a:rPr>
               <a:t>Abstract method can only exit with Abstract class</a:t>
             </a:r>
-            <a:endParaRPr sz="2400" b="0" i="0" u="none" strike="noStrike" cap="none">
+            <a:endParaRPr sz="2400" b="0" i="0" u="none" strike="noStrike" cap="none" dirty="0">
               <a:solidFill>
                 <a:srgbClr val="DFBB64"/>
               </a:solidFill>
@@ -13179,7 +13179,7 @@
               <a:buChar char="•"/>
             </a:pPr>
             <a:r>
-              <a:rPr lang="en-US" sz="2400" b="0" i="0" u="none" strike="noStrike" cap="none">
+              <a:rPr lang="en-US" sz="2400" b="0" i="0" u="none" strike="noStrike" cap="none" dirty="0">
                 <a:solidFill>
                   <a:srgbClr val="DFBB64"/>
                 </a:solidFill>
@@ -13190,7 +13190,7 @@
               </a:rPr>
               <a:t>You need to override Abstract methods in subclass</a:t>
             </a:r>
-            <a:endParaRPr sz="2400" b="0" i="0" u="none" strike="noStrike" cap="none">
+            <a:endParaRPr sz="2400" b="0" i="0" u="none" strike="noStrike" cap="none" dirty="0">
               <a:solidFill>
                 <a:srgbClr val="DFBB64"/>
               </a:solidFill>
@@ -13218,7 +13218,7 @@
               <a:buFont typeface="Arial" panose="020B0604020202020204"/>
               <a:buNone/>
             </a:pPr>
-            <a:endParaRPr sz="2800" b="0" i="0" u="none" strike="noStrike" cap="none">
+            <a:endParaRPr sz="2800" b="0" i="0" u="none" strike="noStrike" cap="none" dirty="0">
               <a:solidFill>
                 <a:srgbClr val="DFBB64"/>
               </a:solidFill>
@@ -13247,7 +13247,7 @@
               <a:buChar char="⮚"/>
             </a:pPr>
             <a:r>
-              <a:rPr lang="en-US" sz="2800" b="0" i="0" u="none" strike="noStrike" cap="none">
+              <a:rPr lang="en-US" sz="2800" b="0" i="0" u="none" strike="noStrike" cap="none" dirty="0">
                 <a:solidFill>
                   <a:srgbClr val="DFBB64"/>
                 </a:solidFill>
@@ -13258,7 +13258,7 @@
               </a:rPr>
               <a:t>Abstract Class</a:t>
             </a:r>
-            <a:endParaRPr sz="2800" b="0" i="0" u="none" strike="noStrike" cap="none">
+            <a:endParaRPr sz="2800" b="0" i="0" u="none" strike="noStrike" cap="none" dirty="0">
               <a:solidFill>
                 <a:srgbClr val="DFBB64"/>
               </a:solidFill>
@@ -13287,7 +13287,7 @@
               <a:buChar char="•"/>
             </a:pPr>
             <a:r>
-              <a:rPr lang="en-US" sz="2400" b="0" i="0" u="none" strike="noStrike" cap="none">
+              <a:rPr lang="en-US" sz="2400" b="0" i="0" u="none" strike="noStrike" cap="none" dirty="0">
                 <a:solidFill>
                   <a:srgbClr val="DFBB64"/>
                 </a:solidFill>
@@ -13298,7 +13298,7 @@
               </a:rPr>
               <a:t>Use abstract keyword to declare Abstract Class.</a:t>
             </a:r>
-            <a:endParaRPr sz="2400" b="0" i="0" u="none" strike="noStrike" cap="none">
+            <a:endParaRPr sz="2400" b="0" i="0" u="none" strike="noStrike" cap="none" dirty="0">
               <a:solidFill>
                 <a:srgbClr val="DFBB64"/>
               </a:solidFill>
@@ -13327,7 +13327,7 @@
               <a:buChar char="•"/>
             </a:pPr>
             <a:r>
-              <a:rPr lang="en-US" sz="2400" b="0" i="0" u="none" strike="noStrike" cap="none">
+              <a:rPr lang="en-US" sz="2400" b="0" i="0" u="none" strike="noStrike" cap="none" dirty="0">
                 <a:solidFill>
                   <a:srgbClr val="DFBB64"/>
                 </a:solidFill>
@@ -13338,7 +13338,7 @@
               </a:rPr>
               <a:t>Abstract class can have Abstract Methods, Normal Methods and Instance Variables as well</a:t>
             </a:r>
-            <a:endParaRPr sz="2400" b="0" i="0" u="none" strike="noStrike" cap="none">
+            <a:endParaRPr sz="2400" b="0" i="0" u="none" strike="noStrike" cap="none" dirty="0">
               <a:solidFill>
                 <a:srgbClr val="DFBB64"/>
               </a:solidFill>
@@ -13367,7 +13367,7 @@
               <a:buChar char="•"/>
             </a:pPr>
             <a:r>
-              <a:rPr lang="en-US" sz="2400" b="0" i="0" u="none" strike="noStrike" cap="none">
+              <a:rPr lang="en-US" sz="2400" b="0" i="0" u="none" strike="noStrike" cap="none" dirty="0">
                 <a:solidFill>
                   <a:srgbClr val="DFBB64"/>
                 </a:solidFill>
@@ -13378,7 +13378,7 @@
               </a:rPr>
               <a:t>The Abstract Class cannot be instantiated, you cannot create objects. But can be inherited</a:t>
             </a:r>
-            <a:endParaRPr sz="2400" b="0" i="0" u="none" strike="noStrike" cap="none">
+            <a:endParaRPr sz="2400" b="0" i="0" u="none" strike="noStrike" cap="none" dirty="0">
               <a:solidFill>
                 <a:srgbClr val="DFBB64"/>
               </a:solidFill>
@@ -19996,55 +19996,7 @@
                 <a:cs typeface="Calibri" panose="020F0502020204030204"/>
                 <a:sym typeface="Calibri" panose="020F0502020204030204"/>
               </a:rPr>
-              <a:t>A class in terms of Oops is the blueprint of </a:t>
-            </a:r>
-            <a:r>
-              <a:rPr lang="en-US" sz="2400" b="0" i="0" u="none" strike="noStrike" cap="none" dirty="0" err="1">
-                <a:solidFill>
-                  <a:srgbClr val="DFBB64"/>
-                </a:solidFill>
-                <a:latin typeface="Calibri" panose="020F0502020204030204"/>
-                <a:ea typeface="Calibri" panose="020F0502020204030204"/>
-                <a:cs typeface="Calibri" panose="020F0502020204030204"/>
-                <a:sym typeface="Calibri" panose="020F0502020204030204"/>
-              </a:rPr>
-              <a:t>objects.But</a:t>
-            </a:r>
-            <a:r>
-              <a:rPr lang="en-US" sz="2400" b="0" i="0" u="none" strike="noStrike" cap="none" dirty="0">
-                <a:solidFill>
-                  <a:srgbClr val="DFBB64"/>
-                </a:solidFill>
-                <a:latin typeface="Calibri" panose="020F0502020204030204"/>
-                <a:ea typeface="Calibri" panose="020F0502020204030204"/>
-                <a:cs typeface="Calibri" panose="020F0502020204030204"/>
-                <a:sym typeface="Calibri" panose="020F0502020204030204"/>
-              </a:rPr>
-              <a:t> compared to other languages, class have less importance in </a:t>
-            </a:r>
-            <a:r>
-              <a:rPr lang="en-US" sz="2400" b="0" i="0" u="none" strike="noStrike" cap="none" dirty="0" err="1">
-                <a:solidFill>
-                  <a:srgbClr val="DFBB64"/>
-                </a:solidFill>
-                <a:latin typeface="Calibri" panose="020F0502020204030204"/>
-                <a:ea typeface="Calibri" panose="020F0502020204030204"/>
-                <a:cs typeface="Calibri" panose="020F0502020204030204"/>
-                <a:sym typeface="Calibri" panose="020F0502020204030204"/>
-              </a:rPr>
-              <a:t>dart.Class</a:t>
-            </a:r>
-            <a:r>
-              <a:rPr lang="en-US" sz="2400" b="0" i="0" u="none" strike="noStrike" cap="none" dirty="0">
-                <a:solidFill>
-                  <a:srgbClr val="DFBB64"/>
-                </a:solidFill>
-                <a:latin typeface="Calibri" panose="020F0502020204030204"/>
-                <a:ea typeface="Calibri" panose="020F0502020204030204"/>
-                <a:cs typeface="Calibri" panose="020F0502020204030204"/>
-                <a:sym typeface="Calibri" panose="020F0502020204030204"/>
-              </a:rPr>
-              <a:t> can be used for declaring, allocating space, storing, sharing objects.</a:t>
+              <a:t>A class in terms of Oops is the blueprint of objects . But compared to other languages, class have less importance in dart. Class can be used for declaring, allocating space, storing, sharing objects.</a:t>
             </a:r>
             <a:endParaRPr sz="2400" b="0" i="0" u="none" strike="noStrike" cap="none" dirty="0">
               <a:solidFill>
@@ -20944,7 +20896,7 @@
         </p:nvSpPr>
         <p:spPr>
           <a:xfrm>
-            <a:off x="0" y="0"/>
+            <a:off x="0" y="19664"/>
             <a:ext cx="12192000" cy="6858000"/>
           </a:xfrm>
           <a:prstGeom prst="rect">
@@ -22379,7 +22331,7 @@
         </p:nvSpPr>
         <p:spPr>
           <a:xfrm>
-            <a:off x="304165" y="1407795"/>
+            <a:off x="401320" y="1365885"/>
             <a:ext cx="6163310" cy="995045"/>
           </a:xfrm>
           <a:prstGeom prst="rect">
@@ -22414,7 +22366,7 @@
               <a:buNone/>
             </a:pPr>
             <a:r>
-              <a:rPr sz="2400" b="0" i="0" u="none" strike="noStrike" cap="none">
+              <a:rPr sz="2400" b="0" i="0" u="none" strike="noStrike" cap="none" dirty="0">
                 <a:solidFill>
                   <a:srgbClr val="DFBB64"/>
                 </a:solidFill>
@@ -22444,7 +22396,7 @@
               <a:buFont typeface="Calibri" panose="020F0502020204030204"/>
               <a:buNone/>
             </a:pPr>
-            <a:endParaRPr sz="2400" b="0" i="0" u="none" strike="noStrike" cap="none">
+            <a:endParaRPr sz="2400" b="0" i="0" u="none" strike="noStrike" cap="none" dirty="0">
               <a:solidFill>
                 <a:srgbClr val="DFBB64"/>
               </a:solidFill>
@@ -22472,7 +22424,7 @@
               <a:buFont typeface="Calibri" panose="020F0502020204030204"/>
               <a:buNone/>
             </a:pPr>
-            <a:endParaRPr sz="2400" b="0" i="0" u="none" strike="noStrike" cap="none">
+            <a:endParaRPr sz="2400" b="0" i="0" u="none" strike="noStrike" cap="none" dirty="0">
               <a:solidFill>
                 <a:srgbClr val="DFBB64"/>
               </a:solidFill>
@@ -22806,7 +22758,7 @@
         </p:nvSpPr>
         <p:spPr>
           <a:xfrm>
-            <a:off x="0" y="20320"/>
+            <a:off x="0" y="30152"/>
             <a:ext cx="12192000" cy="6858000"/>
           </a:xfrm>
           <a:prstGeom prst="rect">
@@ -23949,31 +23901,7 @@
                 <a:cs typeface="Calibri" panose="020F0502020204030204"/>
                 <a:sym typeface="Calibri" panose="020F0502020204030204"/>
               </a:rPr>
-              <a:t> functions - Parameters are a mechanism to pass values between the </a:t>
-            </a:r>
-            <a:r>
-              <a:rPr lang="en-US" sz="2400" b="0" i="0" u="none" strike="noStrike" cap="none" dirty="0" err="1">
-                <a:solidFill>
-                  <a:srgbClr val="DFBB64"/>
-                </a:solidFill>
-                <a:latin typeface="Calibri" panose="020F0502020204030204"/>
-                <a:ea typeface="Calibri" panose="020F0502020204030204"/>
-                <a:cs typeface="Calibri" panose="020F0502020204030204"/>
-                <a:sym typeface="Calibri" panose="020F0502020204030204"/>
-              </a:rPr>
-              <a:t>function.we</a:t>
-            </a:r>
-            <a:r>
-              <a:rPr lang="en-US" sz="2400" b="0" i="0" u="none" strike="noStrike" cap="none" dirty="0">
-                <a:solidFill>
-                  <a:srgbClr val="DFBB64"/>
-                </a:solidFill>
-                <a:latin typeface="Calibri" panose="020F0502020204030204"/>
-                <a:ea typeface="Calibri" panose="020F0502020204030204"/>
-                <a:cs typeface="Calibri" panose="020F0502020204030204"/>
-                <a:sym typeface="Calibri" panose="020F0502020204030204"/>
-              </a:rPr>
-              <a:t> can pass more than one parameter or what our object we want. But to receive, we must define data type.</a:t>
+              <a:t> functions - Parameters are a mechanism to pass values between the function. we can pass more than one parameter or what our object we want. But to receive, we must define data type.</a:t>
             </a:r>
             <a:endParaRPr sz="2400" b="0" i="0" u="none" strike="noStrike" cap="none" dirty="0">
               <a:solidFill>
